--- a/004 Побочные эффекты выражений в Си.pptx
+++ b/004 Побочные эффекты выражений в Си.pptx
@@ -15,21 +15,21 @@
     <p:sldId id="340" r:id="rId9"/>
     <p:sldId id="341" r:id="rId10"/>
     <p:sldId id="342" r:id="rId11"/>
-    <p:sldId id="375" r:id="rId12"/>
-    <p:sldId id="488" r:id="rId13"/>
-    <p:sldId id="440" r:id="rId14"/>
-    <p:sldId id="447" r:id="rId15"/>
-    <p:sldId id="343" r:id="rId16"/>
-    <p:sldId id="450" r:id="rId17"/>
-    <p:sldId id="454" r:id="rId18"/>
-    <p:sldId id="355" r:id="rId19"/>
-    <p:sldId id="461" r:id="rId20"/>
-    <p:sldId id="465" r:id="rId21"/>
-    <p:sldId id="469" r:id="rId22"/>
-    <p:sldId id="473" r:id="rId23"/>
-    <p:sldId id="476" r:id="rId24"/>
-    <p:sldId id="377" r:id="rId25"/>
-    <p:sldId id="404" r:id="rId26"/>
+    <p:sldId id="489" r:id="rId12"/>
+    <p:sldId id="404" r:id="rId13"/>
+    <p:sldId id="375" r:id="rId14"/>
+    <p:sldId id="488" r:id="rId15"/>
+    <p:sldId id="440" r:id="rId16"/>
+    <p:sldId id="447" r:id="rId17"/>
+    <p:sldId id="343" r:id="rId18"/>
+    <p:sldId id="450" r:id="rId19"/>
+    <p:sldId id="454" r:id="rId20"/>
+    <p:sldId id="355" r:id="rId21"/>
+    <p:sldId id="461" r:id="rId22"/>
+    <p:sldId id="465" r:id="rId23"/>
+    <p:sldId id="469" r:id="rId24"/>
+    <p:sldId id="473" r:id="rId25"/>
+    <p:sldId id="476" r:id="rId26"/>
     <p:sldId id="258" r:id="rId27"/>
   </p:sldIdLst>
   <p:sldSz cx="12192000" cy="6858000"/>
@@ -3390,11 +3390,13 @@
         </p:nvSpPr>
         <p:spPr/>
         <p:txBody>
-          <a:bodyPr/>
+          <a:bodyPr>
+            <a:normAutofit/>
+          </a:bodyPr>
           <a:lstStyle/>
           <a:p>
             <a:r>
-              <a:rPr lang="ru-RU" dirty="0"/>
+              <a:rPr lang="ru-RU" sz="4400" dirty="0"/>
               <a:t>Побочные эффекты выражений в Си</a:t>
             </a:r>
           </a:p>
@@ -4178,6 +4180,392 @@
       </p:grpSpPr>
       <p:sp>
         <p:nvSpPr>
+          <p:cNvPr id="2" name="Title 1">
+            <a:extLst>
+              <a:ext uri="{FF2B5EF4-FFF2-40B4-BE49-F238E27FC236}">
+                <a16:creationId xmlns:a16="http://schemas.microsoft.com/office/drawing/2014/main" id="{B718CFA9-A3D3-9248-CC65-6826BA3DB581}"/>
+              </a:ext>
+            </a:extLst>
+          </p:cNvPr>
+          <p:cNvSpPr>
+            <a:spLocks noGrp="1"/>
+          </p:cNvSpPr>
+          <p:nvPr>
+            <p:ph type="title"/>
+          </p:nvPr>
+        </p:nvSpPr>
+        <p:spPr/>
+        <p:txBody>
+          <a:bodyPr>
+            <a:normAutofit/>
+          </a:bodyPr>
+          <a:lstStyle/>
+          <a:p>
+            <a:r>
+              <a:rPr lang="ru-RU" sz="4000" dirty="0"/>
+              <a:t>Пропущено </a:t>
+            </a:r>
+            <a:r>
+              <a:rPr lang="en-US" sz="4000" dirty="0"/>
+              <a:t>≈ 15 </a:t>
+            </a:r>
+            <a:r>
+              <a:rPr lang="ru-RU" sz="4000" dirty="0"/>
+              <a:t>слайдов про операторы вида:</a:t>
+            </a:r>
+          </a:p>
+        </p:txBody>
+      </p:sp>
+      <p:sp>
+        <p:nvSpPr>
+          <p:cNvPr id="3" name="Content Placeholder 2">
+            <a:extLst>
+              <a:ext uri="{FF2B5EF4-FFF2-40B4-BE49-F238E27FC236}">
+                <a16:creationId xmlns:a16="http://schemas.microsoft.com/office/drawing/2014/main" id="{CC19EAFC-2683-3F20-079E-8D07B2ECF368}"/>
+              </a:ext>
+            </a:extLst>
+          </p:cNvPr>
+          <p:cNvSpPr>
+            <a:spLocks noGrp="1"/>
+          </p:cNvSpPr>
+          <p:nvPr>
+            <p:ph idx="1"/>
+          </p:nvPr>
+        </p:nvSpPr>
+        <p:spPr/>
+        <p:txBody>
+          <a:bodyPr>
+            <a:normAutofit lnSpcReduction="10000"/>
+          </a:bodyPr>
+          <a:lstStyle/>
+          <a:p>
+            <a:pPr fontAlgn="t">
+              <a:spcBef>
+                <a:spcPts val="0"/>
+              </a:spcBef>
+            </a:pPr>
+            <a:r>
+              <a:rPr lang="ru-RU" sz="2800" b="0" i="0" u="none" strike="noStrike" kern="1200" dirty="0">
+                <a:solidFill>
+                  <a:srgbClr val="000000"/>
+                </a:solidFill>
+                <a:effectLst/>
+                <a:ea typeface="Calibri" panose="020F0502020204030204" pitchFamily="34" charset="0"/>
+                <a:cs typeface="Calibri" panose="020F0502020204030204" pitchFamily="34" charset="0"/>
+              </a:rPr>
+              <a:t>Что требуется от типов операндов, как определяется тип результата</a:t>
+            </a:r>
+            <a:endParaRPr lang="ru-RU" sz="2800" b="0" i="0" u="none" strike="noStrike" dirty="0">
+              <a:effectLst/>
+              <a:ea typeface="Calibri" panose="020F0502020204030204" pitchFamily="34" charset="0"/>
+              <a:cs typeface="Calibri" panose="020F0502020204030204" pitchFamily="34" charset="0"/>
+            </a:endParaRPr>
+          </a:p>
+          <a:p>
+            <a:pPr fontAlgn="t">
+              <a:spcBef>
+                <a:spcPts val="0"/>
+              </a:spcBef>
+            </a:pPr>
+            <a:endParaRPr lang="ru-RU" dirty="0">
+              <a:solidFill>
+                <a:srgbClr val="000000"/>
+              </a:solidFill>
+              <a:ea typeface="Calibri" panose="020F0502020204030204" pitchFamily="34" charset="0"/>
+              <a:cs typeface="Calibri" panose="020F0502020204030204" pitchFamily="34" charset="0"/>
+            </a:endParaRPr>
+          </a:p>
+          <a:p>
+            <a:pPr fontAlgn="t">
+              <a:spcBef>
+                <a:spcPts val="0"/>
+              </a:spcBef>
+            </a:pPr>
+            <a:r>
+              <a:rPr lang="ru-RU" dirty="0">
+                <a:solidFill>
+                  <a:srgbClr val="000000"/>
+                </a:solidFill>
+                <a:ea typeface="Calibri" panose="020F0502020204030204" pitchFamily="34" charset="0"/>
+                <a:cs typeface="Calibri" panose="020F0502020204030204" pitchFamily="34" charset="0"/>
+              </a:rPr>
+              <a:t>В каком порядке вычисляются операнды</a:t>
+            </a:r>
+            <a:endParaRPr lang="ru-RU" b="0" i="0" u="none" strike="noStrike" dirty="0">
+              <a:effectLst/>
+              <a:ea typeface="Calibri" panose="020F0502020204030204" pitchFamily="34" charset="0"/>
+              <a:cs typeface="Calibri" panose="020F0502020204030204" pitchFamily="34" charset="0"/>
+            </a:endParaRPr>
+          </a:p>
+          <a:p>
+            <a:pPr fontAlgn="t">
+              <a:spcBef>
+                <a:spcPts val="0"/>
+              </a:spcBef>
+            </a:pPr>
+            <a:endParaRPr lang="ru-RU" sz="2800" b="0" i="0" u="none" strike="noStrike" kern="1200" dirty="0">
+              <a:solidFill>
+                <a:srgbClr val="000000"/>
+              </a:solidFill>
+              <a:effectLst/>
+              <a:ea typeface="Calibri" panose="020F0502020204030204" pitchFamily="34" charset="0"/>
+              <a:cs typeface="Calibri" panose="020F0502020204030204" pitchFamily="34" charset="0"/>
+            </a:endParaRPr>
+          </a:p>
+          <a:p>
+            <a:pPr fontAlgn="t">
+              <a:spcBef>
+                <a:spcPts val="0"/>
+              </a:spcBef>
+            </a:pPr>
+            <a:r>
+              <a:rPr lang="ru-RU" sz="2800" b="0" i="0" u="none" strike="noStrike" kern="1200" dirty="0">
+                <a:solidFill>
+                  <a:srgbClr val="000000"/>
+                </a:solidFill>
+                <a:effectLst/>
+                <a:ea typeface="Calibri" panose="020F0502020204030204" pitchFamily="34" charset="0"/>
+                <a:cs typeface="Calibri" panose="020F0502020204030204" pitchFamily="34" charset="0"/>
+              </a:rPr>
+              <a:t>Как вычисляется результат</a:t>
+            </a:r>
+            <a:endParaRPr lang="en-US" sz="2800" b="0" i="0" u="none" strike="noStrike" kern="1200" dirty="0">
+              <a:solidFill>
+                <a:srgbClr val="000000"/>
+              </a:solidFill>
+              <a:effectLst/>
+              <a:ea typeface="Calibri" panose="020F0502020204030204" pitchFamily="34" charset="0"/>
+              <a:cs typeface="Calibri" panose="020F0502020204030204" pitchFamily="34" charset="0"/>
+            </a:endParaRPr>
+          </a:p>
+          <a:p>
+            <a:pPr lvl="1" fontAlgn="t">
+              <a:spcBef>
+                <a:spcPts val="0"/>
+              </a:spcBef>
+            </a:pPr>
+            <a:r>
+              <a:rPr lang="en-US" b="0" i="0" u="none" strike="noStrike" kern="1200" baseline="0" dirty="0">
+                <a:solidFill>
+                  <a:srgbClr val="000000"/>
+                </a:solidFill>
+                <a:effectLst/>
+                <a:ea typeface="Calibri" panose="020F0502020204030204" pitchFamily="34" charset="0"/>
+                <a:cs typeface="Calibri" panose="020F0502020204030204" pitchFamily="34" charset="0"/>
+              </a:rPr>
+              <a:t>Well</a:t>
+            </a:r>
+            <a:r>
+              <a:rPr lang="ru-RU" b="0" i="0" u="none" strike="noStrike" kern="1200" baseline="0" dirty="0">
+                <a:solidFill>
+                  <a:srgbClr val="000000"/>
+                </a:solidFill>
+                <a:effectLst/>
+                <a:ea typeface="Calibri" panose="020F0502020204030204" pitchFamily="34" charset="0"/>
+                <a:cs typeface="Calibri" panose="020F0502020204030204" pitchFamily="34" charset="0"/>
+              </a:rPr>
+              <a:t>-</a:t>
+            </a:r>
+            <a:r>
+              <a:rPr lang="en-US" b="0" i="0" u="none" strike="noStrike" kern="1200" baseline="0" dirty="0">
+                <a:solidFill>
+                  <a:srgbClr val="000000"/>
+                </a:solidFill>
+                <a:effectLst/>
+                <a:ea typeface="Calibri" panose="020F0502020204030204" pitchFamily="34" charset="0"/>
+                <a:cs typeface="Calibri" panose="020F0502020204030204" pitchFamily="34" charset="0"/>
+              </a:rPr>
+              <a:t>defined</a:t>
+            </a:r>
+            <a:r>
+              <a:rPr lang="ru-RU" b="0" i="0" u="none" strike="noStrike" kern="1200" baseline="0" dirty="0">
+                <a:solidFill>
+                  <a:srgbClr val="000000"/>
+                </a:solidFill>
+                <a:effectLst/>
+                <a:ea typeface="Calibri" panose="020F0502020204030204" pitchFamily="34" charset="0"/>
+                <a:cs typeface="Calibri" panose="020F0502020204030204" pitchFamily="34" charset="0"/>
+              </a:rPr>
+              <a:t> (</a:t>
+            </a:r>
+            <a:r>
+              <a:rPr lang="en-US" b="0" i="0" u="none" strike="noStrike" kern="1200" baseline="0" dirty="0">
+                <a:solidFill>
+                  <a:srgbClr val="000000"/>
+                </a:solidFill>
+                <a:effectLst/>
+                <a:ea typeface="Calibri" panose="020F0502020204030204" pitchFamily="34" charset="0"/>
+                <a:cs typeface="Calibri" panose="020F0502020204030204" pitchFamily="34" charset="0"/>
+              </a:rPr>
+              <a:t>standard</a:t>
+            </a:r>
+            <a:r>
+              <a:rPr lang="ru-RU" b="0" i="0" u="none" strike="noStrike" kern="1200" baseline="0" dirty="0">
+                <a:solidFill>
+                  <a:srgbClr val="000000"/>
+                </a:solidFill>
+                <a:effectLst/>
+                <a:ea typeface="Calibri" panose="020F0502020204030204" pitchFamily="34" charset="0"/>
+                <a:cs typeface="Calibri" panose="020F0502020204030204" pitchFamily="34" charset="0"/>
+              </a:rPr>
+              <a:t>)</a:t>
+            </a:r>
+            <a:r>
+              <a:rPr lang="en-US" b="0" i="0" u="none" strike="noStrike" kern="1200" baseline="0" dirty="0">
+                <a:solidFill>
+                  <a:srgbClr val="000000"/>
+                </a:solidFill>
+                <a:effectLst/>
+                <a:ea typeface="Calibri" panose="020F0502020204030204" pitchFamily="34" charset="0"/>
+                <a:cs typeface="Calibri" panose="020F0502020204030204" pitchFamily="34" charset="0"/>
+              </a:rPr>
+              <a:t> behavior</a:t>
+            </a:r>
+            <a:endParaRPr lang="ru-RU" b="0" i="0" u="none" strike="noStrike" dirty="0">
+              <a:effectLst/>
+              <a:ea typeface="Calibri" panose="020F0502020204030204" pitchFamily="34" charset="0"/>
+              <a:cs typeface="Calibri" panose="020F0502020204030204" pitchFamily="34" charset="0"/>
+            </a:endParaRPr>
+          </a:p>
+          <a:p>
+            <a:pPr lvl="1">
+              <a:spcBef>
+                <a:spcPts val="0"/>
+              </a:spcBef>
+            </a:pPr>
+            <a:r>
+              <a:rPr lang="en-US" b="0" i="0" u="none" strike="noStrike" kern="1200" baseline="0" dirty="0">
+                <a:solidFill>
+                  <a:srgbClr val="000000"/>
+                </a:solidFill>
+                <a:effectLst/>
+                <a:ea typeface="Calibri" panose="020F0502020204030204" pitchFamily="34" charset="0"/>
+                <a:cs typeface="Calibri" panose="020F0502020204030204" pitchFamily="34" charset="0"/>
+              </a:rPr>
+              <a:t>Implementation-defined behavior</a:t>
+            </a:r>
+            <a:endParaRPr lang="ru-RU" b="0" i="0" u="none" strike="noStrike" dirty="0">
+              <a:effectLst/>
+              <a:ea typeface="Calibri" panose="020F0502020204030204" pitchFamily="34" charset="0"/>
+              <a:cs typeface="Calibri" panose="020F0502020204030204" pitchFamily="34" charset="0"/>
+            </a:endParaRPr>
+          </a:p>
+          <a:p>
+            <a:pPr lvl="1" fontAlgn="t">
+              <a:spcBef>
+                <a:spcPts val="0"/>
+              </a:spcBef>
+            </a:pPr>
+            <a:r>
+              <a:rPr lang="en-US" b="0" i="0" u="none" strike="noStrike" kern="1200" dirty="0">
+                <a:solidFill>
+                  <a:srgbClr val="000000"/>
+                </a:solidFill>
+                <a:effectLst/>
+                <a:ea typeface="Calibri" panose="020F0502020204030204" pitchFamily="34" charset="0"/>
+                <a:cs typeface="Calibri" panose="020F0502020204030204" pitchFamily="34" charset="0"/>
+              </a:rPr>
+              <a:t>Unspecified behavior</a:t>
+            </a:r>
+            <a:endParaRPr lang="ru-RU" b="0" i="0" u="none" strike="noStrike" dirty="0">
+              <a:effectLst/>
+              <a:ea typeface="Calibri" panose="020F0502020204030204" pitchFamily="34" charset="0"/>
+              <a:cs typeface="Calibri" panose="020F0502020204030204" pitchFamily="34" charset="0"/>
+            </a:endParaRPr>
+          </a:p>
+          <a:p>
+            <a:pPr lvl="1">
+              <a:spcBef>
+                <a:spcPts val="0"/>
+              </a:spcBef>
+            </a:pPr>
+            <a:r>
+              <a:rPr lang="en-US" b="0" i="0" u="none" strike="noStrike" kern="1200" baseline="0" dirty="0">
+                <a:solidFill>
+                  <a:srgbClr val="000000"/>
+                </a:solidFill>
+                <a:effectLst/>
+                <a:ea typeface="Calibri" panose="020F0502020204030204" pitchFamily="34" charset="0"/>
+                <a:cs typeface="Calibri" panose="020F0502020204030204" pitchFamily="34" charset="0"/>
+              </a:rPr>
+              <a:t>Undefined behavior</a:t>
+            </a:r>
+          </a:p>
+          <a:p>
+            <a:pPr fontAlgn="t">
+              <a:spcBef>
+                <a:spcPts val="0"/>
+              </a:spcBef>
+            </a:pPr>
+            <a:endParaRPr lang="ru-RU" sz="2800" b="0" i="0" u="none" strike="noStrike" kern="1200" dirty="0">
+              <a:solidFill>
+                <a:srgbClr val="000000"/>
+              </a:solidFill>
+              <a:effectLst/>
+              <a:ea typeface="Calibri" panose="020F0502020204030204" pitchFamily="34" charset="0"/>
+              <a:cs typeface="Calibri" panose="020F0502020204030204" pitchFamily="34" charset="0"/>
+            </a:endParaRPr>
+          </a:p>
+          <a:p>
+            <a:pPr fontAlgn="t">
+              <a:spcBef>
+                <a:spcPts val="0"/>
+              </a:spcBef>
+            </a:pPr>
+            <a:r>
+              <a:rPr lang="ru-RU" sz="2800" b="0" i="0" u="none" strike="noStrike" kern="1200" dirty="0">
+                <a:solidFill>
+                  <a:srgbClr val="000000"/>
+                </a:solidFill>
+                <a:effectLst/>
+                <a:ea typeface="Calibri" panose="020F0502020204030204" pitchFamily="34" charset="0"/>
+                <a:cs typeface="Calibri" panose="020F0502020204030204" pitchFamily="34" charset="0"/>
+              </a:rPr>
+              <a:t>Какие есть побочные эффекты</a:t>
+            </a:r>
+            <a:endParaRPr lang="ru-RU" sz="2800" b="0" i="0" u="none" strike="noStrike" dirty="0">
+              <a:effectLst/>
+              <a:ea typeface="Calibri" panose="020F0502020204030204" pitchFamily="34" charset="0"/>
+              <a:cs typeface="Calibri" panose="020F0502020204030204" pitchFamily="34" charset="0"/>
+            </a:endParaRPr>
+          </a:p>
+          <a:p>
+            <a:endParaRPr lang="ru-RU" dirty="0"/>
+          </a:p>
+        </p:txBody>
+      </p:sp>
+    </p:spTree>
+    <p:extLst>
+      <p:ext uri="{BB962C8B-B14F-4D97-AF65-F5344CB8AC3E}">
+        <p14:creationId xmlns:p14="http://schemas.microsoft.com/office/powerpoint/2010/main" val="1269740292"/>
+      </p:ext>
+    </p:extLst>
+  </p:cSld>
+  <p:clrMapOvr>
+    <a:masterClrMapping/>
+  </p:clrMapOvr>
+</p:sld>
+</file>
+
+<file path=ppt/slides/slide12.xml><?xml version="1.0" encoding="utf-8"?>
+<p:sld xmlns:a="http://schemas.openxmlformats.org/drawingml/2006/main" xmlns:r="http://schemas.openxmlformats.org/officeDocument/2006/relationships" xmlns:p="http://schemas.openxmlformats.org/presentationml/2006/main">
+  <p:cSld>
+    <p:spTree>
+      <p:nvGrpSpPr>
+        <p:cNvPr id="1" name=""/>
+        <p:cNvGrpSpPr/>
+        <p:nvPr/>
+      </p:nvGrpSpPr>
+      <p:grpSpPr>
+        <a:xfrm>
+          <a:off x="0" y="0"/>
+          <a:ext cx="0" cy="0"/>
+          <a:chOff x="0" y="0"/>
+          <a:chExt cx="0" cy="0"/>
+        </a:xfrm>
+      </p:grpSpPr>
+      <p:sp>
+        <p:nvSpPr>
           <p:cNvPr id="2" name="Title 1"/>
           <p:cNvSpPr>
             <a:spLocks noGrp="1"/>
@@ -4193,10 +4581,24 @@
           </a:bodyPr>
           <a:lstStyle/>
           <a:p>
-            <a:r>
-              <a:rPr lang="ru-RU" dirty="0"/>
-              <a:t>Неявная расстановка скобок</a:t>
-            </a:r>
+            <a:pPr algn="l" fontAlgn="ctr"/>
+            <a:r>
+              <a:rPr lang="ru-RU" sz="4000" dirty="0"/>
+              <a:t>Пропущенный слайд для </a:t>
+            </a:r>
+            <a:r>
+              <a:rPr lang="en-US" sz="4000" dirty="0"/>
+              <a:t>x &amp;&amp; y </a:t>
+            </a:r>
+            <a:r>
+              <a:rPr lang="ru-RU" sz="4000" dirty="0"/>
+              <a:t>и </a:t>
+            </a:r>
+            <a:r>
+              <a:rPr lang="en-US" sz="4000" dirty="0"/>
+              <a:t>x || y</a:t>
+            </a:r>
+            <a:endParaRPr lang="ru-RU" sz="4000" dirty="0"/>
           </a:p>
         </p:txBody>
       </p:sp>
@@ -4217,6 +4619,706 @@
           </a:bodyPr>
           <a:lstStyle/>
           <a:p>
+            <a:endParaRPr lang="ru-RU" dirty="0"/>
+          </a:p>
+        </p:txBody>
+      </p:sp>
+      <p:graphicFrame>
+        <p:nvGraphicFramePr>
+          <p:cNvPr id="4" name="Объект 3"/>
+          <p:cNvGraphicFramePr>
+            <a:graphicFrameLocks/>
+          </p:cNvGraphicFramePr>
+          <p:nvPr/>
+        </p:nvGraphicFramePr>
+        <p:xfrm>
+          <a:off x="838200" y="2202974"/>
+          <a:ext cx="10515600" cy="3596640"/>
+        </p:xfrm>
+        <a:graphic>
+          <a:graphicData uri="http://schemas.openxmlformats.org/drawingml/2006/table">
+            <a:tbl>
+              <a:tblPr firstRow="1" bandRow="1">
+                <a:tableStyleId>{5C22544A-7EE6-4342-B048-85BDC9FD1C3A}</a:tableStyleId>
+              </a:tblPr>
+              <a:tblGrid>
+                <a:gridCol w="4431632">
+                  <a:extLst>
+                    <a:ext uri="{9D8B030D-6E8A-4147-A177-3AD203B41FA5}">
+                      <a16:colId xmlns:a16="http://schemas.microsoft.com/office/drawing/2014/main" val="20000"/>
+                    </a:ext>
+                  </a:extLst>
+                </a:gridCol>
+                <a:gridCol w="6083968">
+                  <a:extLst>
+                    <a:ext uri="{9D8B030D-6E8A-4147-A177-3AD203B41FA5}">
+                      <a16:colId xmlns:a16="http://schemas.microsoft.com/office/drawing/2014/main" val="20001"/>
+                    </a:ext>
+                  </a:extLst>
+                </a:gridCol>
+              </a:tblGrid>
+              <a:tr h="195288">
+                <a:tc>
+                  <a:txBody>
+                    <a:bodyPr/>
+                    <a:lstStyle/>
+                    <a:p>
+                      <a:endParaRPr lang="ru-RU" sz="2000" dirty="0">
+                        <a:latin typeface="Calibri" panose="020F0502020204030204" pitchFamily="34" charset="0"/>
+                        <a:ea typeface="Calibri" panose="020F0502020204030204" pitchFamily="34" charset="0"/>
+                        <a:cs typeface="Calibri" panose="020F0502020204030204" pitchFamily="34" charset="0"/>
+                      </a:endParaRPr>
+                    </a:p>
+                  </a:txBody>
+                  <a:tcPr/>
+                </a:tc>
+                <a:tc>
+                  <a:txBody>
+                    <a:bodyPr/>
+                    <a:lstStyle/>
+                    <a:p>
+                      <a:endParaRPr lang="ru-RU" sz="2000" dirty="0">
+                        <a:latin typeface="Calibri" panose="020F0502020204030204" pitchFamily="34" charset="0"/>
+                        <a:ea typeface="Calibri" panose="020F0502020204030204" pitchFamily="34" charset="0"/>
+                        <a:cs typeface="Calibri" panose="020F0502020204030204" pitchFamily="34" charset="0"/>
+                      </a:endParaRPr>
+                    </a:p>
+                  </a:txBody>
+                  <a:tcPr/>
+                </a:tc>
+                <a:extLst>
+                  <a:ext uri="{0D108BD9-81ED-4DB2-BD59-A6C34878D82A}">
+                    <a16:rowId xmlns:a16="http://schemas.microsoft.com/office/drawing/2014/main" val="10000"/>
+                  </a:ext>
+                </a:extLst>
+              </a:tr>
+              <a:tr h="341754">
+                <a:tc>
+                  <a:txBody>
+                    <a:bodyPr/>
+                    <a:lstStyle/>
+                    <a:p>
+                      <a:r>
+                        <a:rPr lang="ru-RU" sz="2000" dirty="0">
+                          <a:latin typeface="Calibri" panose="020F0502020204030204" pitchFamily="34" charset="0"/>
+                          <a:ea typeface="Calibri" panose="020F0502020204030204" pitchFamily="34" charset="0"/>
+                          <a:cs typeface="Calibri" panose="020F0502020204030204" pitchFamily="34" charset="0"/>
+                        </a:rPr>
+                        <a:t>Требования к виду и типам операндов</a:t>
+                      </a:r>
+                    </a:p>
+                  </a:txBody>
+                  <a:tcPr/>
+                </a:tc>
+                <a:tc>
+                  <a:txBody>
+                    <a:bodyPr/>
+                    <a:lstStyle/>
+                    <a:p>
+                      <a:r>
+                        <a:rPr lang="en-US" sz="2000" dirty="0">
+                          <a:latin typeface="Calibri" panose="020F0502020204030204" pitchFamily="34" charset="0"/>
+                          <a:ea typeface="Calibri" panose="020F0502020204030204" pitchFamily="34" charset="0"/>
+                          <a:cs typeface="Calibri" panose="020F0502020204030204" pitchFamily="34" charset="0"/>
+                        </a:rPr>
+                        <a:t>int </a:t>
+                      </a:r>
+                      <a:r>
+                        <a:rPr lang="ru-RU" sz="2000" dirty="0">
+                          <a:latin typeface="Calibri" panose="020F0502020204030204" pitchFamily="34" charset="0"/>
+                          <a:ea typeface="Calibri" panose="020F0502020204030204" pitchFamily="34" charset="0"/>
+                          <a:cs typeface="Calibri" panose="020F0502020204030204" pitchFamily="34" charset="0"/>
+                        </a:rPr>
+                        <a:t>или неявно преобразуется к </a:t>
+                      </a:r>
+                      <a:r>
+                        <a:rPr lang="en-US" sz="2000" dirty="0">
+                          <a:latin typeface="Calibri" panose="020F0502020204030204" pitchFamily="34" charset="0"/>
+                          <a:ea typeface="Calibri" panose="020F0502020204030204" pitchFamily="34" charset="0"/>
+                          <a:cs typeface="Calibri" panose="020F0502020204030204" pitchFamily="34" charset="0"/>
+                        </a:rPr>
+                        <a:t>int</a:t>
+                      </a:r>
+                      <a:endParaRPr lang="ru-RU" sz="2000" dirty="0">
+                        <a:latin typeface="Calibri" panose="020F0502020204030204" pitchFamily="34" charset="0"/>
+                        <a:ea typeface="Calibri" panose="020F0502020204030204" pitchFamily="34" charset="0"/>
+                        <a:cs typeface="Calibri" panose="020F0502020204030204" pitchFamily="34" charset="0"/>
+                      </a:endParaRPr>
+                    </a:p>
+                  </a:txBody>
+                  <a:tcPr/>
+                </a:tc>
+                <a:extLst>
+                  <a:ext uri="{0D108BD9-81ED-4DB2-BD59-A6C34878D82A}">
+                    <a16:rowId xmlns:a16="http://schemas.microsoft.com/office/drawing/2014/main" val="1255083735"/>
+                  </a:ext>
+                </a:extLst>
+              </a:tr>
+              <a:tr h="341754">
+                <a:tc>
+                  <a:txBody>
+                    <a:bodyPr/>
+                    <a:lstStyle/>
+                    <a:p>
+                      <a:r>
+                        <a:rPr lang="ru-RU" sz="2000" dirty="0">
+                          <a:latin typeface="Calibri" panose="020F0502020204030204" pitchFamily="34" charset="0"/>
+                          <a:ea typeface="Calibri" panose="020F0502020204030204" pitchFamily="34" charset="0"/>
+                          <a:cs typeface="Calibri" panose="020F0502020204030204" pitchFamily="34" charset="0"/>
+                        </a:rPr>
+                        <a:t>Правило определения типа результата</a:t>
+                      </a:r>
+                    </a:p>
+                  </a:txBody>
+                  <a:tcPr/>
+                </a:tc>
+                <a:tc>
+                  <a:txBody>
+                    <a:bodyPr/>
+                    <a:lstStyle/>
+                    <a:p>
+                      <a:r>
+                        <a:rPr lang="en-US" sz="2000" dirty="0">
+                          <a:latin typeface="Calibri" panose="020F0502020204030204" pitchFamily="34" charset="0"/>
+                          <a:ea typeface="Calibri" panose="020F0502020204030204" pitchFamily="34" charset="0"/>
+                          <a:cs typeface="Calibri" panose="020F0502020204030204" pitchFamily="34" charset="0"/>
+                        </a:rPr>
+                        <a:t>int</a:t>
+                      </a:r>
+                      <a:endParaRPr lang="ru-RU" sz="2000" dirty="0">
+                        <a:latin typeface="Calibri" panose="020F0502020204030204" pitchFamily="34" charset="0"/>
+                        <a:ea typeface="Calibri" panose="020F0502020204030204" pitchFamily="34" charset="0"/>
+                        <a:cs typeface="Calibri" panose="020F0502020204030204" pitchFamily="34" charset="0"/>
+                      </a:endParaRPr>
+                    </a:p>
+                  </a:txBody>
+                  <a:tcPr/>
+                </a:tc>
+                <a:extLst>
+                  <a:ext uri="{0D108BD9-81ED-4DB2-BD59-A6C34878D82A}">
+                    <a16:rowId xmlns:a16="http://schemas.microsoft.com/office/drawing/2014/main" val="10001"/>
+                  </a:ext>
+                </a:extLst>
+              </a:tr>
+              <a:tr h="195288">
+                <a:tc>
+                  <a:txBody>
+                    <a:bodyPr/>
+                    <a:lstStyle/>
+                    <a:p>
+                      <a:r>
+                        <a:rPr lang="ru-RU" sz="2000" dirty="0">
+                          <a:latin typeface="Calibri" panose="020F0502020204030204" pitchFamily="34" charset="0"/>
+                          <a:ea typeface="Calibri" panose="020F0502020204030204" pitchFamily="34" charset="0"/>
+                          <a:cs typeface="Calibri" panose="020F0502020204030204" pitchFamily="34" charset="0"/>
+                        </a:rPr>
+                        <a:t>Порядок вычисления операндов</a:t>
+                      </a:r>
+                    </a:p>
+                  </a:txBody>
+                  <a:tcPr/>
+                </a:tc>
+                <a:tc>
+                  <a:txBody>
+                    <a:bodyPr/>
+                    <a:lstStyle/>
+                    <a:p>
+                      <a:r>
+                        <a:rPr lang="ru-RU" sz="2000" baseline="0" dirty="0">
+                          <a:latin typeface="Calibri" panose="020F0502020204030204" pitchFamily="34" charset="0"/>
+                          <a:ea typeface="Calibri" panose="020F0502020204030204" pitchFamily="34" charset="0"/>
+                          <a:cs typeface="Calibri" panose="020F0502020204030204" pitchFamily="34" charset="0"/>
+                        </a:rPr>
+                        <a:t>х и потом, возможно, у</a:t>
+                      </a:r>
+                      <a:endParaRPr lang="ru-RU" sz="2000" dirty="0">
+                        <a:latin typeface="Calibri" panose="020F0502020204030204" pitchFamily="34" charset="0"/>
+                        <a:ea typeface="Calibri" panose="020F0502020204030204" pitchFamily="34" charset="0"/>
+                        <a:cs typeface="Calibri" panose="020F0502020204030204" pitchFamily="34" charset="0"/>
+                      </a:endParaRPr>
+                    </a:p>
+                  </a:txBody>
+                  <a:tcPr/>
+                </a:tc>
+                <a:extLst>
+                  <a:ext uri="{0D108BD9-81ED-4DB2-BD59-A6C34878D82A}">
+                    <a16:rowId xmlns:a16="http://schemas.microsoft.com/office/drawing/2014/main" val="469243343"/>
+                  </a:ext>
+                </a:extLst>
+              </a:tr>
+              <a:tr h="341754">
+                <a:tc>
+                  <a:txBody>
+                    <a:bodyPr/>
+                    <a:lstStyle/>
+                    <a:p>
+                      <a:r>
+                        <a:rPr lang="ru-RU" sz="2000" dirty="0">
+                          <a:latin typeface="Calibri" panose="020F0502020204030204" pitchFamily="34" charset="0"/>
+                          <a:ea typeface="Calibri" panose="020F0502020204030204" pitchFamily="34" charset="0"/>
+                          <a:cs typeface="Calibri" panose="020F0502020204030204" pitchFamily="34" charset="0"/>
+                        </a:rPr>
+                        <a:t>Правило вычисления результата</a:t>
+                      </a:r>
+                      <a:endParaRPr lang="en-US" sz="2000" dirty="0">
+                        <a:latin typeface="Calibri" panose="020F0502020204030204" pitchFamily="34" charset="0"/>
+                        <a:ea typeface="Calibri" panose="020F0502020204030204" pitchFamily="34" charset="0"/>
+                        <a:cs typeface="Calibri" panose="020F0502020204030204" pitchFamily="34" charset="0"/>
+                      </a:endParaRPr>
+                    </a:p>
+                  </a:txBody>
+                  <a:tcPr/>
+                </a:tc>
+                <a:tc>
+                  <a:txBody>
+                    <a:bodyPr/>
+                    <a:lstStyle/>
+                    <a:p>
+                      <a:r>
+                        <a:rPr lang="en-US" sz="2000" baseline="0" dirty="0">
+                          <a:latin typeface="Calibri" panose="020F0502020204030204" pitchFamily="34" charset="0"/>
+                          <a:ea typeface="Calibri" panose="020F0502020204030204" pitchFamily="34" charset="0"/>
+                          <a:cs typeface="Calibri" panose="020F0502020204030204" pitchFamily="34" charset="0"/>
+                        </a:rPr>
+                        <a:t>&amp;&amp;</a:t>
+                      </a:r>
+                      <a:r>
+                        <a:rPr lang="ru-RU" sz="2000" baseline="0" dirty="0">
+                          <a:latin typeface="Calibri" panose="020F0502020204030204" pitchFamily="34" charset="0"/>
+                          <a:ea typeface="Calibri" panose="020F0502020204030204" pitchFamily="34" charset="0"/>
+                          <a:cs typeface="Calibri" panose="020F0502020204030204" pitchFamily="34" charset="0"/>
+                        </a:rPr>
+                        <a:t>: если значение </a:t>
+                      </a:r>
+                      <a:r>
+                        <a:rPr lang="en-US" sz="2000" baseline="0" dirty="0">
+                          <a:latin typeface="Calibri" panose="020F0502020204030204" pitchFamily="34" charset="0"/>
+                          <a:ea typeface="Calibri" panose="020F0502020204030204" pitchFamily="34" charset="0"/>
+                          <a:cs typeface="Calibri" panose="020F0502020204030204" pitchFamily="34" charset="0"/>
+                        </a:rPr>
+                        <a:t>(int)</a:t>
+                      </a:r>
+                      <a:r>
+                        <a:rPr lang="ru-RU" sz="2000" baseline="0" dirty="0">
+                          <a:latin typeface="Calibri" panose="020F0502020204030204" pitchFamily="34" charset="0"/>
+                          <a:ea typeface="Calibri" panose="020F0502020204030204" pitchFamily="34" charset="0"/>
+                          <a:cs typeface="Calibri" panose="020F0502020204030204" pitchFamily="34" charset="0"/>
+                        </a:rPr>
+                        <a:t>х == 0, то 0</a:t>
+                      </a:r>
+                      <a:r>
+                        <a:rPr lang="en-US" sz="2000" baseline="0" dirty="0">
+                          <a:latin typeface="Calibri" panose="020F0502020204030204" pitchFamily="34" charset="0"/>
+                          <a:ea typeface="Calibri" panose="020F0502020204030204" pitchFamily="34" charset="0"/>
+                          <a:cs typeface="Calibri" panose="020F0502020204030204" pitchFamily="34" charset="0"/>
+                        </a:rPr>
+                        <a:t>,</a:t>
+                      </a:r>
+                      <a:r>
+                        <a:rPr lang="ru-RU" sz="2000" baseline="0" dirty="0">
+                          <a:latin typeface="Calibri" panose="020F0502020204030204" pitchFamily="34" charset="0"/>
+                          <a:ea typeface="Calibri" panose="020F0502020204030204" pitchFamily="34" charset="0"/>
+                          <a:cs typeface="Calibri" panose="020F0502020204030204" pitchFamily="34" charset="0"/>
+                        </a:rPr>
+                        <a:t> иначе значение !!у</a:t>
+                      </a:r>
+                      <a:endParaRPr lang="en-US" sz="2000" baseline="0" dirty="0">
+                        <a:latin typeface="Calibri" panose="020F0502020204030204" pitchFamily="34" charset="0"/>
+                        <a:ea typeface="Calibri" panose="020F0502020204030204" pitchFamily="34" charset="0"/>
+                        <a:cs typeface="Calibri" panose="020F0502020204030204" pitchFamily="34" charset="0"/>
+                      </a:endParaRPr>
+                    </a:p>
+                    <a:p>
+                      <a:pPr marL="0" marR="0" lvl="0" indent="0" algn="l" defTabSz="914400" rtl="0" eaLnBrk="1" fontAlgn="auto" latinLnBrk="0" hangingPunct="1">
+                        <a:lnSpc>
+                          <a:spcPct val="100000"/>
+                        </a:lnSpc>
+                        <a:spcBef>
+                          <a:spcPts val="0"/>
+                        </a:spcBef>
+                        <a:spcAft>
+                          <a:spcPts val="0"/>
+                        </a:spcAft>
+                        <a:buClrTx/>
+                        <a:buSzTx/>
+                        <a:buFontTx/>
+                        <a:buNone/>
+                        <a:tabLst/>
+                        <a:defRPr/>
+                      </a:pPr>
+                      <a:r>
+                        <a:rPr lang="en-US" sz="2000" baseline="0" dirty="0">
+                          <a:latin typeface="Calibri" panose="020F0502020204030204" pitchFamily="34" charset="0"/>
+                          <a:ea typeface="Calibri" panose="020F0502020204030204" pitchFamily="34" charset="0"/>
+                          <a:cs typeface="Calibri" panose="020F0502020204030204" pitchFamily="34" charset="0"/>
+                        </a:rPr>
+                        <a:t>||:</a:t>
+                      </a:r>
+                      <a:r>
+                        <a:rPr lang="ru-RU" sz="2000" baseline="0" dirty="0">
+                          <a:latin typeface="Calibri" panose="020F0502020204030204" pitchFamily="34" charset="0"/>
+                          <a:ea typeface="Calibri" panose="020F0502020204030204" pitchFamily="34" charset="0"/>
+                          <a:cs typeface="Calibri" panose="020F0502020204030204" pitchFamily="34" charset="0"/>
+                        </a:rPr>
+                        <a:t> если значение </a:t>
+                      </a:r>
+                      <a:r>
+                        <a:rPr lang="en-US" sz="2000" baseline="0" dirty="0">
+                          <a:latin typeface="Calibri" panose="020F0502020204030204" pitchFamily="34" charset="0"/>
+                          <a:ea typeface="Calibri" panose="020F0502020204030204" pitchFamily="34" charset="0"/>
+                          <a:cs typeface="Calibri" panose="020F0502020204030204" pitchFamily="34" charset="0"/>
+                        </a:rPr>
+                        <a:t>(int)</a:t>
+                      </a:r>
+                      <a:r>
+                        <a:rPr lang="ru-RU" sz="2000" baseline="0" dirty="0">
+                          <a:latin typeface="Calibri" panose="020F0502020204030204" pitchFamily="34" charset="0"/>
+                          <a:ea typeface="Calibri" panose="020F0502020204030204" pitchFamily="34" charset="0"/>
+                          <a:cs typeface="Calibri" panose="020F0502020204030204" pitchFamily="34" charset="0"/>
+                        </a:rPr>
+                        <a:t>х </a:t>
+                      </a:r>
+                      <a:r>
+                        <a:rPr lang="en-US" sz="2000" baseline="0" dirty="0">
+                          <a:latin typeface="Calibri" panose="020F0502020204030204" pitchFamily="34" charset="0"/>
+                          <a:ea typeface="Calibri" panose="020F0502020204030204" pitchFamily="34" charset="0"/>
+                          <a:cs typeface="Calibri" panose="020F0502020204030204" pitchFamily="34" charset="0"/>
+                        </a:rPr>
+                        <a:t>!</a:t>
+                      </a:r>
+                      <a:r>
+                        <a:rPr lang="ru-RU" sz="2000" baseline="0" dirty="0">
+                          <a:latin typeface="Calibri" panose="020F0502020204030204" pitchFamily="34" charset="0"/>
+                          <a:ea typeface="Calibri" panose="020F0502020204030204" pitchFamily="34" charset="0"/>
+                          <a:cs typeface="Calibri" panose="020F0502020204030204" pitchFamily="34" charset="0"/>
+                        </a:rPr>
+                        <a:t>= </a:t>
+                      </a:r>
+                      <a:r>
+                        <a:rPr lang="en-US" sz="2000" baseline="0" dirty="0">
+                          <a:latin typeface="Calibri" panose="020F0502020204030204" pitchFamily="34" charset="0"/>
+                          <a:ea typeface="Calibri" panose="020F0502020204030204" pitchFamily="34" charset="0"/>
+                          <a:cs typeface="Calibri" panose="020F0502020204030204" pitchFamily="34" charset="0"/>
+                        </a:rPr>
+                        <a:t>0</a:t>
+                      </a:r>
+                      <a:r>
+                        <a:rPr lang="ru-RU" sz="2000" baseline="0" dirty="0">
+                          <a:latin typeface="Calibri" panose="020F0502020204030204" pitchFamily="34" charset="0"/>
+                          <a:ea typeface="Calibri" panose="020F0502020204030204" pitchFamily="34" charset="0"/>
+                          <a:cs typeface="Calibri" panose="020F0502020204030204" pitchFamily="34" charset="0"/>
+                        </a:rPr>
+                        <a:t>, то 1</a:t>
+                      </a:r>
+                      <a:r>
+                        <a:rPr lang="en-US" sz="2000" baseline="0" dirty="0">
+                          <a:latin typeface="Calibri" panose="020F0502020204030204" pitchFamily="34" charset="0"/>
+                          <a:ea typeface="Calibri" panose="020F0502020204030204" pitchFamily="34" charset="0"/>
+                          <a:cs typeface="Calibri" panose="020F0502020204030204" pitchFamily="34" charset="0"/>
+                        </a:rPr>
+                        <a:t>,</a:t>
+                      </a:r>
+                      <a:r>
+                        <a:rPr lang="ru-RU" sz="2000" baseline="0" dirty="0">
+                          <a:latin typeface="Calibri" panose="020F0502020204030204" pitchFamily="34" charset="0"/>
+                          <a:ea typeface="Calibri" panose="020F0502020204030204" pitchFamily="34" charset="0"/>
+                          <a:cs typeface="Calibri" panose="020F0502020204030204" pitchFamily="34" charset="0"/>
+                        </a:rPr>
+                        <a:t> иначе значение !!</a:t>
+                      </a:r>
+                      <a:r>
+                        <a:rPr lang="en-US" sz="2000" baseline="0" dirty="0">
+                          <a:latin typeface="Calibri" panose="020F0502020204030204" pitchFamily="34" charset="0"/>
+                          <a:ea typeface="Calibri" panose="020F0502020204030204" pitchFamily="34" charset="0"/>
+                          <a:cs typeface="Calibri" panose="020F0502020204030204" pitchFamily="34" charset="0"/>
+                        </a:rPr>
+                        <a:t>y</a:t>
+                      </a:r>
+                    </a:p>
+                    <a:p>
+                      <a:pPr marL="0" marR="0" lvl="0" indent="0" algn="l" defTabSz="914400" rtl="0" eaLnBrk="1" fontAlgn="auto" latinLnBrk="0" hangingPunct="1">
+                        <a:lnSpc>
+                          <a:spcPct val="100000"/>
+                        </a:lnSpc>
+                        <a:spcBef>
+                          <a:spcPts val="0"/>
+                        </a:spcBef>
+                        <a:spcAft>
+                          <a:spcPts val="0"/>
+                        </a:spcAft>
+                        <a:buClrTx/>
+                        <a:buSzTx/>
+                        <a:buFontTx/>
+                        <a:buNone/>
+                        <a:tabLst/>
+                        <a:defRPr/>
+                      </a:pPr>
+                      <a:endParaRPr lang="en-US" sz="2000" baseline="0" dirty="0">
+                        <a:latin typeface="Calibri" panose="020F0502020204030204" pitchFamily="34" charset="0"/>
+                        <a:ea typeface="Calibri" panose="020F0502020204030204" pitchFamily="34" charset="0"/>
+                        <a:cs typeface="Calibri" panose="020F0502020204030204" pitchFamily="34" charset="0"/>
+                      </a:endParaRPr>
+                    </a:p>
+                    <a:p>
+                      <a:pPr marL="0" marR="0" lvl="0" indent="0" algn="l" defTabSz="914400" rtl="0" eaLnBrk="1" fontAlgn="auto" latinLnBrk="0" hangingPunct="1">
+                        <a:lnSpc>
+                          <a:spcPct val="100000"/>
+                        </a:lnSpc>
+                        <a:spcBef>
+                          <a:spcPts val="0"/>
+                        </a:spcBef>
+                        <a:spcAft>
+                          <a:spcPts val="0"/>
+                        </a:spcAft>
+                        <a:buClrTx/>
+                        <a:buSzTx/>
+                        <a:buFontTx/>
+                        <a:buNone/>
+                        <a:tabLst/>
+                        <a:defRPr/>
+                      </a:pPr>
+                      <a:r>
+                        <a:rPr lang="ru-RU" sz="2000" baseline="0" dirty="0">
+                          <a:latin typeface="Calibri" panose="020F0502020204030204" pitchFamily="34" charset="0"/>
+                          <a:ea typeface="Calibri" panose="020F0502020204030204" pitchFamily="34" charset="0"/>
+                          <a:cs typeface="Calibri" panose="020F0502020204030204" pitchFamily="34" charset="0"/>
+                        </a:rPr>
+                        <a:t>Если </a:t>
+                      </a:r>
+                      <a:r>
+                        <a:rPr lang="en-US" sz="2000" dirty="0">
+                          <a:latin typeface="Calibri" panose="020F0502020204030204" pitchFamily="34" charset="0"/>
+                          <a:ea typeface="Calibri" panose="020F0502020204030204" pitchFamily="34" charset="0"/>
+                          <a:cs typeface="Calibri" panose="020F0502020204030204" pitchFamily="34" charset="0"/>
+                        </a:rPr>
+                        <a:t>(int)x </a:t>
+                      </a:r>
+                      <a:r>
+                        <a:rPr lang="ru-RU" sz="2000" dirty="0">
+                          <a:latin typeface="Calibri" panose="020F0502020204030204" pitchFamily="34" charset="0"/>
+                          <a:ea typeface="Calibri" panose="020F0502020204030204" pitchFamily="34" charset="0"/>
+                          <a:cs typeface="Calibri" panose="020F0502020204030204" pitchFamily="34" charset="0"/>
+                        </a:rPr>
+                        <a:t>и/или </a:t>
+                      </a:r>
+                      <a:r>
+                        <a:rPr lang="en-US" sz="2000" dirty="0">
+                          <a:latin typeface="Calibri" panose="020F0502020204030204" pitchFamily="34" charset="0"/>
+                          <a:ea typeface="Calibri" panose="020F0502020204030204" pitchFamily="34" charset="0"/>
+                          <a:cs typeface="Calibri" panose="020F0502020204030204" pitchFamily="34" charset="0"/>
+                        </a:rPr>
+                        <a:t>(int)y </a:t>
+                      </a:r>
+                      <a:r>
+                        <a:rPr lang="ru-RU" sz="2000" dirty="0">
+                          <a:latin typeface="Calibri" panose="020F0502020204030204" pitchFamily="34" charset="0"/>
+                          <a:ea typeface="Calibri" panose="020F0502020204030204" pitchFamily="34" charset="0"/>
+                          <a:cs typeface="Calibri" panose="020F0502020204030204" pitchFamily="34" charset="0"/>
+                        </a:rPr>
+                        <a:t>является </a:t>
+                      </a:r>
+                      <a:r>
+                        <a:rPr lang="en-US" sz="2000" dirty="0">
+                          <a:latin typeface="Calibri" panose="020F0502020204030204" pitchFamily="34" charset="0"/>
+                          <a:ea typeface="Calibri" panose="020F0502020204030204" pitchFamily="34" charset="0"/>
+                          <a:cs typeface="Calibri" panose="020F0502020204030204" pitchFamily="34" charset="0"/>
+                        </a:rPr>
+                        <a:t>implementation-defined</a:t>
+                      </a:r>
+                      <a:r>
+                        <a:rPr lang="ru-RU" sz="2000" dirty="0">
+                          <a:latin typeface="Calibri" panose="020F0502020204030204" pitchFamily="34" charset="0"/>
+                          <a:ea typeface="Calibri" panose="020F0502020204030204" pitchFamily="34" charset="0"/>
+                          <a:cs typeface="Calibri" panose="020F0502020204030204" pitchFamily="34" charset="0"/>
+                        </a:rPr>
+                        <a:t>, то </a:t>
+                      </a:r>
+                      <a:r>
+                        <a:rPr lang="en-US" sz="2000" dirty="0">
+                          <a:latin typeface="Calibri" panose="020F0502020204030204" pitchFamily="34" charset="0"/>
+                          <a:ea typeface="Calibri" panose="020F0502020204030204" pitchFamily="34" charset="0"/>
+                          <a:cs typeface="Calibri" panose="020F0502020204030204" pitchFamily="34" charset="0"/>
+                        </a:rPr>
+                        <a:t>implementation-defined</a:t>
+                      </a:r>
+                      <a:r>
+                        <a:rPr lang="ru-RU" sz="2000" dirty="0">
+                          <a:latin typeface="Calibri" panose="020F0502020204030204" pitchFamily="34" charset="0"/>
+                          <a:ea typeface="Calibri" panose="020F0502020204030204" pitchFamily="34" charset="0"/>
+                          <a:cs typeface="Calibri" panose="020F0502020204030204" pitchFamily="34" charset="0"/>
+                        </a:rPr>
+                        <a:t>, иначе </a:t>
+                      </a:r>
+                      <a:r>
+                        <a:rPr lang="en-US" sz="2000" dirty="0">
+                          <a:latin typeface="Calibri" panose="020F0502020204030204" pitchFamily="34" charset="0"/>
+                          <a:ea typeface="Calibri" panose="020F0502020204030204" pitchFamily="34" charset="0"/>
+                          <a:cs typeface="Calibri" panose="020F0502020204030204" pitchFamily="34" charset="0"/>
+                        </a:rPr>
+                        <a:t>w</a:t>
+                      </a:r>
+                      <a:r>
+                        <a:rPr lang="en-US" sz="2000" baseline="0" dirty="0">
+                          <a:latin typeface="Calibri" panose="020F0502020204030204" pitchFamily="34" charset="0"/>
+                          <a:ea typeface="Calibri" panose="020F0502020204030204" pitchFamily="34" charset="0"/>
+                          <a:cs typeface="Calibri" panose="020F0502020204030204" pitchFamily="34" charset="0"/>
+                        </a:rPr>
+                        <a:t>ell-defined</a:t>
+                      </a:r>
+                      <a:endParaRPr lang="ru-RU" sz="2000" dirty="0">
+                        <a:latin typeface="Calibri" panose="020F0502020204030204" pitchFamily="34" charset="0"/>
+                        <a:ea typeface="Calibri" panose="020F0502020204030204" pitchFamily="34" charset="0"/>
+                        <a:cs typeface="Calibri" panose="020F0502020204030204" pitchFamily="34" charset="0"/>
+                      </a:endParaRPr>
+                    </a:p>
+                  </a:txBody>
+                  <a:tcPr/>
+                </a:tc>
+                <a:extLst>
+                  <a:ext uri="{0D108BD9-81ED-4DB2-BD59-A6C34878D82A}">
+                    <a16:rowId xmlns:a16="http://schemas.microsoft.com/office/drawing/2014/main" val="10003"/>
+                  </a:ext>
+                </a:extLst>
+              </a:tr>
+              <a:tr h="341754">
+                <a:tc>
+                  <a:txBody>
+                    <a:bodyPr/>
+                    <a:lstStyle/>
+                    <a:p>
+                      <a:r>
+                        <a:rPr lang="ru-RU" sz="2000" dirty="0">
+                          <a:latin typeface="Calibri" panose="020F0502020204030204" pitchFamily="34" charset="0"/>
+                          <a:ea typeface="Calibri" panose="020F0502020204030204" pitchFamily="34" charset="0"/>
+                          <a:cs typeface="Calibri" panose="020F0502020204030204" pitchFamily="34" charset="0"/>
+                        </a:rPr>
+                        <a:t>Побочные эффекты</a:t>
+                      </a:r>
+                    </a:p>
+                  </a:txBody>
+                  <a:tcPr/>
+                </a:tc>
+                <a:tc>
+                  <a:txBody>
+                    <a:bodyPr/>
+                    <a:lstStyle/>
+                    <a:p>
+                      <a:r>
+                        <a:rPr lang="ru-RU" sz="2000" dirty="0">
+                          <a:latin typeface="Calibri" panose="020F0502020204030204" pitchFamily="34" charset="0"/>
+                          <a:ea typeface="Calibri" panose="020F0502020204030204" pitchFamily="34" charset="0"/>
+                          <a:cs typeface="Calibri" panose="020F0502020204030204" pitchFamily="34" charset="0"/>
+                        </a:rPr>
+                        <a:t>Нет</a:t>
+                      </a:r>
+                    </a:p>
+                  </a:txBody>
+                  <a:tcPr/>
+                </a:tc>
+                <a:extLst>
+                  <a:ext uri="{0D108BD9-81ED-4DB2-BD59-A6C34878D82A}">
+                    <a16:rowId xmlns:a16="http://schemas.microsoft.com/office/drawing/2014/main" val="1663341479"/>
+                  </a:ext>
+                </a:extLst>
+              </a:tr>
+            </a:tbl>
+          </a:graphicData>
+        </a:graphic>
+      </p:graphicFrame>
+      <p:sp>
+        <p:nvSpPr>
+          <p:cNvPr id="5" name="Slide Number Placeholder 4"/>
+          <p:cNvSpPr>
+            <a:spLocks noGrp="1"/>
+          </p:cNvSpPr>
+          <p:nvPr>
+            <p:ph type="sldNum" sz="quarter" idx="12"/>
+          </p:nvPr>
+        </p:nvSpPr>
+        <p:spPr/>
+        <p:txBody>
+          <a:bodyPr/>
+          <a:lstStyle/>
+          <a:p>
+            <a:fld id="{3C0E2822-3F92-4355-B47E-F2E8C9595EE5}" type="slidenum">
+              <a:rPr lang="ru-RU" smtClean="0"/>
+              <a:t>12</a:t>
+            </a:fld>
+            <a:endParaRPr lang="ru-RU"/>
+          </a:p>
+        </p:txBody>
+      </p:sp>
+    </p:spTree>
+    <p:extLst>
+      <p:ext uri="{BB962C8B-B14F-4D97-AF65-F5344CB8AC3E}">
+        <p14:creationId xmlns:p14="http://schemas.microsoft.com/office/powerpoint/2010/main" val="3012599198"/>
+      </p:ext>
+    </p:extLst>
+  </p:cSld>
+  <p:clrMapOvr>
+    <a:masterClrMapping/>
+  </p:clrMapOvr>
+</p:sld>
+</file>
+
+<file path=ppt/slides/slide13.xml><?xml version="1.0" encoding="utf-8"?>
+<p:sld xmlns:a="http://schemas.openxmlformats.org/drawingml/2006/main" xmlns:r="http://schemas.openxmlformats.org/officeDocument/2006/relationships" xmlns:p="http://schemas.openxmlformats.org/presentationml/2006/main">
+  <p:cSld>
+    <p:spTree>
+      <p:nvGrpSpPr>
+        <p:cNvPr id="1" name=""/>
+        <p:cNvGrpSpPr/>
+        <p:nvPr/>
+      </p:nvGrpSpPr>
+      <p:grpSpPr>
+        <a:xfrm>
+          <a:off x="0" y="0"/>
+          <a:ext cx="0" cy="0"/>
+          <a:chOff x="0" y="0"/>
+          <a:chExt cx="0" cy="0"/>
+        </a:xfrm>
+      </p:grpSpPr>
+      <p:sp>
+        <p:nvSpPr>
+          <p:cNvPr id="2" name="Title 1"/>
+          <p:cNvSpPr>
+            <a:spLocks noGrp="1"/>
+          </p:cNvSpPr>
+          <p:nvPr>
+            <p:ph type="title"/>
+          </p:nvPr>
+        </p:nvSpPr>
+        <p:spPr/>
+        <p:txBody>
+          <a:bodyPr>
+            <a:normAutofit/>
+          </a:bodyPr>
+          <a:lstStyle/>
+          <a:p>
+            <a:r>
+              <a:rPr lang="ru-RU" dirty="0"/>
+              <a:t>Неявная расстановка скобок</a:t>
+            </a:r>
+          </a:p>
+        </p:txBody>
+      </p:sp>
+      <p:sp>
+        <p:nvSpPr>
+          <p:cNvPr id="3" name="Content Placeholder 2"/>
+          <p:cNvSpPr>
+            <a:spLocks noGrp="1"/>
+          </p:cNvSpPr>
+          <p:nvPr>
+            <p:ph idx="1"/>
+          </p:nvPr>
+        </p:nvSpPr>
+        <p:spPr/>
+        <p:txBody>
+          <a:bodyPr>
+            <a:normAutofit/>
+          </a:bodyPr>
+          <a:lstStyle/>
+          <a:p>
             <a:r>
               <a:rPr lang="ru-RU" sz="2800" dirty="0"/>
               <a:t>Соответствует математической нотации и интуиции</a:t>
@@ -4250,7 +5352,7 @@
                   <a:srgbClr val="FFFF00"/>
                 </a:highlight>
               </a:rPr>
-              <a:t>Если выражение содержит побитовые операторы</a:t>
+              <a:t>Если выражение содержит поразрядные операторы</a:t>
             </a:r>
           </a:p>
           <a:p>
@@ -4282,7 +5384,7 @@
           <a:p>
             <a:fld id="{3C0E2822-3F92-4355-B47E-F2E8C9595EE5}" type="slidenum">
               <a:rPr lang="ru-RU" smtClean="0"/>
-              <a:t>11</a:t>
+              <a:t>13</a:t>
             </a:fld>
             <a:endParaRPr lang="ru-RU"/>
           </a:p>
@@ -4595,7 +5697,7 @@
 </p:sld>
 </file>
 
-<file path=ppt/slides/slide12.xml><?xml version="1.0" encoding="utf-8"?>
+<file path=ppt/slides/slide14.xml><?xml version="1.0" encoding="utf-8"?>
 <p:sld xmlns:a="http://schemas.openxmlformats.org/drawingml/2006/main" xmlns:r="http://schemas.openxmlformats.org/officeDocument/2006/relationships" xmlns:p="http://schemas.openxmlformats.org/presentationml/2006/main">
   <p:cSld>
     <p:spTree>
@@ -4669,7 +5771,7 @@
                   <a:srgbClr val="00FF00"/>
                 </a:highlight>
               </a:rPr>
-              <a:t>Левый, правый</a:t>
+              <a:t>Левый, возможно правый</a:t>
             </a:r>
           </a:p>
           <a:p>
@@ -4701,6 +5803,17 @@
               <a:rPr lang="ru-RU" dirty="0"/>
               <a:t>в2 </a:t>
             </a:r>
+          </a:p>
+          <a:p>
+            <a:r>
+              <a:rPr lang="ru-RU" dirty="0">
+                <a:highlight>
+                  <a:srgbClr val="00FF00"/>
+                </a:highlight>
+              </a:rPr>
+              <a:t>Левый, правый</a:t>
+            </a:r>
+            <a:endParaRPr lang="ru-RU" dirty="0"/>
           </a:p>
           <a:p>
             <a:pPr lvl="1"/>
@@ -4795,7 +5908,7 @@
             <a:pPr lvl="1"/>
             <a:r>
               <a:rPr lang="ru-RU" dirty="0"/>
-              <a:t>Самые частотные «ловушки» </a:t>
+              <a:t>Самые частотные «ловушки»</a:t>
             </a:r>
             <a:endParaRPr lang="en-US" dirty="0"/>
           </a:p>
@@ -4826,6 +5939,23 @@
             </a:endParaRPr>
           </a:p>
           <a:p>
+            <a:pPr lvl="2"/>
+            <a:r>
+              <a:rPr lang="ru-RU" dirty="0"/>
+              <a:t>выше порядок вызовов </a:t>
+            </a:r>
+            <a:r>
+              <a:rPr lang="en-US" dirty="0"/>
+              <a:t>f </a:t>
+            </a:r>
+            <a:r>
+              <a:rPr lang="ru-RU" dirty="0"/>
+              <a:t>и </a:t>
+            </a:r>
+            <a:r>
+              <a:rPr lang="en-US" dirty="0"/>
+              <a:t>g unspecified</a:t>
+            </a:r>
             <a:endParaRPr lang="ru-RU" dirty="0"/>
           </a:p>
         </p:txBody>
@@ -4834,561 +5964,6 @@
     <p:extLst>
       <p:ext uri="{BB962C8B-B14F-4D97-AF65-F5344CB8AC3E}">
         <p14:creationId xmlns:p14="http://schemas.microsoft.com/office/powerpoint/2010/main" val="2011030070"/>
-      </p:ext>
-    </p:extLst>
-  </p:cSld>
-  <p:clrMapOvr>
-    <a:masterClrMapping/>
-  </p:clrMapOvr>
-</p:sld>
-</file>
-
-<file path=ppt/slides/slide13.xml><?xml version="1.0" encoding="utf-8"?>
-<p:sld xmlns:a="http://schemas.openxmlformats.org/drawingml/2006/main" xmlns:r="http://schemas.openxmlformats.org/officeDocument/2006/relationships" xmlns:p="http://schemas.openxmlformats.org/presentationml/2006/main">
-  <p:cSld>
-    <p:spTree>
-      <p:nvGrpSpPr>
-        <p:cNvPr id="1" name=""/>
-        <p:cNvGrpSpPr/>
-        <p:nvPr/>
-      </p:nvGrpSpPr>
-      <p:grpSpPr>
-        <a:xfrm>
-          <a:off x="0" y="0"/>
-          <a:ext cx="0" cy="0"/>
-          <a:chOff x="0" y="0"/>
-          <a:chExt cx="0" cy="0"/>
-        </a:xfrm>
-      </p:grpSpPr>
-      <p:sp>
-        <p:nvSpPr>
-          <p:cNvPr id="2" name="Title 1"/>
-          <p:cNvSpPr>
-            <a:spLocks noGrp="1"/>
-          </p:cNvSpPr>
-          <p:nvPr>
-            <p:ph type="title"/>
-          </p:nvPr>
-        </p:nvSpPr>
-        <p:spPr/>
-        <p:txBody>
-          <a:bodyPr/>
-          <a:lstStyle/>
-          <a:p>
-            <a:r>
-              <a:rPr lang="ru-RU" dirty="0"/>
-              <a:t>Что такое </a:t>
-            </a:r>
-            <a:r>
-              <a:rPr lang="en-US" dirty="0"/>
-              <a:t>ℓ-value</a:t>
-            </a:r>
-            <a:r>
-              <a:rPr lang="ru-RU" dirty="0"/>
-              <a:t>?</a:t>
-            </a:r>
-          </a:p>
-        </p:txBody>
-      </p:sp>
-      <p:sp>
-        <p:nvSpPr>
-          <p:cNvPr id="3" name="Content Placeholder 2"/>
-          <p:cNvSpPr>
-            <a:spLocks noGrp="1"/>
-          </p:cNvSpPr>
-          <p:nvPr>
-            <p:ph idx="1"/>
-          </p:nvPr>
-        </p:nvSpPr>
-        <p:spPr/>
-        <p:txBody>
-          <a:bodyPr>
-            <a:normAutofit/>
-          </a:bodyPr>
-          <a:lstStyle/>
-          <a:p>
-            <a:r>
-              <a:rPr lang="en-US" sz="2800" dirty="0">
-                <a:highlight>
-                  <a:srgbClr val="00FFFF"/>
-                </a:highlight>
-              </a:rPr>
-              <a:t>ℓ-value</a:t>
-            </a:r>
-            <a:r>
-              <a:rPr lang="en-US" sz="2800" dirty="0"/>
-              <a:t> </a:t>
-            </a:r>
-            <a:r>
-              <a:rPr lang="ru-RU" sz="2800" dirty="0"/>
-              <a:t>– значение, имеющее адрес в памяти</a:t>
-            </a:r>
-          </a:p>
-          <a:p>
-            <a:pPr marL="0" indent="0">
-              <a:buNone/>
-            </a:pPr>
-            <a:endParaRPr lang="ru-RU" sz="2800" dirty="0"/>
-          </a:p>
-          <a:p>
-            <a:r>
-              <a:rPr lang="ru-RU" dirty="0"/>
-              <a:t>Уточнение смысла операторов, использующих адреса памяти</a:t>
-            </a:r>
-          </a:p>
-          <a:p>
-            <a:pPr marL="628650" lvl="1" indent="-285750"/>
-            <a:r>
-              <a:rPr lang="en-US" sz="2200" dirty="0">
-                <a:solidFill>
-                  <a:srgbClr val="000000"/>
-                </a:solidFill>
-                <a:latin typeface="Consolas" panose="020B0609020204030204" pitchFamily="49" charset="0"/>
-              </a:rPr>
-              <a:t>&amp;A[</a:t>
-            </a:r>
-            <a:r>
-              <a:rPr lang="en-US" sz="2200" dirty="0" err="1">
-                <a:solidFill>
-                  <a:srgbClr val="000000"/>
-                </a:solidFill>
-                <a:latin typeface="Consolas" panose="020B0609020204030204" pitchFamily="49" charset="0"/>
-              </a:rPr>
-              <a:t>i</a:t>
-            </a:r>
-            <a:r>
-              <a:rPr lang="en-US" sz="2200" dirty="0">
-                <a:solidFill>
-                  <a:srgbClr val="000000"/>
-                </a:solidFill>
-                <a:latin typeface="Consolas" panose="020B0609020204030204" pitchFamily="49" charset="0"/>
-              </a:rPr>
-              <a:t>] </a:t>
-            </a:r>
-            <a:r>
-              <a:rPr lang="ru-RU" sz="2200" dirty="0">
-                <a:solidFill>
-                  <a:srgbClr val="008000"/>
-                </a:solidFill>
-                <a:latin typeface="Consolas" panose="020B0609020204030204" pitchFamily="49" charset="0"/>
-              </a:rPr>
-              <a:t>// </a:t>
-            </a:r>
-            <a:r>
-              <a:rPr lang="en-US" sz="2200" dirty="0">
-                <a:solidFill>
-                  <a:srgbClr val="008000"/>
-                </a:solidFill>
-                <a:latin typeface="Consolas" panose="020B0609020204030204" pitchFamily="49" charset="0"/>
-              </a:rPr>
-              <a:t>OK</a:t>
-            </a:r>
-            <a:endParaRPr lang="en-US" sz="2200" dirty="0">
-              <a:solidFill>
-                <a:srgbClr val="000000"/>
-              </a:solidFill>
-              <a:latin typeface="Consolas" panose="020B0609020204030204" pitchFamily="49" charset="0"/>
-            </a:endParaRPr>
-          </a:p>
-          <a:p>
-            <a:pPr marL="628650" lvl="1" indent="-285750"/>
-            <a:r>
-              <a:rPr lang="en-US" sz="2200" dirty="0">
-                <a:solidFill>
-                  <a:srgbClr val="000000"/>
-                </a:solidFill>
-                <a:latin typeface="Consolas" panose="020B0609020204030204" pitchFamily="49" charset="0"/>
-              </a:rPr>
-              <a:t>&amp;(A[</a:t>
-            </a:r>
-            <a:r>
-              <a:rPr lang="en-US" sz="2200" dirty="0" err="1">
-                <a:solidFill>
-                  <a:srgbClr val="000000"/>
-                </a:solidFill>
-                <a:latin typeface="Consolas" panose="020B0609020204030204" pitchFamily="49" charset="0"/>
-              </a:rPr>
-              <a:t>i</a:t>
-            </a:r>
-            <a:r>
-              <a:rPr lang="en-US" sz="2200" dirty="0">
-                <a:solidFill>
-                  <a:srgbClr val="000000"/>
-                </a:solidFill>
-                <a:latin typeface="Consolas" panose="020B0609020204030204" pitchFamily="49" charset="0"/>
-              </a:rPr>
-              <a:t>] + A[j])</a:t>
-            </a:r>
-            <a:r>
-              <a:rPr lang="ru-RU" sz="2200" dirty="0">
-                <a:solidFill>
-                  <a:srgbClr val="008000"/>
-                </a:solidFill>
-                <a:latin typeface="Consolas" panose="020B0609020204030204" pitchFamily="49" charset="0"/>
-              </a:rPr>
-              <a:t> // не </a:t>
-            </a:r>
-            <a:r>
-              <a:rPr lang="en-US" sz="2200" dirty="0">
-                <a:solidFill>
-                  <a:srgbClr val="008000"/>
-                </a:solidFill>
-                <a:latin typeface="Consolas" panose="020B0609020204030204" pitchFamily="49" charset="0"/>
-              </a:rPr>
-              <a:t>OK</a:t>
-            </a:r>
-            <a:endParaRPr lang="en-US" sz="2200" dirty="0">
-              <a:solidFill>
-                <a:srgbClr val="000000"/>
-              </a:solidFill>
-              <a:latin typeface="Consolas" panose="020B0609020204030204" pitchFamily="49" charset="0"/>
-            </a:endParaRPr>
-          </a:p>
-          <a:p>
-            <a:pPr marL="628650" lvl="1" indent="-285750"/>
-            <a:r>
-              <a:rPr lang="en-US" sz="2200" dirty="0">
-                <a:solidFill>
-                  <a:srgbClr val="000000"/>
-                </a:solidFill>
-                <a:latin typeface="Consolas" panose="020B0609020204030204" pitchFamily="49" charset="0"/>
-              </a:rPr>
-              <a:t>A[</a:t>
-            </a:r>
-            <a:r>
-              <a:rPr lang="en-US" sz="2200" dirty="0" err="1">
-                <a:solidFill>
-                  <a:srgbClr val="000000"/>
-                </a:solidFill>
-                <a:latin typeface="Consolas" panose="020B0609020204030204" pitchFamily="49" charset="0"/>
-              </a:rPr>
-              <a:t>i</a:t>
-            </a:r>
-            <a:r>
-              <a:rPr lang="en-US" sz="2200" dirty="0">
-                <a:solidFill>
-                  <a:srgbClr val="000000"/>
-                </a:solidFill>
-                <a:latin typeface="Consolas" panose="020B0609020204030204" pitchFamily="49" charset="0"/>
-              </a:rPr>
-              <a:t>] = 5</a:t>
-            </a:r>
-            <a:r>
-              <a:rPr lang="ru-RU" sz="2200" dirty="0">
-                <a:solidFill>
-                  <a:srgbClr val="008000"/>
-                </a:solidFill>
-                <a:latin typeface="Consolas" panose="020B0609020204030204" pitchFamily="49" charset="0"/>
-              </a:rPr>
-              <a:t> // </a:t>
-            </a:r>
-            <a:r>
-              <a:rPr lang="en-US" sz="2200" dirty="0">
-                <a:solidFill>
-                  <a:srgbClr val="008000"/>
-                </a:solidFill>
-                <a:latin typeface="Consolas" panose="020B0609020204030204" pitchFamily="49" charset="0"/>
-              </a:rPr>
-              <a:t>OK</a:t>
-            </a:r>
-            <a:endParaRPr lang="en-US" sz="2200" dirty="0">
-              <a:solidFill>
-                <a:srgbClr val="000000"/>
-              </a:solidFill>
-              <a:latin typeface="Consolas" panose="020B0609020204030204" pitchFamily="49" charset="0"/>
-            </a:endParaRPr>
-          </a:p>
-          <a:p>
-            <a:pPr marL="628650" lvl="1" indent="-285750"/>
-            <a:r>
-              <a:rPr lang="en-US" sz="2200" dirty="0">
-                <a:solidFill>
-                  <a:srgbClr val="000000"/>
-                </a:solidFill>
-                <a:latin typeface="Consolas" panose="020B0609020204030204" pitchFamily="49" charset="0"/>
-              </a:rPr>
-              <a:t>A[</a:t>
-            </a:r>
-            <a:r>
-              <a:rPr lang="en-US" sz="2200" dirty="0" err="1">
-                <a:solidFill>
-                  <a:srgbClr val="000000"/>
-                </a:solidFill>
-                <a:latin typeface="Consolas" panose="020B0609020204030204" pitchFamily="49" charset="0"/>
-              </a:rPr>
-              <a:t>i</a:t>
-            </a:r>
-            <a:r>
-              <a:rPr lang="en-US" sz="2200" dirty="0">
-                <a:solidFill>
-                  <a:srgbClr val="000000"/>
-                </a:solidFill>
-                <a:latin typeface="Consolas" panose="020B0609020204030204" pitchFamily="49" charset="0"/>
-              </a:rPr>
-              <a:t>] + A[j] = 5</a:t>
-            </a:r>
-            <a:r>
-              <a:rPr lang="ru-RU" sz="2200" dirty="0">
-                <a:solidFill>
-                  <a:srgbClr val="000000"/>
-                </a:solidFill>
-                <a:latin typeface="Consolas" panose="020B0609020204030204" pitchFamily="49" charset="0"/>
-              </a:rPr>
-              <a:t> </a:t>
-            </a:r>
-            <a:r>
-              <a:rPr lang="ru-RU" sz="2200" dirty="0">
-                <a:solidFill>
-                  <a:srgbClr val="008000"/>
-                </a:solidFill>
-                <a:latin typeface="Consolas" panose="020B0609020204030204" pitchFamily="49" charset="0"/>
-              </a:rPr>
-              <a:t> // не </a:t>
-            </a:r>
-            <a:r>
-              <a:rPr lang="en-US" sz="2200" dirty="0">
-                <a:solidFill>
-                  <a:srgbClr val="008000"/>
-                </a:solidFill>
-                <a:latin typeface="Consolas" panose="020B0609020204030204" pitchFamily="49" charset="0"/>
-              </a:rPr>
-              <a:t>OK</a:t>
-            </a:r>
-            <a:endParaRPr lang="en-US" sz="2200" dirty="0">
-              <a:solidFill>
-                <a:srgbClr val="000000"/>
-              </a:solidFill>
-              <a:latin typeface="Consolas" panose="020B0609020204030204" pitchFamily="49" charset="0"/>
-            </a:endParaRPr>
-          </a:p>
-        </p:txBody>
-      </p:sp>
-      <p:sp>
-        <p:nvSpPr>
-          <p:cNvPr id="4" name="Slide Number Placeholder 3"/>
-          <p:cNvSpPr>
-            <a:spLocks noGrp="1"/>
-          </p:cNvSpPr>
-          <p:nvPr>
-            <p:ph type="sldNum" sz="quarter" idx="12"/>
-          </p:nvPr>
-        </p:nvSpPr>
-        <p:spPr/>
-        <p:txBody>
-          <a:bodyPr/>
-          <a:lstStyle/>
-          <a:p>
-            <a:fld id="{3C0E2822-3F92-4355-B47E-F2E8C9595EE5}" type="slidenum">
-              <a:rPr lang="ru-RU" smtClean="0"/>
-              <a:t>13</a:t>
-            </a:fld>
-            <a:endParaRPr lang="ru-RU"/>
-          </a:p>
-        </p:txBody>
-      </p:sp>
-    </p:spTree>
-    <p:extLst>
-      <p:ext uri="{BB962C8B-B14F-4D97-AF65-F5344CB8AC3E}">
-        <p14:creationId xmlns:p14="http://schemas.microsoft.com/office/powerpoint/2010/main" val="375750876"/>
-      </p:ext>
-    </p:extLst>
-  </p:cSld>
-  <p:clrMapOvr>
-    <a:masterClrMapping/>
-  </p:clrMapOvr>
-</p:sld>
-</file>
-
-<file path=ppt/slides/slide14.xml><?xml version="1.0" encoding="utf-8"?>
-<p:sld xmlns:a="http://schemas.openxmlformats.org/drawingml/2006/main" xmlns:r="http://schemas.openxmlformats.org/officeDocument/2006/relationships" xmlns:p="http://schemas.openxmlformats.org/presentationml/2006/main">
-  <p:cSld>
-    <p:spTree>
-      <p:nvGrpSpPr>
-        <p:cNvPr id="1" name=""/>
-        <p:cNvGrpSpPr/>
-        <p:nvPr/>
-      </p:nvGrpSpPr>
-      <p:grpSpPr>
-        <a:xfrm>
-          <a:off x="0" y="0"/>
-          <a:ext cx="0" cy="0"/>
-          <a:chOff x="0" y="0"/>
-          <a:chExt cx="0" cy="0"/>
-        </a:xfrm>
-      </p:grpSpPr>
-      <p:sp>
-        <p:nvSpPr>
-          <p:cNvPr id="2" name="Title 1"/>
-          <p:cNvSpPr>
-            <a:spLocks noGrp="1"/>
-          </p:cNvSpPr>
-          <p:nvPr>
-            <p:ph type="title"/>
-          </p:nvPr>
-        </p:nvSpPr>
-        <p:spPr/>
-        <p:txBody>
-          <a:bodyPr/>
-          <a:lstStyle/>
-          <a:p>
-            <a:r>
-              <a:rPr lang="ru-RU" dirty="0"/>
-              <a:t>Выражения, являющиеся </a:t>
-            </a:r>
-            <a:r>
-              <a:rPr lang="en-US" dirty="0"/>
-              <a:t>ℓ-value</a:t>
-            </a:r>
-            <a:endParaRPr lang="ru-RU" dirty="0"/>
-          </a:p>
-        </p:txBody>
-      </p:sp>
-      <p:sp>
-        <p:nvSpPr>
-          <p:cNvPr id="3" name="Content Placeholder 2"/>
-          <p:cNvSpPr>
-            <a:spLocks noGrp="1"/>
-          </p:cNvSpPr>
-          <p:nvPr>
-            <p:ph idx="1"/>
-          </p:nvPr>
-        </p:nvSpPr>
-        <p:spPr/>
-        <p:txBody>
-          <a:bodyPr>
-            <a:normAutofit/>
-          </a:bodyPr>
-          <a:lstStyle/>
-          <a:p>
-            <a:r>
-              <a:rPr lang="en-US" dirty="0"/>
-              <a:t>var – </a:t>
-            </a:r>
-            <a:r>
-              <a:rPr lang="ru-RU" dirty="0"/>
-              <a:t>переменная</a:t>
-            </a:r>
-            <a:endParaRPr lang="en-US" dirty="0"/>
-          </a:p>
-          <a:p>
-            <a:r>
-              <a:rPr lang="ru-RU" dirty="0"/>
-              <a:t>*</a:t>
-            </a:r>
-            <a:r>
-              <a:rPr lang="en-US" dirty="0" err="1"/>
-              <a:t>ptr</a:t>
-            </a:r>
-            <a:r>
-              <a:rPr lang="en-US" dirty="0"/>
-              <a:t> </a:t>
-            </a:r>
-            <a:r>
-              <a:rPr lang="ru-RU" dirty="0"/>
-              <a:t>– разыменование указателя</a:t>
-            </a:r>
-          </a:p>
-          <a:p>
-            <a:r>
-              <a:rPr lang="en-US" dirty="0" err="1"/>
-              <a:t>ptr</a:t>
-            </a:r>
-            <a:r>
-              <a:rPr lang="en-US" dirty="0"/>
-              <a:t>[k] </a:t>
-            </a:r>
-            <a:r>
-              <a:rPr lang="ru-RU" dirty="0"/>
-              <a:t>– индексация</a:t>
-            </a:r>
-          </a:p>
-          <a:p>
-            <a:r>
-              <a:rPr lang="en-US" dirty="0"/>
-              <a:t>var.name </a:t>
-            </a:r>
-            <a:r>
-              <a:rPr lang="ru-RU" dirty="0"/>
-              <a:t>– доступ к полю структуры или объединения</a:t>
-            </a:r>
-          </a:p>
-          <a:p>
-            <a:r>
-              <a:rPr lang="en-US" dirty="0" err="1"/>
-              <a:t>ptr</a:t>
-            </a:r>
-            <a:r>
-              <a:rPr lang="en-US" dirty="0"/>
-              <a:t>-&gt;name – </a:t>
-            </a:r>
-            <a:r>
-              <a:rPr lang="ru-RU" dirty="0"/>
-              <a:t>доступ к полю структуры или объединения через указатель</a:t>
-            </a:r>
-          </a:p>
-          <a:p>
-            <a:endParaRPr lang="ru-RU" sz="2800" dirty="0"/>
-          </a:p>
-          <a:p>
-            <a:r>
-              <a:rPr lang="ru-RU" sz="2800" dirty="0">
-                <a:highlight>
-                  <a:srgbClr val="C0C0C0"/>
-                </a:highlight>
-              </a:rPr>
-              <a:t>Остальные выражения не являются </a:t>
-            </a:r>
-            <a:r>
-              <a:rPr lang="en-US" sz="2800" dirty="0">
-                <a:highlight>
-                  <a:srgbClr val="C0C0C0"/>
-                </a:highlight>
-              </a:rPr>
-              <a:t>ℓ-value</a:t>
-            </a:r>
-            <a:endParaRPr lang="ru-RU" sz="2800" dirty="0">
-              <a:highlight>
-                <a:srgbClr val="C0C0C0"/>
-              </a:highlight>
-            </a:endParaRPr>
-          </a:p>
-          <a:p>
-            <a:pPr lvl="1"/>
-            <a:r>
-              <a:rPr lang="ru-RU" sz="2400" dirty="0"/>
-              <a:t>Хранить их значения в памяти или нет решает компилятор</a:t>
-            </a:r>
-            <a:endParaRPr lang="en-US" sz="2400" dirty="0"/>
-          </a:p>
-        </p:txBody>
-      </p:sp>
-      <p:sp>
-        <p:nvSpPr>
-          <p:cNvPr id="4" name="Slide Number Placeholder 3"/>
-          <p:cNvSpPr>
-            <a:spLocks noGrp="1"/>
-          </p:cNvSpPr>
-          <p:nvPr>
-            <p:ph type="sldNum" sz="quarter" idx="12"/>
-          </p:nvPr>
-        </p:nvSpPr>
-        <p:spPr/>
-        <p:txBody>
-          <a:bodyPr/>
-          <a:lstStyle/>
-          <a:p>
-            <a:fld id="{3C0E2822-3F92-4355-B47E-F2E8C9595EE5}" type="slidenum">
-              <a:rPr lang="ru-RU" smtClean="0"/>
-              <a:t>14</a:t>
-            </a:fld>
-            <a:endParaRPr lang="ru-RU"/>
-          </a:p>
-        </p:txBody>
-      </p:sp>
-    </p:spTree>
-    <p:extLst>
-      <p:ext uri="{BB962C8B-B14F-4D97-AF65-F5344CB8AC3E}">
-        <p14:creationId xmlns:p14="http://schemas.microsoft.com/office/powerpoint/2010/main" val="4062731482"/>
       </p:ext>
     </p:extLst>
   </p:cSld>
@@ -5432,20 +6007,16 @@
           <a:p>
             <a:r>
               <a:rPr lang="ru-RU" dirty="0"/>
-              <a:t>Операторы, требующие </a:t>
-            </a:r>
-            <a:r>
-              <a:rPr lang="en-US" dirty="0">
-                <a:ea typeface="Calibri" panose="020F0502020204030204" pitchFamily="34" charset="0"/>
-                <a:cs typeface="Calibri" panose="020F0502020204030204" pitchFamily="34" charset="0"/>
-              </a:rPr>
-              <a:t>ℓ</a:t>
+              <a:t>Что такое </a:t>
             </a:r>
             <a:r>
               <a:rPr lang="en-US" dirty="0"/>
-              <a:t>-value</a:t>
-            </a:r>
-            <a:endParaRPr lang="ru-RU" dirty="0"/>
+              <a:t>ℓ-value</a:t>
+            </a:r>
+            <a:r>
+              <a:rPr lang="ru-RU" dirty="0"/>
+              <a:t>?</a:t>
+            </a:r>
           </a:p>
         </p:txBody>
       </p:sp>
@@ -5467,37 +6038,94 @@
           <a:lstStyle/>
           <a:p>
             <a:r>
+              <a:rPr lang="en-US" sz="2800" dirty="0">
+                <a:highlight>
+                  <a:srgbClr val="00FFFF"/>
+                </a:highlight>
+              </a:rPr>
+              <a:t>ℓ-value</a:t>
+            </a:r>
+            <a:r>
+              <a:rPr lang="en-US" sz="2800" dirty="0"/>
+              <a:t> </a:t>
+            </a:r>
+            <a:r>
+              <a:rPr lang="ru-RU" sz="2800" dirty="0"/>
+              <a:t>– значение, имеющее адрес в памяти</a:t>
+            </a:r>
+          </a:p>
+          <a:p>
+            <a:pPr marL="0" indent="0">
+              <a:buNone/>
+            </a:pPr>
+            <a:endParaRPr lang="ru-RU" sz="2800" dirty="0"/>
+          </a:p>
+          <a:p>
+            <a:r>
               <a:rPr lang="ru-RU" dirty="0"/>
-              <a:t>Левый операнд во всех видах присваивания</a:t>
+              <a:t>Нужно для описания семантики операторов, использующих адреса значений</a:t>
+            </a:r>
+          </a:p>
+          <a:p>
+            <a:pPr lvl="1"/>
+            <a:r>
+              <a:rPr lang="ru-RU" dirty="0"/>
+              <a:t>Почему так ОК?</a:t>
+            </a:r>
+          </a:p>
+          <a:p>
+            <a:pPr lvl="2"/>
+            <a:r>
+              <a:rPr lang="ru-RU" dirty="0"/>
+              <a:t>&amp;</a:t>
             </a:r>
             <a:r>
               <a:rPr lang="en-US" dirty="0"/>
-              <a:t> =, +=</a:t>
-            </a:r>
+              <a:t>x</a:t>
+            </a:r>
+          </a:p>
+          <a:p>
+            <a:pPr lvl="2"/>
+            <a:r>
+              <a:rPr lang="en-US" dirty="0"/>
+              <a:t>x = 5</a:t>
+            </a:r>
+          </a:p>
+          <a:p>
+            <a:pPr lvl="1"/>
             <a:r>
               <a:rPr lang="ru-RU" dirty="0"/>
-              <a:t> и т.п.</a:t>
-            </a:r>
-          </a:p>
-          <a:p>
+              <a:t>Почему так не ОК?</a:t>
+            </a:r>
+          </a:p>
+          <a:p>
+            <a:pPr lvl="2"/>
             <a:r>
               <a:rPr lang="ru-RU" dirty="0"/>
-              <a:t>Взятие адреса </a:t>
+              <a:t>&amp;5</a:t>
+            </a:r>
+            <a:endParaRPr lang="en-US" dirty="0"/>
+          </a:p>
+          <a:p>
+            <a:pPr lvl="2"/>
+            <a:r>
+              <a:rPr lang="ru-RU" dirty="0"/>
+              <a:t>(</a:t>
             </a:r>
             <a:r>
               <a:rPr lang="en-US" dirty="0"/>
-              <a:t>&amp;</a:t>
+              <a:t>int)x = 5</a:t>
             </a:r>
             <a:endParaRPr lang="ru-RU" dirty="0"/>
           </a:p>
           <a:p>
-            <a:r>
-              <a:rPr lang="ru-RU" dirty="0"/>
-              <a:t>Префиксные и постфиксные ++ и --</a:t>
-            </a:r>
-          </a:p>
-          <a:p>
-            <a:endParaRPr lang="ru-RU" sz="2800" dirty="0"/>
+            <a:pPr lvl="1"/>
+            <a:endParaRPr lang="en-US" sz="2200" dirty="0">
+              <a:solidFill>
+                <a:srgbClr val="000000"/>
+              </a:solidFill>
+              <a:latin typeface="Consolas" panose="020B0609020204030204" pitchFamily="49" charset="0"/>
+            </a:endParaRPr>
           </a:p>
         </p:txBody>
       </p:sp>
@@ -5519,6 +6147,344 @@
             <a:fld id="{3C0E2822-3F92-4355-B47E-F2E8C9595EE5}" type="slidenum">
               <a:rPr lang="ru-RU" smtClean="0"/>
               <a:t>15</a:t>
+            </a:fld>
+            <a:endParaRPr lang="ru-RU"/>
+          </a:p>
+        </p:txBody>
+      </p:sp>
+    </p:spTree>
+    <p:extLst>
+      <p:ext uri="{BB962C8B-B14F-4D97-AF65-F5344CB8AC3E}">
+        <p14:creationId xmlns:p14="http://schemas.microsoft.com/office/powerpoint/2010/main" val="375750876"/>
+      </p:ext>
+    </p:extLst>
+  </p:cSld>
+  <p:clrMapOvr>
+    <a:masterClrMapping/>
+  </p:clrMapOvr>
+</p:sld>
+</file>
+
+<file path=ppt/slides/slide16.xml><?xml version="1.0" encoding="utf-8"?>
+<p:sld xmlns:a="http://schemas.openxmlformats.org/drawingml/2006/main" xmlns:r="http://schemas.openxmlformats.org/officeDocument/2006/relationships" xmlns:p="http://schemas.openxmlformats.org/presentationml/2006/main">
+  <p:cSld>
+    <p:spTree>
+      <p:nvGrpSpPr>
+        <p:cNvPr id="1" name=""/>
+        <p:cNvGrpSpPr/>
+        <p:nvPr/>
+      </p:nvGrpSpPr>
+      <p:grpSpPr>
+        <a:xfrm>
+          <a:off x="0" y="0"/>
+          <a:ext cx="0" cy="0"/>
+          <a:chOff x="0" y="0"/>
+          <a:chExt cx="0" cy="0"/>
+        </a:xfrm>
+      </p:grpSpPr>
+      <p:sp>
+        <p:nvSpPr>
+          <p:cNvPr id="2" name="Title 1"/>
+          <p:cNvSpPr>
+            <a:spLocks noGrp="1"/>
+          </p:cNvSpPr>
+          <p:nvPr>
+            <p:ph type="title"/>
+          </p:nvPr>
+        </p:nvSpPr>
+        <p:spPr/>
+        <p:txBody>
+          <a:bodyPr/>
+          <a:lstStyle/>
+          <a:p>
+            <a:r>
+              <a:rPr lang="ru-RU" dirty="0"/>
+              <a:t>Выражения, являющиеся </a:t>
+            </a:r>
+            <a:r>
+              <a:rPr lang="en-US" dirty="0"/>
+              <a:t>ℓ-value</a:t>
+            </a:r>
+            <a:endParaRPr lang="ru-RU" dirty="0"/>
+          </a:p>
+        </p:txBody>
+      </p:sp>
+      <p:sp>
+        <p:nvSpPr>
+          <p:cNvPr id="3" name="Content Placeholder 2"/>
+          <p:cNvSpPr>
+            <a:spLocks noGrp="1"/>
+          </p:cNvSpPr>
+          <p:nvPr>
+            <p:ph idx="1"/>
+          </p:nvPr>
+        </p:nvSpPr>
+        <p:spPr/>
+        <p:txBody>
+          <a:bodyPr>
+            <a:normAutofit/>
+          </a:bodyPr>
+          <a:lstStyle/>
+          <a:p>
+            <a:r>
+              <a:rPr lang="en-US" dirty="0"/>
+              <a:t>var – </a:t>
+            </a:r>
+            <a:r>
+              <a:rPr lang="ru-RU" dirty="0"/>
+              <a:t>переменная</a:t>
+            </a:r>
+            <a:endParaRPr lang="en-US" dirty="0"/>
+          </a:p>
+          <a:p>
+            <a:r>
+              <a:rPr lang="ru-RU" dirty="0"/>
+              <a:t>*</a:t>
+            </a:r>
+            <a:r>
+              <a:rPr lang="en-US" dirty="0" err="1"/>
+              <a:t>ptr</a:t>
+            </a:r>
+            <a:r>
+              <a:rPr lang="en-US" dirty="0"/>
+              <a:t> </a:t>
+            </a:r>
+            <a:r>
+              <a:rPr lang="ru-RU" dirty="0"/>
+              <a:t>– разыменование указателя</a:t>
+            </a:r>
+          </a:p>
+          <a:p>
+            <a:r>
+              <a:rPr lang="en-US" dirty="0" err="1"/>
+              <a:t>ptr</a:t>
+            </a:r>
+            <a:r>
+              <a:rPr lang="en-US" dirty="0"/>
+              <a:t>[k] </a:t>
+            </a:r>
+            <a:r>
+              <a:rPr lang="ru-RU" dirty="0"/>
+              <a:t>– индексация</a:t>
+            </a:r>
+          </a:p>
+          <a:p>
+            <a:r>
+              <a:rPr lang="en-US" dirty="0"/>
+              <a:t>var.name </a:t>
+            </a:r>
+            <a:r>
+              <a:rPr lang="ru-RU" dirty="0"/>
+              <a:t>– доступ к полю структуры или объединения</a:t>
+            </a:r>
+          </a:p>
+          <a:p>
+            <a:r>
+              <a:rPr lang="en-US" dirty="0" err="1"/>
+              <a:t>ptr</a:t>
+            </a:r>
+            <a:r>
+              <a:rPr lang="en-US" dirty="0"/>
+              <a:t>-&gt;name – </a:t>
+            </a:r>
+            <a:r>
+              <a:rPr lang="ru-RU" dirty="0"/>
+              <a:t>доступ к полю структуры или объединения через указатель</a:t>
+            </a:r>
+          </a:p>
+          <a:p>
+            <a:endParaRPr lang="ru-RU" sz="2800" dirty="0"/>
+          </a:p>
+          <a:p>
+            <a:r>
+              <a:rPr lang="ru-RU" sz="2800" dirty="0">
+                <a:highlight>
+                  <a:srgbClr val="C0C0C0"/>
+                </a:highlight>
+              </a:rPr>
+              <a:t>Остальные выражения не являются </a:t>
+            </a:r>
+            <a:r>
+              <a:rPr lang="en-US" sz="2800" dirty="0">
+                <a:highlight>
+                  <a:srgbClr val="C0C0C0"/>
+                </a:highlight>
+              </a:rPr>
+              <a:t>ℓ-value</a:t>
+            </a:r>
+            <a:endParaRPr lang="ru-RU" sz="2800" dirty="0">
+              <a:highlight>
+                <a:srgbClr val="C0C0C0"/>
+              </a:highlight>
+            </a:endParaRPr>
+          </a:p>
+          <a:p>
+            <a:pPr lvl="1"/>
+            <a:r>
+              <a:rPr lang="ru-RU" sz="2400" dirty="0"/>
+              <a:t>Хранить их значения в памяти или нет решает компилятор</a:t>
+            </a:r>
+            <a:endParaRPr lang="en-US" sz="2400" dirty="0"/>
+          </a:p>
+        </p:txBody>
+      </p:sp>
+      <p:sp>
+        <p:nvSpPr>
+          <p:cNvPr id="4" name="Slide Number Placeholder 3"/>
+          <p:cNvSpPr>
+            <a:spLocks noGrp="1"/>
+          </p:cNvSpPr>
+          <p:nvPr>
+            <p:ph type="sldNum" sz="quarter" idx="12"/>
+          </p:nvPr>
+        </p:nvSpPr>
+        <p:spPr/>
+        <p:txBody>
+          <a:bodyPr/>
+          <a:lstStyle/>
+          <a:p>
+            <a:fld id="{3C0E2822-3F92-4355-B47E-F2E8C9595EE5}" type="slidenum">
+              <a:rPr lang="ru-RU" smtClean="0"/>
+              <a:t>16</a:t>
+            </a:fld>
+            <a:endParaRPr lang="ru-RU"/>
+          </a:p>
+        </p:txBody>
+      </p:sp>
+    </p:spTree>
+    <p:extLst>
+      <p:ext uri="{BB962C8B-B14F-4D97-AF65-F5344CB8AC3E}">
+        <p14:creationId xmlns:p14="http://schemas.microsoft.com/office/powerpoint/2010/main" val="4062731482"/>
+      </p:ext>
+    </p:extLst>
+  </p:cSld>
+  <p:clrMapOvr>
+    <a:masterClrMapping/>
+  </p:clrMapOvr>
+</p:sld>
+</file>
+
+<file path=ppt/slides/slide17.xml><?xml version="1.0" encoding="utf-8"?>
+<p:sld xmlns:a="http://schemas.openxmlformats.org/drawingml/2006/main" xmlns:r="http://schemas.openxmlformats.org/officeDocument/2006/relationships" xmlns:p="http://schemas.openxmlformats.org/presentationml/2006/main">
+  <p:cSld>
+    <p:spTree>
+      <p:nvGrpSpPr>
+        <p:cNvPr id="1" name=""/>
+        <p:cNvGrpSpPr/>
+        <p:nvPr/>
+      </p:nvGrpSpPr>
+      <p:grpSpPr>
+        <a:xfrm>
+          <a:off x="0" y="0"/>
+          <a:ext cx="0" cy="0"/>
+          <a:chOff x="0" y="0"/>
+          <a:chExt cx="0" cy="0"/>
+        </a:xfrm>
+      </p:grpSpPr>
+      <p:sp>
+        <p:nvSpPr>
+          <p:cNvPr id="2" name="Title 1"/>
+          <p:cNvSpPr>
+            <a:spLocks noGrp="1"/>
+          </p:cNvSpPr>
+          <p:nvPr>
+            <p:ph type="title"/>
+          </p:nvPr>
+        </p:nvSpPr>
+        <p:spPr/>
+        <p:txBody>
+          <a:bodyPr/>
+          <a:lstStyle/>
+          <a:p>
+            <a:r>
+              <a:rPr lang="ru-RU" dirty="0"/>
+              <a:t>Операторы, требующие </a:t>
+            </a:r>
+            <a:r>
+              <a:rPr lang="en-US" dirty="0">
+                <a:ea typeface="Calibri" panose="020F0502020204030204" pitchFamily="34" charset="0"/>
+                <a:cs typeface="Calibri" panose="020F0502020204030204" pitchFamily="34" charset="0"/>
+              </a:rPr>
+              <a:t>ℓ</a:t>
+            </a:r>
+            <a:r>
+              <a:rPr lang="en-US" dirty="0"/>
+              <a:t>-value</a:t>
+            </a:r>
+            <a:endParaRPr lang="ru-RU" dirty="0"/>
+          </a:p>
+        </p:txBody>
+      </p:sp>
+      <p:sp>
+        <p:nvSpPr>
+          <p:cNvPr id="3" name="Content Placeholder 2"/>
+          <p:cNvSpPr>
+            <a:spLocks noGrp="1"/>
+          </p:cNvSpPr>
+          <p:nvPr>
+            <p:ph idx="1"/>
+          </p:nvPr>
+        </p:nvSpPr>
+        <p:spPr/>
+        <p:txBody>
+          <a:bodyPr>
+            <a:normAutofit/>
+          </a:bodyPr>
+          <a:lstStyle/>
+          <a:p>
+            <a:r>
+              <a:rPr lang="ru-RU" dirty="0"/>
+              <a:t>Левый операнд во всех видах присваивания</a:t>
+            </a:r>
+            <a:r>
+              <a:rPr lang="en-US" dirty="0"/>
+              <a:t> =, +=</a:t>
+            </a:r>
+            <a:r>
+              <a:rPr lang="ru-RU" dirty="0"/>
+              <a:t> и т.п.</a:t>
+            </a:r>
+          </a:p>
+          <a:p>
+            <a:r>
+              <a:rPr lang="ru-RU" dirty="0"/>
+              <a:t>Взятие адреса </a:t>
+            </a:r>
+            <a:r>
+              <a:rPr lang="en-US" dirty="0"/>
+              <a:t>&amp;</a:t>
+            </a:r>
+            <a:endParaRPr lang="ru-RU" dirty="0"/>
+          </a:p>
+          <a:p>
+            <a:r>
+              <a:rPr lang="ru-RU" dirty="0"/>
+              <a:t>Префиксные и постфиксные ++ и --</a:t>
+            </a:r>
+          </a:p>
+          <a:p>
+            <a:endParaRPr lang="ru-RU" sz="2800" dirty="0"/>
+          </a:p>
+        </p:txBody>
+      </p:sp>
+      <p:sp>
+        <p:nvSpPr>
+          <p:cNvPr id="4" name="Slide Number Placeholder 3"/>
+          <p:cNvSpPr>
+            <a:spLocks noGrp="1"/>
+          </p:cNvSpPr>
+          <p:nvPr>
+            <p:ph type="sldNum" sz="quarter" idx="12"/>
+          </p:nvPr>
+        </p:nvSpPr>
+        <p:spPr/>
+        <p:txBody>
+          <a:bodyPr/>
+          <a:lstStyle/>
+          <a:p>
+            <a:fld id="{3C0E2822-3F92-4355-B47E-F2E8C9595EE5}" type="slidenum">
+              <a:rPr lang="ru-RU" smtClean="0"/>
+              <a:t>17</a:t>
             </a:fld>
             <a:endParaRPr lang="ru-RU"/>
           </a:p>
@@ -5942,7 +6908,7 @@
         </p:nvSpPr>
         <p:spPr>
           <a:xfrm>
-            <a:off x="4061360" y="4594327"/>
+            <a:off x="4061360" y="4414861"/>
             <a:ext cx="978408" cy="484632"/>
           </a:xfrm>
           <a:prstGeom prst="rightArrow">
@@ -5988,7 +6954,7 @@
         </p:nvSpPr>
         <p:spPr>
           <a:xfrm>
-            <a:off x="6663030" y="4594327"/>
+            <a:off x="6663030" y="4414861"/>
             <a:ext cx="978408" cy="484632"/>
           </a:xfrm>
           <a:prstGeom prst="rightArrow">
@@ -6033,7 +6999,7 @@
 </p:sld>
 </file>
 
-<file path=ppt/slides/slide16.xml><?xml version="1.0" encoding="utf-8"?>
+<file path=ppt/slides/slide18.xml><?xml version="1.0" encoding="utf-8"?>
 <p:sld xmlns:a="http://schemas.openxmlformats.org/drawingml/2006/main" xmlns:r="http://schemas.openxmlformats.org/officeDocument/2006/relationships" xmlns:p="http://schemas.openxmlformats.org/presentationml/2006/main">
   <p:cSld>
     <p:spTree>
@@ -6531,7 +7497,7 @@
           <a:p>
             <a:fld id="{3C0E2822-3F92-4355-B47E-F2E8C9595EE5}" type="slidenum">
               <a:rPr lang="ru-RU" smtClean="0"/>
-              <a:t>16</a:t>
+              <a:t>18</a:t>
             </a:fld>
             <a:endParaRPr lang="ru-RU"/>
           </a:p>
@@ -6541,911 +7507,6 @@
     <p:extLst>
       <p:ext uri="{BB962C8B-B14F-4D97-AF65-F5344CB8AC3E}">
         <p14:creationId xmlns:p14="http://schemas.microsoft.com/office/powerpoint/2010/main" val="1277874312"/>
-      </p:ext>
-    </p:extLst>
-  </p:cSld>
-  <p:clrMapOvr>
-    <a:masterClrMapping/>
-  </p:clrMapOvr>
-</p:sld>
-</file>
-
-<file path=ppt/slides/slide17.xml><?xml version="1.0" encoding="utf-8"?>
-<p:sld xmlns:a="http://schemas.openxmlformats.org/drawingml/2006/main" xmlns:r="http://schemas.openxmlformats.org/officeDocument/2006/relationships" xmlns:p="http://schemas.openxmlformats.org/presentationml/2006/main">
-  <p:cSld>
-    <p:spTree>
-      <p:nvGrpSpPr>
-        <p:cNvPr id="1" name=""/>
-        <p:cNvGrpSpPr/>
-        <p:nvPr/>
-      </p:nvGrpSpPr>
-      <p:grpSpPr>
-        <a:xfrm>
-          <a:off x="0" y="0"/>
-          <a:ext cx="0" cy="0"/>
-          <a:chOff x="0" y="0"/>
-          <a:chExt cx="0" cy="0"/>
-        </a:xfrm>
-      </p:grpSpPr>
-      <p:sp>
-        <p:nvSpPr>
-          <p:cNvPr id="2" name="Title 1"/>
-          <p:cNvSpPr>
-            <a:spLocks noGrp="1"/>
-          </p:cNvSpPr>
-          <p:nvPr>
-            <p:ph type="title"/>
-          </p:nvPr>
-        </p:nvSpPr>
-        <p:spPr/>
-        <p:txBody>
-          <a:bodyPr>
-            <a:normAutofit/>
-          </a:bodyPr>
-          <a:lstStyle/>
-          <a:p>
-            <a:r>
-              <a:rPr lang="ru-RU" dirty="0"/>
-              <a:t>Что такое побочный эффект?</a:t>
-            </a:r>
-          </a:p>
-        </p:txBody>
-      </p:sp>
-      <p:sp>
-        <p:nvSpPr>
-          <p:cNvPr id="3" name="Content Placeholder 2"/>
-          <p:cNvSpPr>
-            <a:spLocks noGrp="1"/>
-          </p:cNvSpPr>
-          <p:nvPr>
-            <p:ph sz="half" idx="1"/>
-          </p:nvPr>
-        </p:nvSpPr>
-        <p:spPr/>
-        <p:txBody>
-          <a:bodyPr>
-            <a:normAutofit fontScale="92500" lnSpcReduction="20000"/>
-          </a:bodyPr>
-          <a:lstStyle/>
-          <a:p>
-            <a:r>
-              <a:rPr lang="ru-RU" dirty="0">
-                <a:highlight>
-                  <a:srgbClr val="00FFFF"/>
-                </a:highlight>
-              </a:rPr>
-              <a:t>Побочный эффект </a:t>
-            </a:r>
-            <a:r>
-              <a:rPr lang="ru-RU" dirty="0"/>
-              <a:t>(</a:t>
-            </a:r>
-            <a:r>
-              <a:rPr lang="en-US" dirty="0"/>
-              <a:t>side effect</a:t>
-            </a:r>
-            <a:r>
-              <a:rPr lang="ru-RU" dirty="0"/>
-              <a:t>) вычисления выражения – это факт изменения содержимого ячеек памяти в процессе вычисления выражения</a:t>
-            </a:r>
-          </a:p>
-          <a:p>
-            <a:endParaRPr lang="ru-RU" dirty="0"/>
-          </a:p>
-        </p:txBody>
-      </p:sp>
-      <p:sp>
-        <p:nvSpPr>
-          <p:cNvPr id="4" name="Content Placeholder 3"/>
-          <p:cNvSpPr>
-            <a:spLocks noGrp="1"/>
-          </p:cNvSpPr>
-          <p:nvPr>
-            <p:ph sz="half" idx="2"/>
-          </p:nvPr>
-        </p:nvSpPr>
-        <p:spPr/>
-        <p:txBody>
-          <a:bodyPr>
-            <a:normAutofit fontScale="92500" lnSpcReduction="20000"/>
-          </a:bodyPr>
-          <a:lstStyle/>
-          <a:p>
-            <a:r>
-              <a:rPr lang="ru-RU" dirty="0"/>
-              <a:t>Присваивание</a:t>
-            </a:r>
-          </a:p>
-          <a:p>
-            <a:pPr lvl="1"/>
-            <a:r>
-              <a:rPr lang="en-US" dirty="0"/>
-              <a:t>x = 1;</a:t>
-            </a:r>
-            <a:r>
-              <a:rPr lang="ru-RU" dirty="0"/>
-              <a:t> </a:t>
-            </a:r>
-          </a:p>
-          <a:p>
-            <a:pPr lvl="2"/>
-            <a:endParaRPr lang="ru-RU" dirty="0"/>
-          </a:p>
-          <a:p>
-            <a:r>
-              <a:rPr lang="ru-RU" dirty="0"/>
-              <a:t>Инкремент и декремент</a:t>
-            </a:r>
-            <a:endParaRPr lang="en-US" dirty="0"/>
-          </a:p>
-          <a:p>
-            <a:pPr lvl="1"/>
-            <a:r>
-              <a:rPr lang="en-US" dirty="0"/>
-              <a:t>i</a:t>
-            </a:r>
-            <a:r>
-              <a:rPr lang="ru-RU" dirty="0"/>
-              <a:t> </a:t>
-            </a:r>
-            <a:r>
-              <a:rPr lang="en-US" dirty="0"/>
-              <a:t>=</a:t>
-            </a:r>
-            <a:r>
-              <a:rPr lang="ru-RU" dirty="0"/>
-              <a:t> </a:t>
-            </a:r>
-            <a:r>
-              <a:rPr lang="en-US" dirty="0"/>
-              <a:t>0; A[i++]</a:t>
-            </a:r>
-            <a:r>
-              <a:rPr lang="ru-RU" dirty="0"/>
-              <a:t> </a:t>
-            </a:r>
-            <a:r>
-              <a:rPr lang="en-US" dirty="0"/>
-              <a:t>=</a:t>
-            </a:r>
-            <a:r>
-              <a:rPr lang="ru-RU" dirty="0"/>
-              <a:t> </a:t>
-            </a:r>
-            <a:r>
-              <a:rPr lang="en-US" dirty="0" err="1"/>
-              <a:t>i</a:t>
-            </a:r>
-            <a:r>
-              <a:rPr lang="en-US" dirty="0"/>
-              <a:t>++;</a:t>
-            </a:r>
-            <a:r>
-              <a:rPr lang="ru-RU" dirty="0"/>
-              <a:t> </a:t>
-            </a:r>
-            <a:r>
-              <a:rPr lang="en-US" dirty="0"/>
-              <a:t>A[</a:t>
-            </a:r>
-            <a:r>
-              <a:rPr lang="ru-RU" dirty="0"/>
-              <a:t>++</a:t>
-            </a:r>
-            <a:r>
-              <a:rPr lang="en-US" dirty="0" err="1"/>
-              <a:t>i</a:t>
-            </a:r>
-            <a:r>
-              <a:rPr lang="en-US" dirty="0"/>
-              <a:t>]</a:t>
-            </a:r>
-            <a:r>
-              <a:rPr lang="ru-RU" dirty="0"/>
-              <a:t> </a:t>
-            </a:r>
-            <a:r>
-              <a:rPr lang="en-US" dirty="0"/>
-              <a:t>=</a:t>
-            </a:r>
-            <a:r>
-              <a:rPr lang="ru-RU" dirty="0"/>
-              <a:t> ++</a:t>
-            </a:r>
-            <a:r>
-              <a:rPr lang="en-US" dirty="0" err="1"/>
-              <a:t>i</a:t>
-            </a:r>
-            <a:r>
-              <a:rPr lang="en-US" dirty="0"/>
-              <a:t>;</a:t>
-            </a:r>
-            <a:endParaRPr lang="ru-RU" dirty="0"/>
-          </a:p>
-          <a:p>
-            <a:pPr lvl="1"/>
-            <a:endParaRPr lang="en-US" dirty="0"/>
-          </a:p>
-          <a:p>
-            <a:pPr lvl="1"/>
-            <a:r>
-              <a:rPr lang="ru-RU" dirty="0"/>
-              <a:t>Какие элементы </a:t>
-            </a:r>
-            <a:r>
-              <a:rPr lang="en-US" dirty="0"/>
-              <a:t>A</a:t>
-            </a:r>
-            <a:r>
-              <a:rPr lang="ru-RU" dirty="0"/>
-              <a:t> изменятся? Какие они получат значения</a:t>
-            </a:r>
-            <a:r>
-              <a:rPr lang="en-US" dirty="0"/>
-              <a:t>?</a:t>
-            </a:r>
-            <a:endParaRPr lang="ru-RU" dirty="0"/>
-          </a:p>
-          <a:p>
-            <a:pPr lvl="1"/>
-            <a:r>
-              <a:rPr lang="ru-RU" dirty="0"/>
-              <a:t>В каком порядке исполнятся ++?</a:t>
-            </a:r>
-          </a:p>
-          <a:p>
-            <a:pPr lvl="1"/>
-            <a:r>
-              <a:rPr lang="ru-RU" dirty="0"/>
-              <a:t>Определён ли вообще порядок исполнения ++?</a:t>
-            </a:r>
-          </a:p>
-          <a:p>
-            <a:pPr lvl="2"/>
-            <a:endParaRPr lang="ru-RU" dirty="0"/>
-          </a:p>
-          <a:p>
-            <a:r>
-              <a:rPr lang="ru-RU" dirty="0"/>
-              <a:t>Вызов функции</a:t>
-            </a:r>
-          </a:p>
-          <a:p>
-            <a:pPr lvl="1"/>
-            <a:r>
-              <a:rPr lang="ru-RU" dirty="0"/>
-              <a:t>Почему?</a:t>
-            </a:r>
-          </a:p>
-          <a:p>
-            <a:endParaRPr lang="ru-RU" dirty="0"/>
-          </a:p>
-        </p:txBody>
-      </p:sp>
-      <p:sp>
-        <p:nvSpPr>
-          <p:cNvPr id="5" name="Slide Number Placeholder 4"/>
-          <p:cNvSpPr>
-            <a:spLocks noGrp="1"/>
-          </p:cNvSpPr>
-          <p:nvPr>
-            <p:ph type="sldNum" sz="quarter" idx="12"/>
-          </p:nvPr>
-        </p:nvSpPr>
-        <p:spPr/>
-        <p:txBody>
-          <a:bodyPr/>
-          <a:lstStyle/>
-          <a:p>
-            <a:fld id="{3C0E2822-3F92-4355-B47E-F2E8C9595EE5}" type="slidenum">
-              <a:rPr lang="ru-RU" smtClean="0"/>
-              <a:t>17</a:t>
-            </a:fld>
-            <a:endParaRPr lang="ru-RU"/>
-          </a:p>
-        </p:txBody>
-      </p:sp>
-    </p:spTree>
-    <p:extLst>
-      <p:ext uri="{BB962C8B-B14F-4D97-AF65-F5344CB8AC3E}">
-        <p14:creationId xmlns:p14="http://schemas.microsoft.com/office/powerpoint/2010/main" val="1521773726"/>
-      </p:ext>
-    </p:extLst>
-  </p:cSld>
-  <p:clrMapOvr>
-    <a:masterClrMapping/>
-  </p:clrMapOvr>
-</p:sld>
-</file>
-
-<file path=ppt/slides/slide18.xml><?xml version="1.0" encoding="utf-8"?>
-<p:sld xmlns:a="http://schemas.openxmlformats.org/drawingml/2006/main" xmlns:r="http://schemas.openxmlformats.org/officeDocument/2006/relationships" xmlns:p="http://schemas.openxmlformats.org/presentationml/2006/main">
-  <p:cSld>
-    <p:spTree>
-      <p:nvGrpSpPr>
-        <p:cNvPr id="1" name=""/>
-        <p:cNvGrpSpPr/>
-        <p:nvPr/>
-      </p:nvGrpSpPr>
-      <p:grpSpPr>
-        <a:xfrm>
-          <a:off x="0" y="0"/>
-          <a:ext cx="0" cy="0"/>
-          <a:chOff x="0" y="0"/>
-          <a:chExt cx="0" cy="0"/>
-        </a:xfrm>
-      </p:grpSpPr>
-      <p:pic>
-        <p:nvPicPr>
-          <p:cNvPr id="20" name="Picture 19">
-            <a:extLst>
-              <a:ext uri="{FF2B5EF4-FFF2-40B4-BE49-F238E27FC236}">
-                <a16:creationId xmlns:a16="http://schemas.microsoft.com/office/drawing/2014/main" id="{E2A85B80-2DB9-209D-6AD9-C019EF6BDE16}"/>
-              </a:ext>
-            </a:extLst>
-          </p:cNvPr>
-          <p:cNvPicPr>
-            <a:picLocks noChangeAspect="1"/>
-          </p:cNvPicPr>
-          <p:nvPr/>
-        </p:nvPicPr>
-        <p:blipFill>
-          <a:blip r:embed="rId2"/>
-          <a:stretch>
-            <a:fillRect/>
-          </a:stretch>
-        </p:blipFill>
-        <p:spPr>
-          <a:xfrm>
-            <a:off x="3171905" y="3739339"/>
-            <a:ext cx="8397145" cy="2386825"/>
-          </a:xfrm>
-          <a:prstGeom prst="rect">
-            <a:avLst/>
-          </a:prstGeom>
-        </p:spPr>
-      </p:pic>
-      <p:sp>
-        <p:nvSpPr>
-          <p:cNvPr id="2" name="Title 1"/>
-          <p:cNvSpPr>
-            <a:spLocks noGrp="1"/>
-          </p:cNvSpPr>
-          <p:nvPr>
-            <p:ph type="title"/>
-          </p:nvPr>
-        </p:nvSpPr>
-        <p:spPr/>
-        <p:txBody>
-          <a:bodyPr>
-            <a:normAutofit/>
-          </a:bodyPr>
-          <a:lstStyle/>
-          <a:p>
-            <a:r>
-              <a:rPr lang="ru-RU" dirty="0"/>
-              <a:t>Что такое точка следования?</a:t>
-            </a:r>
-          </a:p>
-        </p:txBody>
-      </p:sp>
-      <p:sp>
-        <p:nvSpPr>
-          <p:cNvPr id="3" name="Content Placeholder 2"/>
-          <p:cNvSpPr>
-            <a:spLocks noGrp="1"/>
-          </p:cNvSpPr>
-          <p:nvPr>
-            <p:ph idx="1"/>
-          </p:nvPr>
-        </p:nvSpPr>
-        <p:spPr/>
-        <p:txBody>
-          <a:bodyPr>
-            <a:normAutofit/>
-          </a:bodyPr>
-          <a:lstStyle/>
-          <a:p>
-            <a:r>
-              <a:rPr lang="ru-RU" dirty="0">
-                <a:highlight>
-                  <a:srgbClr val="00FFFF"/>
-                </a:highlight>
-              </a:rPr>
-              <a:t>Точка следования </a:t>
-            </a:r>
-            <a:r>
-              <a:rPr lang="ru-RU" dirty="0"/>
-              <a:t>(</a:t>
-            </a:r>
-            <a:r>
-              <a:rPr lang="en-US" dirty="0"/>
-              <a:t>s</a:t>
-            </a:r>
-            <a:r>
-              <a:rPr lang="ru-RU" dirty="0"/>
-              <a:t>equence point)</a:t>
-            </a:r>
-            <a:r>
-              <a:rPr lang="en-US" dirty="0"/>
-              <a:t> – </a:t>
-            </a:r>
-            <a:r>
-              <a:rPr lang="ru-RU" dirty="0"/>
-              <a:t>это момент вычисления выражения, когда побочные эффекты</a:t>
-            </a:r>
-          </a:p>
-          <a:p>
-            <a:pPr lvl="1"/>
-            <a:r>
-              <a:rPr lang="ru-RU" dirty="0"/>
-              <a:t>все произошли в вычисленной части выражения</a:t>
-            </a:r>
-          </a:p>
-          <a:p>
-            <a:pPr lvl="1"/>
-            <a:r>
-              <a:rPr lang="ru-RU" dirty="0"/>
-              <a:t>ни один не произошёл в невычисленной части выражения</a:t>
-            </a:r>
-          </a:p>
-        </p:txBody>
-      </p:sp>
-      <p:sp>
-        <p:nvSpPr>
-          <p:cNvPr id="4" name="Slide Number Placeholder 3"/>
-          <p:cNvSpPr>
-            <a:spLocks noGrp="1"/>
-          </p:cNvSpPr>
-          <p:nvPr>
-            <p:ph type="sldNum" sz="quarter" idx="12"/>
-          </p:nvPr>
-        </p:nvSpPr>
-        <p:spPr/>
-        <p:txBody>
-          <a:bodyPr/>
-          <a:lstStyle/>
-          <a:p>
-            <a:fld id="{3C0E2822-3F92-4355-B47E-F2E8C9595EE5}" type="slidenum">
-              <a:rPr lang="ru-RU" smtClean="0"/>
-              <a:t>18</a:t>
-            </a:fld>
-            <a:endParaRPr lang="ru-RU"/>
-          </a:p>
-        </p:txBody>
-      </p:sp>
-      <p:sp>
-        <p:nvSpPr>
-          <p:cNvPr id="7" name="TextBox 6">
-            <a:extLst>
-              <a:ext uri="{FF2B5EF4-FFF2-40B4-BE49-F238E27FC236}">
-                <a16:creationId xmlns:a16="http://schemas.microsoft.com/office/drawing/2014/main" id="{983056DA-B9C6-A021-F5D4-7C74BEDB96FB}"/>
-              </a:ext>
-            </a:extLst>
-          </p:cNvPr>
-          <p:cNvSpPr txBox="1"/>
-          <p:nvPr/>
-        </p:nvSpPr>
-        <p:spPr>
-          <a:xfrm>
-            <a:off x="4512141" y="3884971"/>
-            <a:ext cx="820802" cy="369332"/>
-          </a:xfrm>
-          <a:prstGeom prst="rect">
-            <a:avLst/>
-          </a:prstGeom>
-          <a:noFill/>
-        </p:spPr>
-        <p:txBody>
-          <a:bodyPr wrap="none" rtlCol="0">
-            <a:spAutoFit/>
-          </a:bodyPr>
-          <a:lstStyle/>
-          <a:p>
-            <a:r>
-              <a:rPr lang="en-US" dirty="0"/>
-              <a:t>expr  1</a:t>
-            </a:r>
-            <a:endParaRPr lang="ru-RU" dirty="0"/>
-          </a:p>
-        </p:txBody>
-      </p:sp>
-      <p:sp>
-        <p:nvSpPr>
-          <p:cNvPr id="8" name="TextBox 7">
-            <a:extLst>
-              <a:ext uri="{FF2B5EF4-FFF2-40B4-BE49-F238E27FC236}">
-                <a16:creationId xmlns:a16="http://schemas.microsoft.com/office/drawing/2014/main" id="{AF94CE18-5721-13AC-004E-563544E07E6F}"/>
-              </a:ext>
-            </a:extLst>
-          </p:cNvPr>
-          <p:cNvSpPr txBox="1"/>
-          <p:nvPr/>
-        </p:nvSpPr>
-        <p:spPr>
-          <a:xfrm>
-            <a:off x="9307963" y="3884971"/>
-            <a:ext cx="820802" cy="369332"/>
-          </a:xfrm>
-          <a:prstGeom prst="rect">
-            <a:avLst/>
-          </a:prstGeom>
-          <a:noFill/>
-        </p:spPr>
-        <p:txBody>
-          <a:bodyPr wrap="none" rtlCol="0">
-            <a:spAutoFit/>
-          </a:bodyPr>
-          <a:lstStyle/>
-          <a:p>
-            <a:r>
-              <a:rPr lang="en-US" dirty="0"/>
-              <a:t>expr  2</a:t>
-            </a:r>
-            <a:endParaRPr lang="ru-RU" dirty="0"/>
-          </a:p>
-        </p:txBody>
-      </p:sp>
-      <p:sp>
-        <p:nvSpPr>
-          <p:cNvPr id="9" name="TextBox 8">
-            <a:extLst>
-              <a:ext uri="{FF2B5EF4-FFF2-40B4-BE49-F238E27FC236}">
-                <a16:creationId xmlns:a16="http://schemas.microsoft.com/office/drawing/2014/main" id="{C31D2B7F-5C37-5E18-40C0-062E35B7AA61}"/>
-              </a:ext>
-            </a:extLst>
-          </p:cNvPr>
-          <p:cNvSpPr txBox="1"/>
-          <p:nvPr/>
-        </p:nvSpPr>
-        <p:spPr>
-          <a:xfrm>
-            <a:off x="7176437" y="3884971"/>
-            <a:ext cx="428322" cy="369332"/>
-          </a:xfrm>
-          <a:prstGeom prst="rect">
-            <a:avLst/>
-          </a:prstGeom>
-          <a:noFill/>
-        </p:spPr>
-        <p:txBody>
-          <a:bodyPr wrap="none" rtlCol="0">
-            <a:spAutoFit/>
-          </a:bodyPr>
-          <a:lstStyle/>
-          <a:p>
-            <a:r>
-              <a:rPr lang="en-US" dirty="0"/>
-              <a:t>op</a:t>
-            </a:r>
-            <a:endParaRPr lang="ru-RU" dirty="0"/>
-          </a:p>
-        </p:txBody>
-      </p:sp>
-      <p:sp>
-        <p:nvSpPr>
-          <p:cNvPr id="10" name="TextBox 9">
-            <a:extLst>
-              <a:ext uri="{FF2B5EF4-FFF2-40B4-BE49-F238E27FC236}">
-                <a16:creationId xmlns:a16="http://schemas.microsoft.com/office/drawing/2014/main" id="{431358F7-56BC-9187-D22D-4353500B1259}"/>
-              </a:ext>
-            </a:extLst>
-          </p:cNvPr>
-          <p:cNvSpPr txBox="1"/>
-          <p:nvPr/>
-        </p:nvSpPr>
-        <p:spPr>
-          <a:xfrm>
-            <a:off x="4512141" y="4571836"/>
-            <a:ext cx="820802" cy="369332"/>
-          </a:xfrm>
-          <a:prstGeom prst="rect">
-            <a:avLst/>
-          </a:prstGeom>
-          <a:noFill/>
-        </p:spPr>
-        <p:txBody>
-          <a:bodyPr wrap="none" rtlCol="0">
-            <a:spAutoFit/>
-          </a:bodyPr>
-          <a:lstStyle/>
-          <a:p>
-            <a:r>
-              <a:rPr lang="en-US" dirty="0"/>
-              <a:t>expr  1</a:t>
-            </a:r>
-            <a:endParaRPr lang="ru-RU" dirty="0"/>
-          </a:p>
-        </p:txBody>
-      </p:sp>
-      <p:sp>
-        <p:nvSpPr>
-          <p:cNvPr id="11" name="TextBox 10">
-            <a:extLst>
-              <a:ext uri="{FF2B5EF4-FFF2-40B4-BE49-F238E27FC236}">
-                <a16:creationId xmlns:a16="http://schemas.microsoft.com/office/drawing/2014/main" id="{955D5B7E-01AB-8F13-413D-60E1D00110BC}"/>
-              </a:ext>
-            </a:extLst>
-          </p:cNvPr>
-          <p:cNvSpPr txBox="1"/>
-          <p:nvPr/>
-        </p:nvSpPr>
-        <p:spPr>
-          <a:xfrm>
-            <a:off x="8227843" y="4509120"/>
-            <a:ext cx="820802" cy="369332"/>
-          </a:xfrm>
-          <a:prstGeom prst="rect">
-            <a:avLst/>
-          </a:prstGeom>
-          <a:noFill/>
-        </p:spPr>
-        <p:txBody>
-          <a:bodyPr wrap="none" rtlCol="0">
-            <a:spAutoFit/>
-          </a:bodyPr>
-          <a:lstStyle/>
-          <a:p>
-            <a:r>
-              <a:rPr lang="en-US" dirty="0"/>
-              <a:t>expr  2</a:t>
-            </a:r>
-            <a:endParaRPr lang="ru-RU" dirty="0"/>
-          </a:p>
-        </p:txBody>
-      </p:sp>
-      <p:sp>
-        <p:nvSpPr>
-          <p:cNvPr id="12" name="TextBox 11">
-            <a:extLst>
-              <a:ext uri="{FF2B5EF4-FFF2-40B4-BE49-F238E27FC236}">
-                <a16:creationId xmlns:a16="http://schemas.microsoft.com/office/drawing/2014/main" id="{DDE885B4-2203-0140-D76D-59935C6A01DB}"/>
-              </a:ext>
-            </a:extLst>
-          </p:cNvPr>
-          <p:cNvSpPr txBox="1"/>
-          <p:nvPr/>
-        </p:nvSpPr>
-        <p:spPr>
-          <a:xfrm>
-            <a:off x="10708555" y="4509120"/>
-            <a:ext cx="428322" cy="369332"/>
-          </a:xfrm>
-          <a:prstGeom prst="rect">
-            <a:avLst/>
-          </a:prstGeom>
-          <a:noFill/>
-        </p:spPr>
-        <p:txBody>
-          <a:bodyPr wrap="none" rtlCol="0">
-            <a:spAutoFit/>
-          </a:bodyPr>
-          <a:lstStyle/>
-          <a:p>
-            <a:r>
-              <a:rPr lang="en-US" dirty="0"/>
-              <a:t>op</a:t>
-            </a:r>
-            <a:endParaRPr lang="ru-RU" dirty="0"/>
-          </a:p>
-        </p:txBody>
-      </p:sp>
-      <p:sp>
-        <p:nvSpPr>
-          <p:cNvPr id="13" name="TextBox 12">
-            <a:extLst>
-              <a:ext uri="{FF2B5EF4-FFF2-40B4-BE49-F238E27FC236}">
-                <a16:creationId xmlns:a16="http://schemas.microsoft.com/office/drawing/2014/main" id="{D2E408B1-63D8-2E22-5223-06BE17024531}"/>
-              </a:ext>
-            </a:extLst>
-          </p:cNvPr>
-          <p:cNvSpPr txBox="1"/>
-          <p:nvPr/>
-        </p:nvSpPr>
-        <p:spPr>
-          <a:xfrm>
-            <a:off x="535909" y="4556604"/>
-            <a:ext cx="2751779" cy="369332"/>
-          </a:xfrm>
-          <a:prstGeom prst="rect">
-            <a:avLst/>
-          </a:prstGeom>
-          <a:noFill/>
-        </p:spPr>
-        <p:txBody>
-          <a:bodyPr wrap="none" rtlCol="0">
-            <a:spAutoFit/>
-          </a:bodyPr>
-          <a:lstStyle/>
-          <a:p>
-            <a:r>
-              <a:rPr lang="ru-RU" dirty="0">
-                <a:latin typeface="Calibri" panose="020F0502020204030204" pitchFamily="34" charset="0"/>
-                <a:ea typeface="Calibri" panose="020F0502020204030204" pitchFamily="34" charset="0"/>
-                <a:cs typeface="Calibri" panose="020F0502020204030204" pitchFamily="34" charset="0"/>
-              </a:rPr>
-              <a:t>Исполняемые инструкции</a:t>
-            </a:r>
-          </a:p>
-        </p:txBody>
-      </p:sp>
-      <p:sp>
-        <p:nvSpPr>
-          <p:cNvPr id="15" name="TextBox 14">
-            <a:extLst>
-              <a:ext uri="{FF2B5EF4-FFF2-40B4-BE49-F238E27FC236}">
-                <a16:creationId xmlns:a16="http://schemas.microsoft.com/office/drawing/2014/main" id="{F6A38C2F-51C4-311B-4B60-CF91601ECA96}"/>
-              </a:ext>
-            </a:extLst>
-          </p:cNvPr>
-          <p:cNvSpPr txBox="1"/>
-          <p:nvPr/>
-        </p:nvSpPr>
-        <p:spPr>
-          <a:xfrm>
-            <a:off x="851385" y="5061015"/>
-            <a:ext cx="2120827" cy="369332"/>
-          </a:xfrm>
-          <a:prstGeom prst="rect">
-            <a:avLst/>
-          </a:prstGeom>
-          <a:noFill/>
-        </p:spPr>
-        <p:txBody>
-          <a:bodyPr wrap="square" rtlCol="0">
-            <a:spAutoFit/>
-          </a:bodyPr>
-          <a:lstStyle/>
-          <a:p>
-            <a:r>
-              <a:rPr lang="ru-RU" dirty="0">
-                <a:latin typeface="Calibri" panose="020F0502020204030204" pitchFamily="34" charset="0"/>
-                <a:ea typeface="Calibri" panose="020F0502020204030204" pitchFamily="34" charset="0"/>
-                <a:cs typeface="Calibri" panose="020F0502020204030204" pitchFamily="34" charset="0"/>
-              </a:rPr>
-              <a:t>Побочные эффекты</a:t>
-            </a:r>
-          </a:p>
-        </p:txBody>
-      </p:sp>
-      <p:sp>
-        <p:nvSpPr>
-          <p:cNvPr id="16" name="TextBox 15">
-            <a:extLst>
-              <a:ext uri="{FF2B5EF4-FFF2-40B4-BE49-F238E27FC236}">
-                <a16:creationId xmlns:a16="http://schemas.microsoft.com/office/drawing/2014/main" id="{36DF8541-BA29-85E0-E034-CBCFBD08601D}"/>
-              </a:ext>
-            </a:extLst>
-          </p:cNvPr>
-          <p:cNvSpPr txBox="1"/>
-          <p:nvPr/>
-        </p:nvSpPr>
-        <p:spPr>
-          <a:xfrm>
-            <a:off x="1125589" y="3884971"/>
-            <a:ext cx="1572418" cy="369332"/>
-          </a:xfrm>
-          <a:prstGeom prst="rect">
-            <a:avLst/>
-          </a:prstGeom>
-          <a:noFill/>
-        </p:spPr>
-        <p:txBody>
-          <a:bodyPr wrap="none" rtlCol="0">
-            <a:spAutoFit/>
-          </a:bodyPr>
-          <a:lstStyle/>
-          <a:p>
-            <a:r>
-              <a:rPr lang="ru-RU" dirty="0">
-                <a:latin typeface="Calibri" panose="020F0502020204030204" pitchFamily="34" charset="0"/>
-                <a:ea typeface="Calibri" panose="020F0502020204030204" pitchFamily="34" charset="0"/>
-                <a:cs typeface="Calibri" panose="020F0502020204030204" pitchFamily="34" charset="0"/>
-              </a:rPr>
-              <a:t>Исходный код</a:t>
-            </a:r>
-          </a:p>
-        </p:txBody>
-      </p:sp>
-      <p:sp>
-        <p:nvSpPr>
-          <p:cNvPr id="21" name="TextBox 20">
-            <a:extLst>
-              <a:ext uri="{FF2B5EF4-FFF2-40B4-BE49-F238E27FC236}">
-                <a16:creationId xmlns:a16="http://schemas.microsoft.com/office/drawing/2014/main" id="{DFB31354-A4D4-F801-25F7-0CFDC41F01A3}"/>
-              </a:ext>
-            </a:extLst>
-          </p:cNvPr>
-          <p:cNvSpPr txBox="1"/>
-          <p:nvPr/>
-        </p:nvSpPr>
-        <p:spPr>
-          <a:xfrm>
-            <a:off x="896664" y="5615736"/>
-            <a:ext cx="2030269" cy="369332"/>
-          </a:xfrm>
-          <a:prstGeom prst="rect">
-            <a:avLst/>
-          </a:prstGeom>
-          <a:noFill/>
-        </p:spPr>
-        <p:txBody>
-          <a:bodyPr wrap="square" rtlCol="0">
-            <a:spAutoFit/>
-          </a:bodyPr>
-          <a:lstStyle/>
-          <a:p>
-            <a:r>
-              <a:rPr lang="ru-RU" dirty="0">
-                <a:latin typeface="Calibri" panose="020F0502020204030204" pitchFamily="34" charset="0"/>
-                <a:ea typeface="Calibri" panose="020F0502020204030204" pitchFamily="34" charset="0"/>
-                <a:cs typeface="Calibri" panose="020F0502020204030204" pitchFamily="34" charset="0"/>
-              </a:rPr>
-              <a:t>Значения в памяти</a:t>
-            </a:r>
-          </a:p>
-        </p:txBody>
-      </p:sp>
-      <p:sp>
-        <p:nvSpPr>
-          <p:cNvPr id="22" name="Rectangle 21">
-            <a:extLst>
-              <a:ext uri="{FF2B5EF4-FFF2-40B4-BE49-F238E27FC236}">
-                <a16:creationId xmlns:a16="http://schemas.microsoft.com/office/drawing/2014/main" id="{2EB663FA-0C5D-0EEC-3042-2EEE7B5D3362}"/>
-              </a:ext>
-            </a:extLst>
-          </p:cNvPr>
-          <p:cNvSpPr/>
-          <p:nvPr/>
-        </p:nvSpPr>
-        <p:spPr>
-          <a:xfrm>
-            <a:off x="6456040" y="4293096"/>
-            <a:ext cx="331518" cy="831363"/>
-          </a:xfrm>
-          <a:prstGeom prst="rect">
-            <a:avLst/>
-          </a:prstGeom>
-          <a:solidFill>
-            <a:srgbClr val="FFFF00">
-              <a:alpha val="25000"/>
-            </a:srgbClr>
-          </a:solidFill>
-          <a:ln>
-            <a:solidFill>
-              <a:srgbClr val="FFC000"/>
-            </a:solidFill>
-          </a:ln>
-        </p:spPr>
-        <p:style>
-          <a:lnRef idx="2">
-            <a:schemeClr val="accent1">
-              <a:shade val="15000"/>
-            </a:schemeClr>
-          </a:lnRef>
-          <a:fillRef idx="1">
-            <a:schemeClr val="accent1"/>
-          </a:fillRef>
-          <a:effectRef idx="0">
-            <a:schemeClr val="accent1"/>
-          </a:effectRef>
-          <a:fontRef idx="minor">
-            <a:schemeClr val="lt1"/>
-          </a:fontRef>
-        </p:style>
-        <p:txBody>
-          <a:bodyPr rtlCol="0" anchor="ctr"/>
-          <a:lstStyle/>
-          <a:p>
-            <a:pPr algn="ctr"/>
-            <a:endParaRPr lang="ru-RU"/>
-          </a:p>
-        </p:txBody>
-      </p:sp>
-    </p:spTree>
-    <p:extLst>
-      <p:ext uri="{BB962C8B-B14F-4D97-AF65-F5344CB8AC3E}">
-        <p14:creationId xmlns:p14="http://schemas.microsoft.com/office/powerpoint/2010/main" val="2674460666"/>
       </p:ext>
     </p:extLst>
   </p:cSld>
@@ -7491,7 +7552,7 @@
           <a:p>
             <a:r>
               <a:rPr lang="ru-RU" dirty="0"/>
-              <a:t>Виды точек следования</a:t>
+              <a:t>Что такое побочный эффект?</a:t>
             </a:r>
           </a:p>
         </p:txBody>
@@ -7503,120 +7564,233 @@
             <a:spLocks noGrp="1"/>
           </p:cNvSpPr>
           <p:nvPr>
-            <p:ph idx="1"/>
+            <p:ph sz="half" idx="1"/>
           </p:nvPr>
         </p:nvSpPr>
         <p:spPr/>
         <p:txBody>
           <a:bodyPr>
-            <a:normAutofit fontScale="77500" lnSpcReduction="20000"/>
+            <a:normAutofit fontScale="92500" lnSpcReduction="20000"/>
           </a:bodyPr>
           <a:lstStyle/>
           <a:p>
-            <a:pPr marL="582930" indent="-514350">
-              <a:buFont typeface="+mj-lt"/>
-              <a:buAutoNum type="arabicPeriod"/>
-            </a:pPr>
-            <a:r>
-              <a:rPr lang="ru-RU" sz="2800" dirty="0"/>
-              <a:t>В конце вычисления левого операнда &amp;&amp;, || и , (запятая)</a:t>
-            </a:r>
-            <a:endParaRPr lang="en-US" sz="2800" dirty="0"/>
-          </a:p>
-          <a:p>
-            <a:pPr marL="582930" indent="-514350">
-              <a:buFont typeface="+mj-lt"/>
-              <a:buAutoNum type="arabicPeriod"/>
-            </a:pPr>
-            <a:endParaRPr lang="ru-RU" sz="2800" dirty="0"/>
-          </a:p>
-          <a:p>
-            <a:pPr marL="582930" indent="-514350">
-              <a:buFont typeface="+mj-lt"/>
-              <a:buAutoNum type="arabicPeriod"/>
-            </a:pPr>
-            <a:r>
-              <a:rPr lang="ru-RU" sz="2800" dirty="0"/>
-              <a:t>В конце вычисления первого операнда </a:t>
-            </a:r>
-            <a:r>
-              <a:rPr lang="en-US" sz="2800" dirty="0"/>
-              <a:t>?:</a:t>
-            </a:r>
-            <a:endParaRPr lang="ru-RU" sz="2800" dirty="0"/>
-          </a:p>
-          <a:p>
-            <a:pPr marL="582930" indent="-514350">
-              <a:buFont typeface="+mj-lt"/>
-              <a:buAutoNum type="arabicPeriod"/>
-            </a:pPr>
-            <a:endParaRPr lang="ru-RU" sz="2800" dirty="0"/>
-          </a:p>
-          <a:p>
-            <a:pPr marL="582930" indent="-514350">
-              <a:buFont typeface="+mj-lt"/>
-              <a:buAutoNum type="arabicPeriod"/>
-            </a:pPr>
-            <a:r>
-              <a:rPr lang="ru-RU" sz="2800" dirty="0"/>
-              <a:t>В конце всего выражения</a:t>
-            </a:r>
-          </a:p>
-          <a:p>
-            <a:pPr marL="582930" indent="-514350">
-              <a:buFont typeface="+mj-lt"/>
-              <a:buAutoNum type="arabicPeriod"/>
-            </a:pPr>
-            <a:endParaRPr lang="ru-RU" sz="2800" dirty="0"/>
-          </a:p>
-          <a:p>
-            <a:pPr marL="582930" indent="-514350">
-              <a:buFont typeface="+mj-lt"/>
-              <a:buAutoNum type="arabicPeriod"/>
-            </a:pPr>
-            <a:r>
-              <a:rPr lang="ru-RU" sz="2800" dirty="0"/>
-              <a:t>Перед входом в вызываемую функцию</a:t>
-            </a:r>
-          </a:p>
-          <a:p>
-            <a:pPr marL="582930" indent="-514350">
-              <a:buFont typeface="+mj-lt"/>
-              <a:buAutoNum type="arabicPeriod"/>
-            </a:pPr>
-            <a:endParaRPr lang="ru-RU" sz="2800" dirty="0"/>
-          </a:p>
-          <a:p>
-            <a:pPr marL="582930" indent="-514350">
-              <a:buFont typeface="+mj-lt"/>
-              <a:buAutoNum type="arabicPeriod"/>
-            </a:pPr>
-            <a:r>
-              <a:rPr lang="ru-RU" sz="2800" dirty="0"/>
-              <a:t>В объявлении с инициализацией на момент завершения вычисления инициализирующего значения</a:t>
-            </a:r>
-          </a:p>
-          <a:p>
-            <a:pPr marL="582930" indent="-514350"/>
-            <a:endParaRPr lang="ru-RU" sz="2800" dirty="0"/>
-          </a:p>
-          <a:p>
-            <a:pPr marL="582930" indent="-514350"/>
-            <a:r>
-              <a:rPr lang="ru-RU" sz="2800" dirty="0"/>
-              <a:t>В остальном порядок побочных эффектов является </a:t>
-            </a:r>
-            <a:r>
-              <a:rPr lang="en-US" sz="2800" dirty="0" err="1"/>
-              <a:t>unspecifed</a:t>
-            </a:r>
-            <a:endParaRPr lang="ru-RU" sz="2800" dirty="0"/>
+            <a:r>
+              <a:rPr lang="ru-RU" dirty="0">
+                <a:highlight>
+                  <a:srgbClr val="00FFFF"/>
+                </a:highlight>
+              </a:rPr>
+              <a:t>Побочный эффект </a:t>
+            </a:r>
+            <a:r>
+              <a:rPr lang="ru-RU" dirty="0"/>
+              <a:t>(</a:t>
+            </a:r>
+            <a:r>
+              <a:rPr lang="en-US" dirty="0"/>
+              <a:t>side effect</a:t>
+            </a:r>
+            <a:r>
+              <a:rPr lang="ru-RU" dirty="0"/>
+              <a:t>) вычисления выражения – это факт изменения содержимого ячеек памяти в процессе вычисления выражения</a:t>
+            </a:r>
+          </a:p>
+          <a:p>
+            <a:endParaRPr lang="ru-RU" dirty="0"/>
           </a:p>
         </p:txBody>
       </p:sp>
       <p:sp>
         <p:nvSpPr>
-          <p:cNvPr id="4" name="Slide Number Placeholder 3"/>
+          <p:cNvPr id="4" name="Content Placeholder 3"/>
+          <p:cNvSpPr>
+            <a:spLocks noGrp="1"/>
+          </p:cNvSpPr>
+          <p:nvPr>
+            <p:ph sz="half" idx="2"/>
+          </p:nvPr>
+        </p:nvSpPr>
+        <p:spPr/>
+        <p:txBody>
+          <a:bodyPr>
+            <a:normAutofit fontScale="92500" lnSpcReduction="20000"/>
+          </a:bodyPr>
+          <a:lstStyle/>
+          <a:p>
+            <a:r>
+              <a:rPr lang="ru-RU" dirty="0"/>
+              <a:t>Присваивание</a:t>
+            </a:r>
+          </a:p>
+          <a:p>
+            <a:pPr lvl="1"/>
+            <a:r>
+              <a:rPr lang="en-US" dirty="0"/>
+              <a:t>x = 1;</a:t>
+            </a:r>
+            <a:r>
+              <a:rPr lang="ru-RU" dirty="0"/>
+              <a:t> </a:t>
+            </a:r>
+          </a:p>
+          <a:p>
+            <a:pPr lvl="2"/>
+            <a:endParaRPr lang="ru-RU" dirty="0"/>
+          </a:p>
+          <a:p>
+            <a:r>
+              <a:rPr lang="ru-RU" dirty="0"/>
+              <a:t>Инкремент и декремент</a:t>
+            </a:r>
+            <a:endParaRPr lang="en-US" dirty="0"/>
+          </a:p>
+          <a:p>
+            <a:pPr lvl="1"/>
+            <a:r>
+              <a:rPr lang="en-US" dirty="0"/>
+              <a:t>i</a:t>
+            </a:r>
+            <a:r>
+              <a:rPr lang="ru-RU" dirty="0"/>
+              <a:t> </a:t>
+            </a:r>
+            <a:r>
+              <a:rPr lang="en-US" dirty="0"/>
+              <a:t>=</a:t>
+            </a:r>
+            <a:r>
+              <a:rPr lang="ru-RU" dirty="0"/>
+              <a:t> </a:t>
+            </a:r>
+            <a:r>
+              <a:rPr lang="en-US" dirty="0"/>
+              <a:t>0; A[i++]</a:t>
+            </a:r>
+            <a:r>
+              <a:rPr lang="ru-RU" dirty="0"/>
+              <a:t> </a:t>
+            </a:r>
+            <a:r>
+              <a:rPr lang="en-US" dirty="0"/>
+              <a:t>=</a:t>
+            </a:r>
+            <a:r>
+              <a:rPr lang="ru-RU" dirty="0"/>
+              <a:t> </a:t>
+            </a:r>
+            <a:r>
+              <a:rPr lang="en-US" dirty="0" err="1"/>
+              <a:t>i</a:t>
+            </a:r>
+            <a:r>
+              <a:rPr lang="en-US" dirty="0"/>
+              <a:t>++;</a:t>
+            </a:r>
+            <a:r>
+              <a:rPr lang="ru-RU" dirty="0"/>
+              <a:t> </a:t>
+            </a:r>
+            <a:r>
+              <a:rPr lang="en-US" dirty="0"/>
+              <a:t>A[</a:t>
+            </a:r>
+            <a:r>
+              <a:rPr lang="ru-RU" dirty="0"/>
+              <a:t>++</a:t>
+            </a:r>
+            <a:r>
+              <a:rPr lang="en-US" dirty="0" err="1"/>
+              <a:t>i</a:t>
+            </a:r>
+            <a:r>
+              <a:rPr lang="en-US" dirty="0"/>
+              <a:t>]</a:t>
+            </a:r>
+            <a:r>
+              <a:rPr lang="ru-RU" dirty="0"/>
+              <a:t> </a:t>
+            </a:r>
+            <a:r>
+              <a:rPr lang="en-US" dirty="0"/>
+              <a:t>=</a:t>
+            </a:r>
+            <a:r>
+              <a:rPr lang="ru-RU" dirty="0"/>
+              <a:t> ++</a:t>
+            </a:r>
+            <a:r>
+              <a:rPr lang="en-US" dirty="0" err="1"/>
+              <a:t>i</a:t>
+            </a:r>
+            <a:r>
+              <a:rPr lang="en-US" dirty="0"/>
+              <a:t>;</a:t>
+            </a:r>
+            <a:endParaRPr lang="ru-RU" dirty="0"/>
+          </a:p>
+          <a:p>
+            <a:pPr lvl="1"/>
+            <a:endParaRPr lang="en-US" dirty="0"/>
+          </a:p>
+          <a:p>
+            <a:pPr lvl="1"/>
+            <a:r>
+              <a:rPr lang="ru-RU" dirty="0"/>
+              <a:t>Какие элементы </a:t>
+            </a:r>
+            <a:r>
+              <a:rPr lang="en-US" dirty="0"/>
+              <a:t>A</a:t>
+            </a:r>
+            <a:r>
+              <a:rPr lang="ru-RU" dirty="0"/>
+              <a:t> изменятся? Какие они получат значения</a:t>
+            </a:r>
+            <a:r>
+              <a:rPr lang="en-US" dirty="0"/>
+              <a:t>?</a:t>
+            </a:r>
+            <a:endParaRPr lang="ru-RU" dirty="0"/>
+          </a:p>
+          <a:p>
+            <a:pPr lvl="1"/>
+            <a:r>
+              <a:rPr lang="ru-RU" dirty="0"/>
+              <a:t>В каком порядке исполнятся ++?</a:t>
+            </a:r>
+          </a:p>
+          <a:p>
+            <a:pPr lvl="1"/>
+            <a:r>
+              <a:rPr lang="ru-RU" dirty="0"/>
+              <a:t>Определён ли вообще порядок исполнения ++?</a:t>
+            </a:r>
+          </a:p>
+          <a:p>
+            <a:pPr lvl="2"/>
+            <a:endParaRPr lang="ru-RU" dirty="0"/>
+          </a:p>
+          <a:p>
+            <a:r>
+              <a:rPr lang="ru-RU" dirty="0"/>
+              <a:t>Вызов функции</a:t>
+            </a:r>
+          </a:p>
+          <a:p>
+            <a:pPr lvl="1"/>
+            <a:r>
+              <a:rPr lang="ru-RU" dirty="0"/>
+              <a:t>Почему?</a:t>
+            </a:r>
+          </a:p>
+          <a:p>
+            <a:endParaRPr lang="ru-RU" dirty="0"/>
+          </a:p>
+        </p:txBody>
+      </p:sp>
+      <p:sp>
+        <p:nvSpPr>
+          <p:cNvPr id="5" name="Slide Number Placeholder 4"/>
           <p:cNvSpPr>
             <a:spLocks noGrp="1"/>
           </p:cNvSpPr>
@@ -7640,7 +7814,7 @@
     </p:spTree>
     <p:extLst>
       <p:ext uri="{BB962C8B-B14F-4D97-AF65-F5344CB8AC3E}">
-        <p14:creationId xmlns:p14="http://schemas.microsoft.com/office/powerpoint/2010/main" val="205393586"/>
+        <p14:creationId xmlns:p14="http://schemas.microsoft.com/office/powerpoint/2010/main" val="1521773726"/>
       </p:ext>
     </p:extLst>
   </p:cSld>
@@ -7811,7 +7985,7 @@
           <a:p>
             <a:r>
               <a:rPr lang="ru-RU" dirty="0"/>
-              <a:t>Пример 1</a:t>
+              <a:t>Что такое точка следования?</a:t>
             </a:r>
           </a:p>
         </p:txBody>
@@ -7829,153 +8003,52 @@
         <p:spPr/>
         <p:txBody>
           <a:bodyPr>
-            <a:normAutofit fontScale="92500" lnSpcReduction="10000"/>
+            <a:normAutofit/>
           </a:bodyPr>
           <a:lstStyle/>
           <a:p>
             <a:r>
-              <a:rPr lang="en-US" dirty="0">
-                <a:solidFill>
-                  <a:srgbClr val="0000FF"/>
-                </a:solidFill>
-                <a:latin typeface="Consolas" panose="020B0609020204030204" pitchFamily="49" charset="0"/>
-              </a:rPr>
-              <a:t>while</a:t>
-            </a:r>
-            <a:r>
-              <a:rPr lang="en-US" dirty="0">
-                <a:solidFill>
-                  <a:srgbClr val="000000"/>
-                </a:solidFill>
-                <a:latin typeface="Consolas" panose="020B0609020204030204" pitchFamily="49" charset="0"/>
-              </a:rPr>
-              <a:t> (*p++ != 0 &amp;&amp; *q++ != 0) *p = *q;</a:t>
-            </a:r>
-            <a:endParaRPr lang="ru-RU" dirty="0">
-              <a:solidFill>
-                <a:srgbClr val="000000"/>
-              </a:solidFill>
-              <a:latin typeface="Consolas" panose="020B0609020204030204" pitchFamily="49" charset="0"/>
-            </a:endParaRPr>
-          </a:p>
-          <a:p>
-            <a:pPr lvl="1"/>
-            <a:r>
               <a:rPr lang="ru-RU" dirty="0">
                 <a:highlight>
-                  <a:srgbClr val="00FF00"/>
+                  <a:srgbClr val="00FFFF"/>
                 </a:highlight>
               </a:rPr>
-              <a:t>Никогда не пишите так =)</a:t>
-            </a:r>
-          </a:p>
-          <a:p>
-            <a:pPr lvl="2"/>
-            <a:endParaRPr lang="ru-RU" dirty="0"/>
+              <a:t>Точка следования </a:t>
+            </a:r>
+            <a:r>
+              <a:rPr lang="ru-RU" dirty="0"/>
+              <a:t>(</a:t>
+            </a:r>
+            <a:r>
+              <a:rPr lang="en-US" dirty="0"/>
+              <a:t>s</a:t>
+            </a:r>
+            <a:r>
+              <a:rPr lang="ru-RU" dirty="0"/>
+              <a:t>equence point)</a:t>
+            </a:r>
+            <a:r>
+              <a:rPr lang="en-US" dirty="0"/>
+              <a:t> – </a:t>
+            </a:r>
+            <a:r>
+              <a:rPr lang="ru-RU" dirty="0"/>
+              <a:t>это момент вычисления выражения, когда побочные эффекты</a:t>
+            </a:r>
           </a:p>
           <a:p>
             <a:pPr lvl="1"/>
             <a:r>
               <a:rPr lang="ru-RU" dirty="0"/>
-              <a:t>Побочный эффект *p++ != 0 проявится до начала вычисления *q++ != 0 </a:t>
-            </a:r>
-          </a:p>
-          <a:p>
-            <a:pPr lvl="2"/>
+              <a:t>все произошли в вычисленной части выражения</a:t>
+            </a:r>
+          </a:p>
+          <a:p>
+            <a:pPr lvl="1"/>
             <a:r>
               <a:rPr lang="ru-RU" dirty="0"/>
-              <a:t>Конец первого операнда </a:t>
-            </a:r>
-            <a:r>
-              <a:rPr lang="en-US" dirty="0"/>
-              <a:t>&amp;&amp;</a:t>
-            </a:r>
-            <a:endParaRPr lang="ru-RU" dirty="0"/>
-          </a:p>
-          <a:p>
-            <a:pPr lvl="2"/>
-            <a:endParaRPr lang="ru-RU" dirty="0"/>
-          </a:p>
-          <a:p>
-            <a:pPr lvl="1"/>
-            <a:r>
-              <a:rPr lang="ru-RU" dirty="0"/>
-              <a:t>Побочный эффект *q++ != 0 проявится до начала вычисления *p = *q </a:t>
-            </a:r>
-            <a:endParaRPr lang="en-US" dirty="0"/>
-          </a:p>
-          <a:p>
-            <a:pPr lvl="2"/>
-            <a:r>
-              <a:rPr lang="ru-RU" dirty="0"/>
-              <a:t>Конец выражения</a:t>
-            </a:r>
-          </a:p>
-          <a:p>
-            <a:pPr marL="0" indent="0">
-              <a:buNone/>
-            </a:pPr>
-            <a:endParaRPr lang="ru-RU" dirty="0"/>
-          </a:p>
-          <a:p>
-            <a:r>
-              <a:rPr lang="ru-RU" dirty="0"/>
-              <a:t>Сколько точек следования в каждом из этих операторов?</a:t>
-            </a:r>
-          </a:p>
-          <a:p>
-            <a:pPr marL="857250" lvl="1" indent="-457200"/>
-            <a:r>
-              <a:rPr lang="en-US" dirty="0">
-                <a:solidFill>
-                  <a:srgbClr val="0000FF"/>
-                </a:solidFill>
-                <a:latin typeface="Consolas" panose="020B0609020204030204" pitchFamily="49" charset="0"/>
-              </a:rPr>
-              <a:t>while</a:t>
-            </a:r>
-            <a:r>
-              <a:rPr lang="en-US" dirty="0">
-                <a:solidFill>
-                  <a:srgbClr val="000000"/>
-                </a:solidFill>
-                <a:latin typeface="Consolas" panose="020B0609020204030204" pitchFamily="49" charset="0"/>
-              </a:rPr>
-              <a:t> (*p != 0 &amp;&amp; *q != 0) *p++ = *q++;</a:t>
-            </a:r>
-          </a:p>
-          <a:p>
-            <a:pPr marL="857250" lvl="1" indent="-457200"/>
-            <a:r>
-              <a:rPr lang="en-US" dirty="0">
-                <a:solidFill>
-                  <a:srgbClr val="0000FF"/>
-                </a:solidFill>
-                <a:latin typeface="Consolas" panose="020B0609020204030204" pitchFamily="49" charset="0"/>
-              </a:rPr>
-              <a:t>while</a:t>
-            </a:r>
-            <a:r>
-              <a:rPr lang="en-US" dirty="0">
-                <a:solidFill>
-                  <a:srgbClr val="000000"/>
-                </a:solidFill>
-                <a:latin typeface="Consolas" panose="020B0609020204030204" pitchFamily="49" charset="0"/>
-              </a:rPr>
-              <a:t> (*q != 0) *p++ = *q++;</a:t>
-            </a:r>
-          </a:p>
-          <a:p>
-            <a:pPr marL="125730" indent="0">
-              <a:buNone/>
-            </a:pPr>
-            <a:endParaRPr lang="ru-RU" dirty="0"/>
-          </a:p>
-          <a:p>
-            <a:pPr marL="125730" indent="0">
-              <a:buNone/>
-            </a:pPr>
-            <a:endParaRPr lang="ru-RU" dirty="0"/>
+              <a:t>ни один не произошёл в невычисленной части выражения</a:t>
+            </a:r>
           </a:p>
         </p:txBody>
       </p:sp>
@@ -8002,10 +8075,577 @@
           </a:p>
         </p:txBody>
       </p:sp>
+      <p:sp>
+        <p:nvSpPr>
+          <p:cNvPr id="13" name="TextBox 12">
+            <a:extLst>
+              <a:ext uri="{FF2B5EF4-FFF2-40B4-BE49-F238E27FC236}">
+                <a16:creationId xmlns:a16="http://schemas.microsoft.com/office/drawing/2014/main" id="{D2E408B1-63D8-2E22-5223-06BE17024531}"/>
+              </a:ext>
+            </a:extLst>
+          </p:cNvPr>
+          <p:cNvSpPr txBox="1"/>
+          <p:nvPr/>
+        </p:nvSpPr>
+        <p:spPr>
+          <a:xfrm>
+            <a:off x="535909" y="4556604"/>
+            <a:ext cx="2751779" cy="369332"/>
+          </a:xfrm>
+          <a:prstGeom prst="rect">
+            <a:avLst/>
+          </a:prstGeom>
+          <a:noFill/>
+        </p:spPr>
+        <p:txBody>
+          <a:bodyPr wrap="none" rtlCol="0">
+            <a:spAutoFit/>
+          </a:bodyPr>
+          <a:lstStyle/>
+          <a:p>
+            <a:r>
+              <a:rPr lang="ru-RU" dirty="0">
+                <a:latin typeface="Calibri" panose="020F0502020204030204" pitchFamily="34" charset="0"/>
+                <a:ea typeface="Calibri" panose="020F0502020204030204" pitchFamily="34" charset="0"/>
+                <a:cs typeface="Calibri" panose="020F0502020204030204" pitchFamily="34" charset="0"/>
+              </a:rPr>
+              <a:t>Исполняемые инструкции</a:t>
+            </a:r>
+          </a:p>
+        </p:txBody>
+      </p:sp>
+      <p:sp>
+        <p:nvSpPr>
+          <p:cNvPr id="15" name="TextBox 14">
+            <a:extLst>
+              <a:ext uri="{FF2B5EF4-FFF2-40B4-BE49-F238E27FC236}">
+                <a16:creationId xmlns:a16="http://schemas.microsoft.com/office/drawing/2014/main" id="{F6A38C2F-51C4-311B-4B60-CF91601ECA96}"/>
+              </a:ext>
+            </a:extLst>
+          </p:cNvPr>
+          <p:cNvSpPr txBox="1"/>
+          <p:nvPr/>
+        </p:nvSpPr>
+        <p:spPr>
+          <a:xfrm>
+            <a:off x="851385" y="5061015"/>
+            <a:ext cx="2120827" cy="369332"/>
+          </a:xfrm>
+          <a:prstGeom prst="rect">
+            <a:avLst/>
+          </a:prstGeom>
+          <a:noFill/>
+        </p:spPr>
+        <p:txBody>
+          <a:bodyPr wrap="square" rtlCol="0">
+            <a:spAutoFit/>
+          </a:bodyPr>
+          <a:lstStyle/>
+          <a:p>
+            <a:r>
+              <a:rPr lang="ru-RU" dirty="0">
+                <a:latin typeface="Calibri" panose="020F0502020204030204" pitchFamily="34" charset="0"/>
+                <a:ea typeface="Calibri" panose="020F0502020204030204" pitchFamily="34" charset="0"/>
+                <a:cs typeface="Calibri" panose="020F0502020204030204" pitchFamily="34" charset="0"/>
+              </a:rPr>
+              <a:t>Побочные эффекты</a:t>
+            </a:r>
+          </a:p>
+        </p:txBody>
+      </p:sp>
+      <p:sp>
+        <p:nvSpPr>
+          <p:cNvPr id="16" name="TextBox 15">
+            <a:extLst>
+              <a:ext uri="{FF2B5EF4-FFF2-40B4-BE49-F238E27FC236}">
+                <a16:creationId xmlns:a16="http://schemas.microsoft.com/office/drawing/2014/main" id="{36DF8541-BA29-85E0-E034-CBCFBD08601D}"/>
+              </a:ext>
+            </a:extLst>
+          </p:cNvPr>
+          <p:cNvSpPr txBox="1"/>
+          <p:nvPr/>
+        </p:nvSpPr>
+        <p:spPr>
+          <a:xfrm>
+            <a:off x="1125589" y="3884971"/>
+            <a:ext cx="1572418" cy="369332"/>
+          </a:xfrm>
+          <a:prstGeom prst="rect">
+            <a:avLst/>
+          </a:prstGeom>
+          <a:noFill/>
+        </p:spPr>
+        <p:txBody>
+          <a:bodyPr wrap="none" rtlCol="0">
+            <a:spAutoFit/>
+          </a:bodyPr>
+          <a:lstStyle/>
+          <a:p>
+            <a:r>
+              <a:rPr lang="ru-RU" dirty="0">
+                <a:latin typeface="Calibri" panose="020F0502020204030204" pitchFamily="34" charset="0"/>
+                <a:ea typeface="Calibri" panose="020F0502020204030204" pitchFamily="34" charset="0"/>
+                <a:cs typeface="Calibri" panose="020F0502020204030204" pitchFamily="34" charset="0"/>
+              </a:rPr>
+              <a:t>Исходный код</a:t>
+            </a:r>
+          </a:p>
+        </p:txBody>
+      </p:sp>
+      <p:sp>
+        <p:nvSpPr>
+          <p:cNvPr id="21" name="TextBox 20">
+            <a:extLst>
+              <a:ext uri="{FF2B5EF4-FFF2-40B4-BE49-F238E27FC236}">
+                <a16:creationId xmlns:a16="http://schemas.microsoft.com/office/drawing/2014/main" id="{DFB31354-A4D4-F801-25F7-0CFDC41F01A3}"/>
+              </a:ext>
+            </a:extLst>
+          </p:cNvPr>
+          <p:cNvSpPr txBox="1"/>
+          <p:nvPr/>
+        </p:nvSpPr>
+        <p:spPr>
+          <a:xfrm>
+            <a:off x="896664" y="5615736"/>
+            <a:ext cx="2030269" cy="369332"/>
+          </a:xfrm>
+          <a:prstGeom prst="rect">
+            <a:avLst/>
+          </a:prstGeom>
+          <a:noFill/>
+        </p:spPr>
+        <p:txBody>
+          <a:bodyPr wrap="square" rtlCol="0">
+            <a:spAutoFit/>
+          </a:bodyPr>
+          <a:lstStyle/>
+          <a:p>
+            <a:r>
+              <a:rPr lang="ru-RU" dirty="0">
+                <a:latin typeface="Calibri" panose="020F0502020204030204" pitchFamily="34" charset="0"/>
+                <a:ea typeface="Calibri" panose="020F0502020204030204" pitchFamily="34" charset="0"/>
+                <a:cs typeface="Calibri" panose="020F0502020204030204" pitchFamily="34" charset="0"/>
+              </a:rPr>
+              <a:t>Значения в памяти</a:t>
+            </a:r>
+          </a:p>
+        </p:txBody>
+      </p:sp>
+      <p:grpSp>
+        <p:nvGrpSpPr>
+          <p:cNvPr id="24" name="Group 23">
+            <a:extLst>
+              <a:ext uri="{FF2B5EF4-FFF2-40B4-BE49-F238E27FC236}">
+                <a16:creationId xmlns:a16="http://schemas.microsoft.com/office/drawing/2014/main" id="{2DD7B687-DD86-814B-0118-75296450E78E}"/>
+              </a:ext>
+            </a:extLst>
+          </p:cNvPr>
+          <p:cNvGrpSpPr/>
+          <p:nvPr/>
+        </p:nvGrpSpPr>
+        <p:grpSpPr>
+          <a:xfrm>
+            <a:off x="3171905" y="3739339"/>
+            <a:ext cx="8397145" cy="2386825"/>
+            <a:chOff x="3171905" y="3739339"/>
+            <a:chExt cx="8397145" cy="2386825"/>
+          </a:xfrm>
+        </p:grpSpPr>
+        <p:pic>
+          <p:nvPicPr>
+            <p:cNvPr id="20" name="Picture 19">
+              <a:extLst>
+                <a:ext uri="{FF2B5EF4-FFF2-40B4-BE49-F238E27FC236}">
+                  <a16:creationId xmlns:a16="http://schemas.microsoft.com/office/drawing/2014/main" id="{E2A85B80-2DB9-209D-6AD9-C019EF6BDE16}"/>
+                </a:ext>
+              </a:extLst>
+            </p:cNvPr>
+            <p:cNvPicPr>
+              <a:picLocks noChangeAspect="1"/>
+            </p:cNvPicPr>
+            <p:nvPr/>
+          </p:nvPicPr>
+          <p:blipFill>
+            <a:blip r:embed="rId2"/>
+            <a:stretch>
+              <a:fillRect/>
+            </a:stretch>
+          </p:blipFill>
+          <p:spPr>
+            <a:xfrm>
+              <a:off x="3171905" y="3739339"/>
+              <a:ext cx="8397145" cy="2386825"/>
+            </a:xfrm>
+            <a:prstGeom prst="rect">
+              <a:avLst/>
+            </a:prstGeom>
+          </p:spPr>
+        </p:pic>
+        <p:sp>
+          <p:nvSpPr>
+            <p:cNvPr id="7" name="TextBox 6">
+              <a:extLst>
+                <a:ext uri="{FF2B5EF4-FFF2-40B4-BE49-F238E27FC236}">
+                  <a16:creationId xmlns:a16="http://schemas.microsoft.com/office/drawing/2014/main" id="{983056DA-B9C6-A021-F5D4-7C74BEDB96FB}"/>
+                </a:ext>
+              </a:extLst>
+            </p:cNvPr>
+            <p:cNvSpPr txBox="1"/>
+            <p:nvPr/>
+          </p:nvSpPr>
+          <p:spPr>
+            <a:xfrm>
+              <a:off x="4512141" y="3884971"/>
+              <a:ext cx="820802" cy="369332"/>
+            </a:xfrm>
+            <a:prstGeom prst="rect">
+              <a:avLst/>
+            </a:prstGeom>
+            <a:noFill/>
+          </p:spPr>
+          <p:txBody>
+            <a:bodyPr wrap="none" rtlCol="0">
+              <a:spAutoFit/>
+            </a:bodyPr>
+            <a:lstStyle/>
+            <a:p>
+              <a:r>
+                <a:rPr lang="en-US" dirty="0"/>
+                <a:t>expr  1</a:t>
+              </a:r>
+              <a:endParaRPr lang="ru-RU" dirty="0"/>
+            </a:p>
+          </p:txBody>
+        </p:sp>
+        <p:sp>
+          <p:nvSpPr>
+            <p:cNvPr id="8" name="TextBox 7">
+              <a:extLst>
+                <a:ext uri="{FF2B5EF4-FFF2-40B4-BE49-F238E27FC236}">
+                  <a16:creationId xmlns:a16="http://schemas.microsoft.com/office/drawing/2014/main" id="{AF94CE18-5721-13AC-004E-563544E07E6F}"/>
+                </a:ext>
+              </a:extLst>
+            </p:cNvPr>
+            <p:cNvSpPr txBox="1"/>
+            <p:nvPr/>
+          </p:nvSpPr>
+          <p:spPr>
+            <a:xfrm>
+              <a:off x="9307963" y="3884971"/>
+              <a:ext cx="820802" cy="369332"/>
+            </a:xfrm>
+            <a:prstGeom prst="rect">
+              <a:avLst/>
+            </a:prstGeom>
+            <a:noFill/>
+          </p:spPr>
+          <p:txBody>
+            <a:bodyPr wrap="none" rtlCol="0">
+              <a:spAutoFit/>
+            </a:bodyPr>
+            <a:lstStyle/>
+            <a:p>
+              <a:r>
+                <a:rPr lang="en-US" dirty="0"/>
+                <a:t>expr  2</a:t>
+              </a:r>
+              <a:endParaRPr lang="ru-RU" dirty="0"/>
+            </a:p>
+          </p:txBody>
+        </p:sp>
+        <p:sp>
+          <p:nvSpPr>
+            <p:cNvPr id="9" name="TextBox 8">
+              <a:extLst>
+                <a:ext uri="{FF2B5EF4-FFF2-40B4-BE49-F238E27FC236}">
+                  <a16:creationId xmlns:a16="http://schemas.microsoft.com/office/drawing/2014/main" id="{C31D2B7F-5C37-5E18-40C0-062E35B7AA61}"/>
+                </a:ext>
+              </a:extLst>
+            </p:cNvPr>
+            <p:cNvSpPr txBox="1"/>
+            <p:nvPr/>
+          </p:nvSpPr>
+          <p:spPr>
+            <a:xfrm>
+              <a:off x="7176437" y="3884971"/>
+              <a:ext cx="428322" cy="369332"/>
+            </a:xfrm>
+            <a:prstGeom prst="rect">
+              <a:avLst/>
+            </a:prstGeom>
+            <a:noFill/>
+          </p:spPr>
+          <p:txBody>
+            <a:bodyPr wrap="none" rtlCol="0">
+              <a:spAutoFit/>
+            </a:bodyPr>
+            <a:lstStyle/>
+            <a:p>
+              <a:r>
+                <a:rPr lang="en-US" dirty="0"/>
+                <a:t>op</a:t>
+              </a:r>
+              <a:endParaRPr lang="ru-RU" dirty="0"/>
+            </a:p>
+          </p:txBody>
+        </p:sp>
+        <p:sp>
+          <p:nvSpPr>
+            <p:cNvPr id="10" name="TextBox 9">
+              <a:extLst>
+                <a:ext uri="{FF2B5EF4-FFF2-40B4-BE49-F238E27FC236}">
+                  <a16:creationId xmlns:a16="http://schemas.microsoft.com/office/drawing/2014/main" id="{431358F7-56BC-9187-D22D-4353500B1259}"/>
+                </a:ext>
+              </a:extLst>
+            </p:cNvPr>
+            <p:cNvSpPr txBox="1"/>
+            <p:nvPr/>
+          </p:nvSpPr>
+          <p:spPr>
+            <a:xfrm>
+              <a:off x="4512141" y="4571836"/>
+              <a:ext cx="820802" cy="369332"/>
+            </a:xfrm>
+            <a:prstGeom prst="rect">
+              <a:avLst/>
+            </a:prstGeom>
+            <a:noFill/>
+          </p:spPr>
+          <p:txBody>
+            <a:bodyPr wrap="none" rtlCol="0">
+              <a:spAutoFit/>
+            </a:bodyPr>
+            <a:lstStyle/>
+            <a:p>
+              <a:r>
+                <a:rPr lang="en-US" dirty="0"/>
+                <a:t>expr  1</a:t>
+              </a:r>
+              <a:endParaRPr lang="ru-RU" dirty="0"/>
+            </a:p>
+          </p:txBody>
+        </p:sp>
+        <p:sp>
+          <p:nvSpPr>
+            <p:cNvPr id="11" name="TextBox 10">
+              <a:extLst>
+                <a:ext uri="{FF2B5EF4-FFF2-40B4-BE49-F238E27FC236}">
+                  <a16:creationId xmlns:a16="http://schemas.microsoft.com/office/drawing/2014/main" id="{955D5B7E-01AB-8F13-413D-60E1D00110BC}"/>
+                </a:ext>
+              </a:extLst>
+            </p:cNvPr>
+            <p:cNvSpPr txBox="1"/>
+            <p:nvPr/>
+          </p:nvSpPr>
+          <p:spPr>
+            <a:xfrm>
+              <a:off x="8227843" y="4509120"/>
+              <a:ext cx="820802" cy="369332"/>
+            </a:xfrm>
+            <a:prstGeom prst="rect">
+              <a:avLst/>
+            </a:prstGeom>
+            <a:noFill/>
+          </p:spPr>
+          <p:txBody>
+            <a:bodyPr wrap="none" rtlCol="0">
+              <a:spAutoFit/>
+            </a:bodyPr>
+            <a:lstStyle/>
+            <a:p>
+              <a:r>
+                <a:rPr lang="en-US" dirty="0"/>
+                <a:t>expr  2</a:t>
+              </a:r>
+              <a:endParaRPr lang="ru-RU" dirty="0"/>
+            </a:p>
+          </p:txBody>
+        </p:sp>
+        <p:sp>
+          <p:nvSpPr>
+            <p:cNvPr id="12" name="TextBox 11">
+              <a:extLst>
+                <a:ext uri="{FF2B5EF4-FFF2-40B4-BE49-F238E27FC236}">
+                  <a16:creationId xmlns:a16="http://schemas.microsoft.com/office/drawing/2014/main" id="{DDE885B4-2203-0140-D76D-59935C6A01DB}"/>
+                </a:ext>
+              </a:extLst>
+            </p:cNvPr>
+            <p:cNvSpPr txBox="1"/>
+            <p:nvPr/>
+          </p:nvSpPr>
+          <p:spPr>
+            <a:xfrm>
+              <a:off x="10708555" y="4509120"/>
+              <a:ext cx="428322" cy="369332"/>
+            </a:xfrm>
+            <a:prstGeom prst="rect">
+              <a:avLst/>
+            </a:prstGeom>
+            <a:noFill/>
+          </p:spPr>
+          <p:txBody>
+            <a:bodyPr wrap="none" rtlCol="0">
+              <a:spAutoFit/>
+            </a:bodyPr>
+            <a:lstStyle/>
+            <a:p>
+              <a:r>
+                <a:rPr lang="en-US" dirty="0"/>
+                <a:t>op</a:t>
+              </a:r>
+              <a:endParaRPr lang="ru-RU" dirty="0"/>
+            </a:p>
+          </p:txBody>
+        </p:sp>
+        <p:sp>
+          <p:nvSpPr>
+            <p:cNvPr id="22" name="Rectangle 21">
+              <a:extLst>
+                <a:ext uri="{FF2B5EF4-FFF2-40B4-BE49-F238E27FC236}">
+                  <a16:creationId xmlns:a16="http://schemas.microsoft.com/office/drawing/2014/main" id="{2EB663FA-0C5D-0EEC-3042-2EEE7B5D3362}"/>
+                </a:ext>
+              </a:extLst>
+            </p:cNvPr>
+            <p:cNvSpPr/>
+            <p:nvPr/>
+          </p:nvSpPr>
+          <p:spPr>
+            <a:xfrm>
+              <a:off x="6456040" y="4293096"/>
+              <a:ext cx="331518" cy="831363"/>
+            </a:xfrm>
+            <a:prstGeom prst="rect">
+              <a:avLst/>
+            </a:prstGeom>
+            <a:solidFill>
+              <a:srgbClr val="FFFF00">
+                <a:alpha val="25000"/>
+              </a:srgbClr>
+            </a:solidFill>
+            <a:ln>
+              <a:solidFill>
+                <a:srgbClr val="FFC000"/>
+              </a:solidFill>
+            </a:ln>
+          </p:spPr>
+          <p:style>
+            <a:lnRef idx="2">
+              <a:schemeClr val="accent1">
+                <a:shade val="15000"/>
+              </a:schemeClr>
+            </a:lnRef>
+            <a:fillRef idx="1">
+              <a:schemeClr val="accent1"/>
+            </a:fillRef>
+            <a:effectRef idx="0">
+              <a:schemeClr val="accent1"/>
+            </a:effectRef>
+            <a:fontRef idx="minor">
+              <a:schemeClr val="lt1"/>
+            </a:fontRef>
+          </p:style>
+          <p:txBody>
+            <a:bodyPr rtlCol="0" anchor="ctr"/>
+            <a:lstStyle/>
+            <a:p>
+              <a:pPr algn="ctr"/>
+              <a:endParaRPr lang="ru-RU"/>
+            </a:p>
+          </p:txBody>
+        </p:sp>
+        <p:pic>
+          <p:nvPicPr>
+            <p:cNvPr id="6" name="Picture 5">
+              <a:extLst>
+                <a:ext uri="{FF2B5EF4-FFF2-40B4-BE49-F238E27FC236}">
+                  <a16:creationId xmlns:a16="http://schemas.microsoft.com/office/drawing/2014/main" id="{E5628E34-E202-38D8-BE6C-A5F9B5CCBB80}"/>
+                </a:ext>
+              </a:extLst>
+            </p:cNvPr>
+            <p:cNvPicPr>
+              <a:picLocks noChangeAspect="1"/>
+            </p:cNvPicPr>
+            <p:nvPr/>
+          </p:nvPicPr>
+          <p:blipFill>
+            <a:blip r:embed="rId3"/>
+            <a:srcRect t="4692"/>
+            <a:stretch/>
+          </p:blipFill>
+          <p:spPr>
+            <a:xfrm>
+              <a:off x="10452119" y="4941168"/>
+              <a:ext cx="775119" cy="738752"/>
+            </a:xfrm>
+            <a:prstGeom prst="rect">
+              <a:avLst/>
+            </a:prstGeom>
+          </p:spPr>
+        </p:pic>
+        <p:pic>
+          <p:nvPicPr>
+            <p:cNvPr id="17" name="Picture 16">
+              <a:extLst>
+                <a:ext uri="{FF2B5EF4-FFF2-40B4-BE49-F238E27FC236}">
+                  <a16:creationId xmlns:a16="http://schemas.microsoft.com/office/drawing/2014/main" id="{ECAA5AF7-38C6-F703-0916-D972A0068DB7}"/>
+                </a:ext>
+              </a:extLst>
+            </p:cNvPr>
+            <p:cNvPicPr>
+              <a:picLocks noChangeAspect="1"/>
+            </p:cNvPicPr>
+            <p:nvPr/>
+          </p:nvPicPr>
+          <p:blipFill>
+            <a:blip r:embed="rId3"/>
+            <a:stretch>
+              <a:fillRect/>
+            </a:stretch>
+          </p:blipFill>
+          <p:spPr>
+            <a:xfrm>
+              <a:off x="9749157" y="4901101"/>
+              <a:ext cx="775119" cy="775119"/>
+            </a:xfrm>
+            <a:prstGeom prst="rect">
+              <a:avLst/>
+            </a:prstGeom>
+          </p:spPr>
+        </p:pic>
+        <p:pic>
+          <p:nvPicPr>
+            <p:cNvPr id="18" name="Picture 17">
+              <a:extLst>
+                <a:ext uri="{FF2B5EF4-FFF2-40B4-BE49-F238E27FC236}">
+                  <a16:creationId xmlns:a16="http://schemas.microsoft.com/office/drawing/2014/main" id="{B898AF18-87FE-F653-9A14-2A8F96EE52A4}"/>
+                </a:ext>
+              </a:extLst>
+            </p:cNvPr>
+            <p:cNvPicPr>
+              <a:picLocks noChangeAspect="1"/>
+            </p:cNvPicPr>
+            <p:nvPr/>
+          </p:nvPicPr>
+          <p:blipFill>
+            <a:blip r:embed="rId3"/>
+            <a:srcRect t="1" b="6516"/>
+            <a:stretch/>
+          </p:blipFill>
+          <p:spPr>
+            <a:xfrm>
+              <a:off x="9048516" y="4904919"/>
+              <a:ext cx="775119" cy="724605"/>
+            </a:xfrm>
+            <a:prstGeom prst="rect">
+              <a:avLst/>
+            </a:prstGeom>
+          </p:spPr>
+        </p:pic>
+      </p:grpSp>
     </p:spTree>
     <p:extLst>
       <p:ext uri="{BB962C8B-B14F-4D97-AF65-F5344CB8AC3E}">
-        <p14:creationId xmlns:p14="http://schemas.microsoft.com/office/powerpoint/2010/main" val="871238312"/>
+        <p14:creationId xmlns:p14="http://schemas.microsoft.com/office/powerpoint/2010/main" val="2674460666"/>
       </p:ext>
     </p:extLst>
   </p:cSld>
@@ -8051,7 +8691,7 @@
           <a:p>
             <a:r>
               <a:rPr lang="ru-RU" dirty="0"/>
-              <a:t>Пример 2</a:t>
+              <a:t>Виды точек следования</a:t>
             </a:r>
           </a:p>
         </p:txBody>
@@ -8069,154 +8709,108 @@
         <p:spPr/>
         <p:txBody>
           <a:bodyPr>
-            <a:normAutofit/>
+            <a:normAutofit fontScale="77500" lnSpcReduction="20000"/>
           </a:bodyPr>
           <a:lstStyle/>
           <a:p>
-            <a:r>
-              <a:rPr lang="en-US" sz="2400" dirty="0" err="1">
-                <a:solidFill>
-                  <a:srgbClr val="0000FF"/>
-                </a:solidFill>
-                <a:latin typeface="Consolas" panose="020B0609020204030204" pitchFamily="49" charset="0"/>
-              </a:rPr>
-              <a:t>int</a:t>
-            </a:r>
-            <a:r>
-              <a:rPr lang="en-US" sz="2400" dirty="0">
-                <a:solidFill>
-                  <a:srgbClr val="000000"/>
-                </a:solidFill>
-                <a:latin typeface="Consolas" panose="020B0609020204030204" pitchFamily="49" charset="0"/>
-              </a:rPr>
-              <a:t> A[3] = { 1,</a:t>
-            </a:r>
-            <a:r>
-              <a:rPr lang="ru-RU" sz="2400" dirty="0">
-                <a:solidFill>
-                  <a:srgbClr val="000000"/>
-                </a:solidFill>
-                <a:latin typeface="Consolas" panose="020B0609020204030204" pitchFamily="49" charset="0"/>
-              </a:rPr>
-              <a:t> </a:t>
-            </a:r>
-            <a:r>
-              <a:rPr lang="en-US" sz="2400" dirty="0">
-                <a:solidFill>
-                  <a:srgbClr val="000000"/>
-                </a:solidFill>
-                <a:latin typeface="Consolas" panose="020B0609020204030204" pitchFamily="49" charset="0"/>
-              </a:rPr>
-              <a:t>0,</a:t>
-            </a:r>
-            <a:r>
-              <a:rPr lang="ru-RU" sz="2400" dirty="0">
-                <a:solidFill>
-                  <a:srgbClr val="000000"/>
-                </a:solidFill>
-                <a:latin typeface="Consolas" panose="020B0609020204030204" pitchFamily="49" charset="0"/>
-              </a:rPr>
-              <a:t> </a:t>
-            </a:r>
-            <a:r>
-              <a:rPr lang="en-US" sz="2400" dirty="0">
-                <a:solidFill>
-                  <a:srgbClr val="000000"/>
-                </a:solidFill>
-                <a:latin typeface="Consolas" panose="020B0609020204030204" pitchFamily="49" charset="0"/>
-              </a:rPr>
-              <a:t>2 }, *p = A;</a:t>
-            </a:r>
-            <a:br>
-              <a:rPr lang="ru-RU" sz="2400" dirty="0">
-                <a:solidFill>
-                  <a:srgbClr val="000000"/>
-                </a:solidFill>
-                <a:latin typeface="Consolas" panose="020B0609020204030204" pitchFamily="49" charset="0"/>
-              </a:rPr>
-            </a:br>
-            <a:r>
-              <a:rPr lang="ru-RU" sz="2400" dirty="0" err="1">
-                <a:solidFill>
-                  <a:srgbClr val="0000FF"/>
-                </a:solidFill>
-                <a:latin typeface="Consolas" panose="020B0609020204030204" pitchFamily="49" charset="0"/>
-              </a:rPr>
-              <a:t>int</a:t>
-            </a:r>
-            <a:r>
-              <a:rPr lang="ru-RU" sz="2400" dirty="0">
-                <a:solidFill>
-                  <a:srgbClr val="000000"/>
-                </a:solidFill>
-                <a:latin typeface="Consolas" panose="020B0609020204030204" pitchFamily="49" charset="0"/>
-              </a:rPr>
-              <a:t> a = (*p++) ? (*p++) : 0; </a:t>
-            </a:r>
-            <a:r>
-              <a:rPr lang="ru-RU" sz="2400" dirty="0">
-                <a:solidFill>
-                  <a:srgbClr val="008000"/>
-                </a:solidFill>
-                <a:latin typeface="Consolas" panose="020B0609020204030204" pitchFamily="49" charset="0"/>
-              </a:rPr>
-              <a:t>// чему равно a?</a:t>
-            </a:r>
-            <a:endParaRPr lang="ru-RU" sz="2400" dirty="0">
-              <a:solidFill>
-                <a:srgbClr val="000000"/>
-              </a:solidFill>
-              <a:latin typeface="Consolas" panose="020B0609020204030204" pitchFamily="49" charset="0"/>
-            </a:endParaRPr>
-          </a:p>
-          <a:p>
-            <a:pPr marL="68580" indent="0">
-              <a:buNone/>
+            <a:pPr marL="582930" indent="-514350">
+              <a:buFont typeface="+mj-lt"/>
+              <a:buAutoNum type="arabicPeriod"/>
             </a:pPr>
-            <a:endParaRPr lang="en-US" sz="2400" dirty="0"/>
-          </a:p>
-          <a:p>
-            <a:pPr lvl="1"/>
-            <a:r>
-              <a:rPr lang="ru-RU" sz="2400" dirty="0"/>
-              <a:t>Точка следования находится после первого *p++</a:t>
-            </a:r>
-          </a:p>
-          <a:p>
+            <a:r>
+              <a:rPr lang="ru-RU" sz="2800" dirty="0"/>
+              <a:t>В конце вычисления левого операнда &amp;&amp;, || и , (запятая)</a:t>
+            </a:r>
+            <a:endParaRPr lang="en-US" sz="2800" dirty="0"/>
+          </a:p>
+          <a:p>
+            <a:pPr marL="582930" indent="-514350">
+              <a:buFont typeface="+mj-lt"/>
+              <a:buAutoNum type="arabicPeriod"/>
+            </a:pPr>
             <a:endParaRPr lang="ru-RU" sz="2800" dirty="0"/>
           </a:p>
           <a:p>
-            <a:pPr lvl="1"/>
-            <a:r>
-              <a:rPr lang="ru-RU" sz="2400" dirty="0"/>
-              <a:t>p уже увеличена на 1 при вычислении второго *p++ </a:t>
-            </a:r>
-          </a:p>
-          <a:p>
+            <a:pPr marL="582930" indent="-514350">
+              <a:buFont typeface="+mj-lt"/>
+              <a:buAutoNum type="arabicPeriod"/>
+            </a:pPr>
+            <a:r>
+              <a:rPr lang="ru-RU" sz="2800" dirty="0"/>
+              <a:t>В конце вычисления первого операнда </a:t>
+            </a:r>
+            <a:r>
+              <a:rPr lang="en-US" sz="2800" dirty="0"/>
+              <a:t>?:</a:t>
+            </a:r>
             <a:endParaRPr lang="ru-RU" sz="2800" dirty="0"/>
           </a:p>
           <a:p>
-            <a:r>
-              <a:rPr lang="ru-RU" sz="2800" dirty="0">
-                <a:highlight>
-                  <a:srgbClr val="00FF00"/>
-                </a:highlight>
-              </a:rPr>
-              <a:t>Никогда не пишите так</a:t>
-            </a:r>
-            <a:r>
-              <a:rPr lang="ru-RU" dirty="0">
-                <a:highlight>
-                  <a:srgbClr val="00FF00"/>
-                </a:highlight>
-              </a:rPr>
-              <a:t> =)</a:t>
-            </a:r>
-            <a:endParaRPr lang="ru-RU" sz="2800" dirty="0">
-              <a:highlight>
-                <a:srgbClr val="00FF00"/>
-              </a:highlight>
-            </a:endParaRPr>
+            <a:pPr marL="582930" indent="-514350">
+              <a:buFont typeface="+mj-lt"/>
+              <a:buAutoNum type="arabicPeriod"/>
+            </a:pPr>
+            <a:endParaRPr lang="ru-RU" sz="2800" dirty="0"/>
+          </a:p>
+          <a:p>
+            <a:pPr marL="582930" indent="-514350">
+              <a:buFont typeface="+mj-lt"/>
+              <a:buAutoNum type="arabicPeriod"/>
+            </a:pPr>
+            <a:r>
+              <a:rPr lang="ru-RU" sz="2800" dirty="0"/>
+              <a:t>В конце всего выражения</a:t>
+            </a:r>
+          </a:p>
+          <a:p>
+            <a:pPr marL="582930" indent="-514350">
+              <a:buFont typeface="+mj-lt"/>
+              <a:buAutoNum type="arabicPeriod"/>
+            </a:pPr>
+            <a:endParaRPr lang="ru-RU" sz="2800" dirty="0"/>
+          </a:p>
+          <a:p>
+            <a:pPr marL="582930" indent="-514350">
+              <a:buFont typeface="+mj-lt"/>
+              <a:buAutoNum type="arabicPeriod"/>
+            </a:pPr>
+            <a:r>
+              <a:rPr lang="ru-RU" sz="2800" dirty="0"/>
+              <a:t>Перед входом в вызываемую функцию</a:t>
+            </a:r>
+          </a:p>
+          <a:p>
+            <a:pPr marL="582930" indent="-514350">
+              <a:buFont typeface="+mj-lt"/>
+              <a:buAutoNum type="arabicPeriod"/>
+            </a:pPr>
+            <a:endParaRPr lang="ru-RU" sz="2800" dirty="0"/>
+          </a:p>
+          <a:p>
+            <a:pPr marL="582930" indent="-514350">
+              <a:buFont typeface="+mj-lt"/>
+              <a:buAutoNum type="arabicPeriod"/>
+            </a:pPr>
+            <a:r>
+              <a:rPr lang="ru-RU" sz="2800" dirty="0"/>
+              <a:t>В объявлении с инициализацией на момент завершения вычисления инициализирующего значения</a:t>
+            </a:r>
+          </a:p>
+          <a:p>
+            <a:pPr marL="582930" indent="-514350"/>
+            <a:endParaRPr lang="ru-RU" sz="2800" dirty="0"/>
+          </a:p>
+          <a:p>
+            <a:pPr marL="582930" indent="-514350"/>
+            <a:r>
+              <a:rPr lang="ru-RU" sz="2800" dirty="0"/>
+              <a:t>В остальном порядок побочных эффектов является </a:t>
+            </a:r>
+            <a:r>
+              <a:rPr lang="en-US" sz="2800" dirty="0"/>
+              <a:t>unspecified</a:t>
+            </a:r>
+            <a:endParaRPr lang="ru-RU" sz="2800" dirty="0"/>
           </a:p>
         </p:txBody>
       </p:sp>
@@ -8246,7 +8840,7 @@
     </p:spTree>
     <p:extLst>
       <p:ext uri="{BB962C8B-B14F-4D97-AF65-F5344CB8AC3E}">
-        <p14:creationId xmlns:p14="http://schemas.microsoft.com/office/powerpoint/2010/main" val="829234774"/>
+        <p14:creationId xmlns:p14="http://schemas.microsoft.com/office/powerpoint/2010/main" val="205393586"/>
       </p:ext>
     </p:extLst>
   </p:cSld>
@@ -8292,7 +8886,7 @@
           <a:p>
             <a:r>
               <a:rPr lang="ru-RU" dirty="0"/>
-              <a:t>Пример 3</a:t>
+              <a:t>Пример 1</a:t>
             </a:r>
           </a:p>
         </p:txBody>
@@ -8315,104 +8909,24 @@
           <a:lstStyle/>
           <a:p>
             <a:r>
-              <a:rPr lang="nn-NO" dirty="0">
+              <a:rPr lang="en-US" dirty="0">
                 <a:solidFill>
                   <a:srgbClr val="0000FF"/>
                 </a:solidFill>
                 <a:latin typeface="Consolas" panose="020B0609020204030204" pitchFamily="49" charset="0"/>
               </a:rPr>
-              <a:t>int</a:t>
-            </a:r>
-            <a:r>
-              <a:rPr lang="nn-NO" dirty="0">
+              <a:t>while</a:t>
+            </a:r>
+            <a:r>
+              <a:rPr lang="en-US" dirty="0">
                 <a:solidFill>
                   <a:srgbClr val="000000"/>
                 </a:solidFill>
                 <a:latin typeface="Consolas" panose="020B0609020204030204" pitchFamily="49" charset="0"/>
               </a:rPr>
-              <a:t> i = 0, j = i++, k = i++;</a:t>
-            </a:r>
-            <a:r>
-              <a:rPr lang="ru-RU" dirty="0">
-                <a:solidFill>
-                  <a:srgbClr val="000000"/>
-                </a:solidFill>
-                <a:latin typeface="Consolas" panose="020B0609020204030204" pitchFamily="49" charset="0"/>
-              </a:rPr>
-              <a:t> </a:t>
-            </a:r>
-            <a:r>
-              <a:rPr lang="ru-RU" dirty="0">
-                <a:solidFill>
-                  <a:srgbClr val="008000"/>
-                </a:solidFill>
-                <a:latin typeface="Consolas" panose="020B0609020204030204" pitchFamily="49" charset="0"/>
-              </a:rPr>
-              <a:t>// (1) </a:t>
-            </a:r>
-            <a:br>
-              <a:rPr lang="ru-RU" dirty="0">
-                <a:solidFill>
-                  <a:srgbClr val="008000"/>
-                </a:solidFill>
-                <a:latin typeface="Consolas" panose="020B0609020204030204" pitchFamily="49" charset="0"/>
-              </a:rPr>
-            </a:br>
-            <a:r>
-              <a:rPr lang="en-US" dirty="0" err="1">
-                <a:solidFill>
-                  <a:srgbClr val="0000FF"/>
-                </a:solidFill>
-                <a:latin typeface="Consolas" panose="020B0609020204030204" pitchFamily="49" charset="0"/>
-              </a:rPr>
-              <a:t>int</a:t>
-            </a:r>
-            <a:r>
-              <a:rPr lang="en-US" dirty="0">
-                <a:solidFill>
-                  <a:srgbClr val="000000"/>
-                </a:solidFill>
-                <a:latin typeface="Consolas" panose="020B0609020204030204" pitchFamily="49" charset="0"/>
-              </a:rPr>
-              <a:t> x = f(i++) + g(</a:t>
-            </a:r>
-            <a:r>
-              <a:rPr lang="en-US" dirty="0" err="1">
-                <a:solidFill>
-                  <a:srgbClr val="000000"/>
-                </a:solidFill>
-                <a:latin typeface="Consolas" panose="020B0609020204030204" pitchFamily="49" charset="0"/>
-              </a:rPr>
-              <a:t>j++</a:t>
-            </a:r>
-            <a:r>
-              <a:rPr lang="en-US" dirty="0">
-                <a:solidFill>
-                  <a:srgbClr val="000000"/>
-                </a:solidFill>
-                <a:latin typeface="Consolas" panose="020B0609020204030204" pitchFamily="49" charset="0"/>
-              </a:rPr>
-              <a:t>) + h(k++);</a:t>
-            </a:r>
-            <a:r>
-              <a:rPr lang="ru-RU" dirty="0">
-                <a:solidFill>
-                  <a:srgbClr val="000000"/>
-                </a:solidFill>
-                <a:latin typeface="Consolas" panose="020B0609020204030204" pitchFamily="49" charset="0"/>
-              </a:rPr>
-              <a:t> </a:t>
-            </a:r>
-            <a:r>
-              <a:rPr lang="ru-RU" dirty="0">
-                <a:solidFill>
-                  <a:srgbClr val="008000"/>
-                </a:solidFill>
-                <a:latin typeface="Consolas" panose="020B0609020204030204" pitchFamily="49" charset="0"/>
-              </a:rPr>
-              <a:t>// (2)</a:t>
-            </a:r>
-            <a:endParaRPr lang="en-US" dirty="0">
+              <a:t> (*p++ != 0 &amp;&amp; *q++ != 0) *p = *q;</a:t>
+            </a:r>
+            <a:endParaRPr lang="ru-RU" dirty="0">
               <a:solidFill>
                 <a:srgbClr val="000000"/>
               </a:solidFill>
@@ -8420,101 +8934,123 @@
             </a:endParaRPr>
           </a:p>
           <a:p>
+            <a:pPr lvl="1"/>
+            <a:r>
+              <a:rPr lang="ru-RU" dirty="0">
+                <a:highlight>
+                  <a:srgbClr val="00FF00"/>
+                </a:highlight>
+              </a:rPr>
+              <a:t>Никогда не пишите так =)</a:t>
+            </a:r>
+          </a:p>
+          <a:p>
+            <a:pPr lvl="2"/>
             <a:endParaRPr lang="ru-RU" dirty="0"/>
           </a:p>
           <a:p>
+            <a:pPr lvl="1"/>
             <a:r>
               <a:rPr lang="ru-RU" dirty="0"/>
-              <a:t>Каждая из переменных i, j и k принимает новое значение перед входом в f, g и h соответственно, при этом…</a:t>
-            </a:r>
-          </a:p>
-          <a:p>
+              <a:t>Побочный эффект *p++ != 0 проявится до начала вычисления *q++ != 0 </a:t>
+            </a:r>
+          </a:p>
+          <a:p>
+            <a:pPr lvl="2"/>
+            <a:r>
+              <a:rPr lang="ru-RU" dirty="0"/>
+              <a:t>Конец первого операнда </a:t>
+            </a:r>
+            <a:r>
+              <a:rPr lang="en-US" dirty="0"/>
+              <a:t>&amp;&amp;</a:t>
+            </a:r>
             <a:endParaRPr lang="ru-RU" dirty="0"/>
           </a:p>
           <a:p>
+            <a:pPr lvl="2"/>
+            <a:endParaRPr lang="ru-RU" dirty="0"/>
+          </a:p>
+          <a:p>
             <a:pPr lvl="1"/>
             <a:r>
-              <a:rPr lang="en-US" dirty="0"/>
-              <a:t>Unspecified</a:t>
-            </a:r>
+              <a:rPr lang="ru-RU" dirty="0"/>
+              <a:t>Побочный эффект *q++ != 0 проявится до начала вычисления *p = *q </a:t>
+            </a:r>
+            <a:endParaRPr lang="en-US" dirty="0"/>
+          </a:p>
+          <a:p>
+            <a:pPr lvl="2"/>
+            <a:r>
+              <a:rPr lang="ru-RU" dirty="0"/>
+              <a:t>Конец выражения</a:t>
+            </a:r>
+          </a:p>
+          <a:p>
+            <a:pPr marL="0" indent="0">
+              <a:buNone/>
+            </a:pPr>
             <a:endParaRPr lang="ru-RU" dirty="0"/>
           </a:p>
           <a:p>
-            <a:pPr lvl="2"/>
             <a:r>
               <a:rPr lang="ru-RU" dirty="0"/>
-              <a:t>Порядок вызова функций f(), g(), h() и порядок инкрементов i, j, k в строке 2</a:t>
-            </a:r>
-          </a:p>
-          <a:p>
-            <a:pPr lvl="1"/>
-            <a:r>
-              <a:rPr lang="ru-RU" dirty="0"/>
-              <a:t>Если </a:t>
-            </a:r>
-            <a:r>
-              <a:rPr lang="en-US" dirty="0"/>
-              <a:t>i, </a:t>
-            </a:r>
-            <a:r>
-              <a:rPr lang="ru-RU" dirty="0"/>
-              <a:t>j и k – глобальные переменные, то </a:t>
-            </a:r>
-            <a:r>
-              <a:rPr lang="en-US" dirty="0"/>
-              <a:t>unspecified</a:t>
-            </a:r>
+              <a:t>Сколько точек следования в каждом из этих операторов?</a:t>
+            </a:r>
+          </a:p>
+          <a:p>
+            <a:pPr marL="857250" lvl="1" indent="-457200"/>
+            <a:r>
+              <a:rPr lang="en-US" dirty="0">
+                <a:solidFill>
+                  <a:srgbClr val="0000FF"/>
+                </a:solidFill>
+                <a:latin typeface="Consolas" panose="020B0609020204030204" pitchFamily="49" charset="0"/>
+              </a:rPr>
+              <a:t>while</a:t>
+            </a:r>
+            <a:r>
+              <a:rPr lang="en-US" dirty="0">
+                <a:solidFill>
+                  <a:srgbClr val="000000"/>
+                </a:solidFill>
+                <a:latin typeface="Consolas" panose="020B0609020204030204" pitchFamily="49" charset="0"/>
+              </a:rPr>
+              <a:t> (*p != 0 &amp;&amp; *q != 0) *p++ = *q++;</a:t>
+            </a:r>
+          </a:p>
+          <a:p>
+            <a:pPr marL="857250" lvl="1" indent="-457200"/>
+            <a:r>
+              <a:rPr lang="en-US" dirty="0">
+                <a:solidFill>
+                  <a:srgbClr val="0000FF"/>
+                </a:solidFill>
+                <a:latin typeface="Consolas" panose="020B0609020204030204" pitchFamily="49" charset="0"/>
+              </a:rPr>
+              <a:t>while</a:t>
+            </a:r>
+            <a:r>
+              <a:rPr lang="en-US" dirty="0">
+                <a:solidFill>
+                  <a:srgbClr val="000000"/>
+                </a:solidFill>
+                <a:latin typeface="Consolas" panose="020B0609020204030204" pitchFamily="49" charset="0"/>
+              </a:rPr>
+              <a:t> (*q != 0) *p++ = *q++;</a:t>
+            </a:r>
+          </a:p>
+          <a:p>
+            <a:pPr marL="125730" indent="0">
+              <a:buNone/>
+            </a:pPr>
             <a:endParaRPr lang="ru-RU" dirty="0"/>
           </a:p>
           <a:p>
-            <a:pPr lvl="2"/>
-            <a:r>
-              <a:rPr lang="ru-RU" dirty="0"/>
-              <a:t>Значения j и k внутри f</a:t>
-            </a:r>
-          </a:p>
-          <a:p>
-            <a:pPr lvl="2"/>
-            <a:r>
-              <a:rPr lang="ru-RU" dirty="0"/>
-              <a:t>Значения </a:t>
-            </a:r>
-            <a:r>
-              <a:rPr lang="en-US" dirty="0"/>
-              <a:t>i</a:t>
-            </a:r>
-            <a:r>
-              <a:rPr lang="ru-RU" dirty="0"/>
-              <a:t> и k внутри </a:t>
-            </a:r>
-            <a:r>
-              <a:rPr lang="en-US" dirty="0"/>
-              <a:t>g</a:t>
-            </a:r>
+            <a:pPr marL="125730" indent="0">
+              <a:buNone/>
+            </a:pPr>
             <a:endParaRPr lang="ru-RU" dirty="0"/>
-          </a:p>
-          <a:p>
-            <a:pPr lvl="2"/>
-            <a:r>
-              <a:rPr lang="ru-RU" dirty="0"/>
-              <a:t>Значения </a:t>
-            </a:r>
-            <a:r>
-              <a:rPr lang="en-US" dirty="0"/>
-              <a:t>i </a:t>
-            </a:r>
-            <a:r>
-              <a:rPr lang="ru-RU" dirty="0"/>
-              <a:t>и j внутри </a:t>
-            </a:r>
-            <a:r>
-              <a:rPr lang="en-US" dirty="0"/>
-              <a:t>h</a:t>
-            </a:r>
-            <a:r>
-              <a:rPr lang="ru-RU" dirty="0"/>
-              <a:t> </a:t>
-            </a:r>
           </a:p>
         </p:txBody>
       </p:sp>
@@ -8544,7 +9080,7 @@
     </p:spTree>
     <p:extLst>
       <p:ext uri="{BB962C8B-B14F-4D97-AF65-F5344CB8AC3E}">
-        <p14:creationId xmlns:p14="http://schemas.microsoft.com/office/powerpoint/2010/main" val="1235720759"/>
+        <p14:creationId xmlns:p14="http://schemas.microsoft.com/office/powerpoint/2010/main" val="871238312"/>
       </p:ext>
     </p:extLst>
   </p:cSld>
@@ -8590,31 +9126,7 @@
           <a:p>
             <a:r>
               <a:rPr lang="ru-RU" dirty="0"/>
-              <a:t>Советы по </a:t>
-            </a:r>
-            <a:r>
-              <a:rPr lang="en-US" dirty="0"/>
-              <a:t>[</a:t>
-            </a:r>
-            <a:r>
-              <a:rPr lang="ru-RU" dirty="0">
-                <a:highlight>
-                  <a:srgbClr val="00FF00"/>
-                </a:highlight>
-              </a:rPr>
-              <a:t>не</a:t>
-            </a:r>
-            <a:r>
-              <a:rPr lang="en-US" dirty="0"/>
-              <a:t>]</a:t>
-            </a:r>
-            <a:r>
-              <a:rPr lang="ru-RU" sz="4100" dirty="0"/>
-              <a:t>использованию</a:t>
-            </a:r>
-            <a:r>
-              <a:rPr lang="ru-RU" dirty="0"/>
-              <a:t> побочных эффектов</a:t>
+              <a:t>Пример 2</a:t>
             </a:r>
           </a:p>
         </p:txBody>
@@ -8631,35 +9143,155 @@
         </p:nvSpPr>
         <p:spPr/>
         <p:txBody>
-          <a:bodyPr/>
+          <a:bodyPr>
+            <a:normAutofit/>
+          </a:bodyPr>
           <a:lstStyle/>
           <a:p>
             <a:r>
-              <a:rPr lang="ru-RU" dirty="0"/>
-              <a:t>Меньше побочных эффектов – лучше </a:t>
-            </a:r>
-          </a:p>
-          <a:p>
-            <a:endParaRPr lang="en-US" dirty="0"/>
-          </a:p>
-          <a:p>
-            <a:r>
-              <a:rPr lang="ru-RU" dirty="0"/>
-              <a:t>Более одного побочного эффекта с одним и тем же </a:t>
-            </a:r>
-            <a:r>
-              <a:rPr lang="en-US" dirty="0"/>
-              <a:t>ℓ-value </a:t>
-            </a:r>
-            <a:r>
-              <a:rPr lang="ru-RU" dirty="0"/>
-              <a:t>между соседними точками следования == </a:t>
-            </a:r>
-            <a:r>
-              <a:rPr lang="en-US" dirty="0"/>
-              <a:t>unspecified behavior</a:t>
-            </a:r>
-            <a:endParaRPr lang="ru-RU" dirty="0"/>
+              <a:rPr lang="en-US" sz="2400" dirty="0" err="1">
+                <a:solidFill>
+                  <a:srgbClr val="0000FF"/>
+                </a:solidFill>
+                <a:latin typeface="Consolas" panose="020B0609020204030204" pitchFamily="49" charset="0"/>
+              </a:rPr>
+              <a:t>int</a:t>
+            </a:r>
+            <a:r>
+              <a:rPr lang="en-US" sz="2400" dirty="0">
+                <a:solidFill>
+                  <a:srgbClr val="000000"/>
+                </a:solidFill>
+                <a:latin typeface="Consolas" panose="020B0609020204030204" pitchFamily="49" charset="0"/>
+              </a:rPr>
+              <a:t> A[3] = { 1,</a:t>
+            </a:r>
+            <a:r>
+              <a:rPr lang="ru-RU" sz="2400" dirty="0">
+                <a:solidFill>
+                  <a:srgbClr val="000000"/>
+                </a:solidFill>
+                <a:latin typeface="Consolas" panose="020B0609020204030204" pitchFamily="49" charset="0"/>
+              </a:rPr>
+              <a:t> </a:t>
+            </a:r>
+            <a:r>
+              <a:rPr lang="en-US" sz="2400" dirty="0">
+                <a:solidFill>
+                  <a:srgbClr val="000000"/>
+                </a:solidFill>
+                <a:latin typeface="Consolas" panose="020B0609020204030204" pitchFamily="49" charset="0"/>
+              </a:rPr>
+              <a:t>0,</a:t>
+            </a:r>
+            <a:r>
+              <a:rPr lang="ru-RU" sz="2400" dirty="0">
+                <a:solidFill>
+                  <a:srgbClr val="000000"/>
+                </a:solidFill>
+                <a:latin typeface="Consolas" panose="020B0609020204030204" pitchFamily="49" charset="0"/>
+              </a:rPr>
+              <a:t> </a:t>
+            </a:r>
+            <a:r>
+              <a:rPr lang="en-US" sz="2400" dirty="0">
+                <a:solidFill>
+                  <a:srgbClr val="000000"/>
+                </a:solidFill>
+                <a:latin typeface="Consolas" panose="020B0609020204030204" pitchFamily="49" charset="0"/>
+              </a:rPr>
+              <a:t>2 }, *p = A;</a:t>
+            </a:r>
+            <a:br>
+              <a:rPr lang="ru-RU" sz="2400" dirty="0">
+                <a:solidFill>
+                  <a:srgbClr val="000000"/>
+                </a:solidFill>
+                <a:latin typeface="Consolas" panose="020B0609020204030204" pitchFamily="49" charset="0"/>
+              </a:rPr>
+            </a:br>
+            <a:r>
+              <a:rPr lang="ru-RU" sz="2400" dirty="0" err="1">
+                <a:solidFill>
+                  <a:srgbClr val="0000FF"/>
+                </a:solidFill>
+                <a:latin typeface="Consolas" panose="020B0609020204030204" pitchFamily="49" charset="0"/>
+              </a:rPr>
+              <a:t>int</a:t>
+            </a:r>
+            <a:r>
+              <a:rPr lang="ru-RU" sz="2400" dirty="0">
+                <a:solidFill>
+                  <a:srgbClr val="000000"/>
+                </a:solidFill>
+                <a:latin typeface="Consolas" panose="020B0609020204030204" pitchFamily="49" charset="0"/>
+              </a:rPr>
+              <a:t> a = (*p++) ? (*p++) : 0; </a:t>
+            </a:r>
+            <a:r>
+              <a:rPr lang="ru-RU" sz="2400" dirty="0">
+                <a:solidFill>
+                  <a:srgbClr val="008000"/>
+                </a:solidFill>
+                <a:latin typeface="Consolas" panose="020B0609020204030204" pitchFamily="49" charset="0"/>
+              </a:rPr>
+              <a:t>// чему равно a?</a:t>
+            </a:r>
+            <a:endParaRPr lang="ru-RU" sz="2400" dirty="0">
+              <a:solidFill>
+                <a:srgbClr val="000000"/>
+              </a:solidFill>
+              <a:latin typeface="Consolas" panose="020B0609020204030204" pitchFamily="49" charset="0"/>
+            </a:endParaRPr>
+          </a:p>
+          <a:p>
+            <a:pPr marL="68580" indent="0">
+              <a:buNone/>
+            </a:pPr>
+            <a:endParaRPr lang="en-US" sz="2400" dirty="0"/>
+          </a:p>
+          <a:p>
+            <a:pPr lvl="1"/>
+            <a:r>
+              <a:rPr lang="ru-RU" sz="2400" dirty="0"/>
+              <a:t>Точка следования находится после первого *p++</a:t>
+            </a:r>
+          </a:p>
+          <a:p>
+            <a:endParaRPr lang="ru-RU" sz="2800" dirty="0"/>
+          </a:p>
+          <a:p>
+            <a:pPr lvl="1"/>
+            <a:r>
+              <a:rPr lang="ru-RU" sz="2400" dirty="0"/>
+              <a:t>p уже увеличена на 1 при вычислении второго *p++ </a:t>
+            </a:r>
+          </a:p>
+          <a:p>
+            <a:endParaRPr lang="ru-RU" sz="2800" dirty="0"/>
+          </a:p>
+          <a:p>
+            <a:r>
+              <a:rPr lang="ru-RU" sz="2800" dirty="0">
+                <a:highlight>
+                  <a:srgbClr val="00FF00"/>
+                </a:highlight>
+              </a:rPr>
+              <a:t>Никогда не пишите так</a:t>
+            </a:r>
+            <a:r>
+              <a:rPr lang="ru-RU" dirty="0">
+                <a:highlight>
+                  <a:srgbClr val="00FF00"/>
+                </a:highlight>
+              </a:rPr>
+              <a:t> =)</a:t>
+            </a:r>
+            <a:endParaRPr lang="ru-RU" sz="2800" dirty="0">
+              <a:highlight>
+                <a:srgbClr val="00FF00"/>
+              </a:highlight>
+            </a:endParaRPr>
           </a:p>
         </p:txBody>
       </p:sp>
@@ -8689,7 +9321,7 @@
     </p:spTree>
     <p:extLst>
       <p:ext uri="{BB962C8B-B14F-4D97-AF65-F5344CB8AC3E}">
-        <p14:creationId xmlns:p14="http://schemas.microsoft.com/office/powerpoint/2010/main" val="2708752862"/>
+        <p14:creationId xmlns:p14="http://schemas.microsoft.com/office/powerpoint/2010/main" val="829234774"/>
       </p:ext>
     </p:extLst>
   </p:cSld>
@@ -8728,19 +9360,224 @@
         </p:nvSpPr>
         <p:spPr/>
         <p:txBody>
-          <a:bodyPr/>
+          <a:bodyPr>
+            <a:normAutofit/>
+          </a:bodyPr>
           <a:lstStyle/>
           <a:p>
             <a:r>
               <a:rPr lang="ru-RU" dirty="0"/>
-              <a:t>Схема рассказа об операторе языка Си</a:t>
+              <a:t>Пример 3</a:t>
             </a:r>
           </a:p>
         </p:txBody>
       </p:sp>
       <p:sp>
         <p:nvSpPr>
-          <p:cNvPr id="3" name="Slide Number Placeholder 2"/>
+          <p:cNvPr id="3" name="Content Placeholder 2"/>
+          <p:cNvSpPr>
+            <a:spLocks noGrp="1"/>
+          </p:cNvSpPr>
+          <p:nvPr>
+            <p:ph idx="1"/>
+          </p:nvPr>
+        </p:nvSpPr>
+        <p:spPr/>
+        <p:txBody>
+          <a:bodyPr>
+            <a:normAutofit fontScale="92500" lnSpcReduction="10000"/>
+          </a:bodyPr>
+          <a:lstStyle/>
+          <a:p>
+            <a:r>
+              <a:rPr lang="nn-NO" dirty="0">
+                <a:solidFill>
+                  <a:srgbClr val="0000FF"/>
+                </a:solidFill>
+                <a:latin typeface="Consolas" panose="020B0609020204030204" pitchFamily="49" charset="0"/>
+              </a:rPr>
+              <a:t>int</a:t>
+            </a:r>
+            <a:r>
+              <a:rPr lang="nn-NO" dirty="0">
+                <a:solidFill>
+                  <a:srgbClr val="000000"/>
+                </a:solidFill>
+                <a:latin typeface="Consolas" panose="020B0609020204030204" pitchFamily="49" charset="0"/>
+              </a:rPr>
+              <a:t> i = 0, j = i++, k = i++;</a:t>
+            </a:r>
+            <a:br>
+              <a:rPr lang="ru-RU" dirty="0">
+                <a:solidFill>
+                  <a:srgbClr val="008000"/>
+                </a:solidFill>
+                <a:latin typeface="Consolas" panose="020B0609020204030204" pitchFamily="49" charset="0"/>
+              </a:rPr>
+            </a:br>
+            <a:r>
+              <a:rPr lang="en-US" dirty="0" err="1">
+                <a:solidFill>
+                  <a:srgbClr val="0000FF"/>
+                </a:solidFill>
+                <a:latin typeface="Consolas" panose="020B0609020204030204" pitchFamily="49" charset="0"/>
+              </a:rPr>
+              <a:t>int</a:t>
+            </a:r>
+            <a:r>
+              <a:rPr lang="en-US" dirty="0">
+                <a:solidFill>
+                  <a:srgbClr val="000000"/>
+                </a:solidFill>
+                <a:latin typeface="Consolas" panose="020B0609020204030204" pitchFamily="49" charset="0"/>
+              </a:rPr>
+              <a:t> x = f(i++) + g(</a:t>
+            </a:r>
+            <a:r>
+              <a:rPr lang="en-US" dirty="0" err="1">
+                <a:solidFill>
+                  <a:srgbClr val="000000"/>
+                </a:solidFill>
+                <a:latin typeface="Consolas" panose="020B0609020204030204" pitchFamily="49" charset="0"/>
+              </a:rPr>
+              <a:t>j++</a:t>
+            </a:r>
+            <a:r>
+              <a:rPr lang="en-US" dirty="0">
+                <a:solidFill>
+                  <a:srgbClr val="000000"/>
+                </a:solidFill>
+                <a:latin typeface="Consolas" panose="020B0609020204030204" pitchFamily="49" charset="0"/>
+              </a:rPr>
+              <a:t>) + h(k++);</a:t>
+            </a:r>
+            <a:r>
+              <a:rPr lang="ru-RU" dirty="0">
+                <a:solidFill>
+                  <a:srgbClr val="000000"/>
+                </a:solidFill>
+                <a:latin typeface="Consolas" panose="020B0609020204030204" pitchFamily="49" charset="0"/>
+              </a:rPr>
+              <a:t> </a:t>
+            </a:r>
+            <a:r>
+              <a:rPr lang="ru-RU" dirty="0">
+                <a:solidFill>
+                  <a:srgbClr val="008000"/>
+                </a:solidFill>
+                <a:latin typeface="Consolas" panose="020B0609020204030204" pitchFamily="49" charset="0"/>
+              </a:rPr>
+              <a:t>// (2)</a:t>
+            </a:r>
+            <a:endParaRPr lang="en-US" dirty="0">
+              <a:solidFill>
+                <a:srgbClr val="000000"/>
+              </a:solidFill>
+              <a:latin typeface="Consolas" panose="020B0609020204030204" pitchFamily="49" charset="0"/>
+            </a:endParaRPr>
+          </a:p>
+          <a:p>
+            <a:endParaRPr lang="ru-RU" dirty="0"/>
+          </a:p>
+          <a:p>
+            <a:r>
+              <a:rPr lang="ru-RU" dirty="0"/>
+              <a:t>Каждая из переменных i, j и k принимает новое значение перед входом в f, g и h соответственно, при этом…</a:t>
+            </a:r>
+          </a:p>
+          <a:p>
+            <a:endParaRPr lang="ru-RU" dirty="0"/>
+          </a:p>
+          <a:p>
+            <a:pPr lvl="1"/>
+            <a:r>
+              <a:rPr lang="en-US" dirty="0"/>
+              <a:t>Unspecified</a:t>
+            </a:r>
+            <a:endParaRPr lang="ru-RU" dirty="0"/>
+          </a:p>
+          <a:p>
+            <a:pPr lvl="2"/>
+            <a:r>
+              <a:rPr lang="ru-RU" dirty="0"/>
+              <a:t>Порядок вызова функций f(), g(), h() и порядок инкрементов i, j, k в строке 2</a:t>
+            </a:r>
+          </a:p>
+          <a:p>
+            <a:pPr lvl="1"/>
+            <a:r>
+              <a:rPr lang="ru-RU" dirty="0"/>
+              <a:t>Если </a:t>
+            </a:r>
+            <a:r>
+              <a:rPr lang="en-US" dirty="0"/>
+              <a:t>i, </a:t>
+            </a:r>
+            <a:r>
+              <a:rPr lang="ru-RU" dirty="0"/>
+              <a:t>j и k – глобальные переменные, то </a:t>
+            </a:r>
+            <a:r>
+              <a:rPr lang="en-US" dirty="0"/>
+              <a:t>unspecified</a:t>
+            </a:r>
+            <a:endParaRPr lang="ru-RU" dirty="0"/>
+          </a:p>
+          <a:p>
+            <a:pPr lvl="2"/>
+            <a:r>
+              <a:rPr lang="ru-RU" dirty="0"/>
+              <a:t>Значения j и k внутри f</a:t>
+            </a:r>
+          </a:p>
+          <a:p>
+            <a:pPr lvl="2"/>
+            <a:r>
+              <a:rPr lang="ru-RU" dirty="0"/>
+              <a:t>Значения </a:t>
+            </a:r>
+            <a:r>
+              <a:rPr lang="en-US" dirty="0"/>
+              <a:t>i</a:t>
+            </a:r>
+            <a:r>
+              <a:rPr lang="ru-RU" dirty="0"/>
+              <a:t> и k внутри </a:t>
+            </a:r>
+            <a:r>
+              <a:rPr lang="en-US" dirty="0"/>
+              <a:t>g</a:t>
+            </a:r>
+            <a:endParaRPr lang="ru-RU" dirty="0"/>
+          </a:p>
+          <a:p>
+            <a:pPr lvl="2"/>
+            <a:r>
+              <a:rPr lang="ru-RU" dirty="0"/>
+              <a:t>Значения </a:t>
+            </a:r>
+            <a:r>
+              <a:rPr lang="en-US" dirty="0"/>
+              <a:t>i </a:t>
+            </a:r>
+            <a:r>
+              <a:rPr lang="ru-RU" dirty="0"/>
+              <a:t>и j внутри </a:t>
+            </a:r>
+            <a:r>
+              <a:rPr lang="en-US" dirty="0"/>
+              <a:t>h</a:t>
+            </a:r>
+            <a:r>
+              <a:rPr lang="ru-RU" dirty="0"/>
+              <a:t> </a:t>
+            </a:r>
+          </a:p>
+        </p:txBody>
+      </p:sp>
+      <p:sp>
+        <p:nvSpPr>
+          <p:cNvPr id="4" name="Slide Number Placeholder 3"/>
           <p:cNvSpPr>
             <a:spLocks noGrp="1"/>
           </p:cNvSpPr>
@@ -8761,325 +9598,10 @@
           </a:p>
         </p:txBody>
       </p:sp>
-      <p:sp>
-        <p:nvSpPr>
-          <p:cNvPr id="6" name="Content Placeholder 5">
-            <a:extLst>
-              <a:ext uri="{FF2B5EF4-FFF2-40B4-BE49-F238E27FC236}">
-                <a16:creationId xmlns:a16="http://schemas.microsoft.com/office/drawing/2014/main" id="{BF3E62CA-66BA-ED23-2BFA-8A575B5F26A6}"/>
-              </a:ext>
-            </a:extLst>
-          </p:cNvPr>
-          <p:cNvSpPr>
-            <a:spLocks noGrp="1"/>
-          </p:cNvSpPr>
-          <p:nvPr>
-            <p:ph idx="1"/>
-          </p:nvPr>
-        </p:nvSpPr>
-        <p:spPr/>
-        <p:txBody>
-          <a:bodyPr>
-            <a:normAutofit lnSpcReduction="10000"/>
-          </a:bodyPr>
-          <a:lstStyle/>
-          <a:p>
-            <a:pPr fontAlgn="t">
-              <a:spcBef>
-                <a:spcPts val="0"/>
-              </a:spcBef>
-            </a:pPr>
-            <a:r>
-              <a:rPr lang="ru-RU" sz="2800" b="0" i="0" u="none" strike="noStrike" kern="1200" dirty="0">
-                <a:solidFill>
-                  <a:srgbClr val="000000"/>
-                </a:solidFill>
-                <a:effectLst/>
-                <a:ea typeface="Calibri" panose="020F0502020204030204" pitchFamily="34" charset="0"/>
-                <a:cs typeface="Calibri" panose="020F0502020204030204" pitchFamily="34" charset="0"/>
-              </a:rPr>
-              <a:t>Что требуется от типов операндов, как определяется тип результата</a:t>
-            </a:r>
-            <a:endParaRPr lang="ru-RU" sz="2800" b="0" i="0" u="none" strike="noStrike" dirty="0">
-              <a:effectLst/>
-              <a:ea typeface="Calibri" panose="020F0502020204030204" pitchFamily="34" charset="0"/>
-              <a:cs typeface="Calibri" panose="020F0502020204030204" pitchFamily="34" charset="0"/>
-            </a:endParaRPr>
-          </a:p>
-          <a:p>
-            <a:pPr fontAlgn="t">
-              <a:spcBef>
-                <a:spcPts val="0"/>
-              </a:spcBef>
-            </a:pPr>
-            <a:endParaRPr lang="ru-RU" dirty="0">
-              <a:solidFill>
-                <a:srgbClr val="000000"/>
-              </a:solidFill>
-              <a:ea typeface="Calibri" panose="020F0502020204030204" pitchFamily="34" charset="0"/>
-              <a:cs typeface="Calibri" panose="020F0502020204030204" pitchFamily="34" charset="0"/>
-            </a:endParaRPr>
-          </a:p>
-          <a:p>
-            <a:pPr fontAlgn="t">
-              <a:spcBef>
-                <a:spcPts val="0"/>
-              </a:spcBef>
-            </a:pPr>
-            <a:r>
-              <a:rPr lang="ru-RU" dirty="0">
-                <a:solidFill>
-                  <a:srgbClr val="000000"/>
-                </a:solidFill>
-                <a:ea typeface="Calibri" panose="020F0502020204030204" pitchFamily="34" charset="0"/>
-                <a:cs typeface="Calibri" panose="020F0502020204030204" pitchFamily="34" charset="0"/>
-              </a:rPr>
-              <a:t>В каком порядке вычисляются операнды</a:t>
-            </a:r>
-            <a:endParaRPr lang="ru-RU" b="0" i="0" u="none" strike="noStrike" dirty="0">
-              <a:effectLst/>
-              <a:ea typeface="Calibri" panose="020F0502020204030204" pitchFamily="34" charset="0"/>
-              <a:cs typeface="Calibri" panose="020F0502020204030204" pitchFamily="34" charset="0"/>
-            </a:endParaRPr>
-          </a:p>
-          <a:p>
-            <a:pPr fontAlgn="t">
-              <a:spcBef>
-                <a:spcPts val="0"/>
-              </a:spcBef>
-            </a:pPr>
-            <a:endParaRPr lang="ru-RU" sz="2800" b="0" i="0" u="none" strike="noStrike" kern="1200" dirty="0">
-              <a:solidFill>
-                <a:srgbClr val="000000"/>
-              </a:solidFill>
-              <a:effectLst/>
-              <a:ea typeface="Calibri" panose="020F0502020204030204" pitchFamily="34" charset="0"/>
-              <a:cs typeface="Calibri" panose="020F0502020204030204" pitchFamily="34" charset="0"/>
-            </a:endParaRPr>
-          </a:p>
-          <a:p>
-            <a:pPr fontAlgn="t">
-              <a:spcBef>
-                <a:spcPts val="0"/>
-              </a:spcBef>
-            </a:pPr>
-            <a:r>
-              <a:rPr lang="ru-RU" sz="2800" b="0" i="0" u="none" strike="noStrike" kern="1200" dirty="0">
-                <a:solidFill>
-                  <a:srgbClr val="000000"/>
-                </a:solidFill>
-                <a:effectLst/>
-                <a:ea typeface="Calibri" panose="020F0502020204030204" pitchFamily="34" charset="0"/>
-                <a:cs typeface="Calibri" panose="020F0502020204030204" pitchFamily="34" charset="0"/>
-              </a:rPr>
-              <a:t>Как вычисляется результат</a:t>
-            </a:r>
-            <a:endParaRPr lang="en-US" sz="2800" b="0" i="0" u="none" strike="noStrike" kern="1200" dirty="0">
-              <a:solidFill>
-                <a:srgbClr val="000000"/>
-              </a:solidFill>
-              <a:effectLst/>
-              <a:ea typeface="Calibri" panose="020F0502020204030204" pitchFamily="34" charset="0"/>
-              <a:cs typeface="Calibri" panose="020F0502020204030204" pitchFamily="34" charset="0"/>
-            </a:endParaRPr>
-          </a:p>
-          <a:p>
-            <a:pPr lvl="1" fontAlgn="t">
-              <a:spcBef>
-                <a:spcPts val="0"/>
-              </a:spcBef>
-            </a:pPr>
-            <a:r>
-              <a:rPr lang="en-US" b="0" i="0" u="none" strike="noStrike" kern="1200" baseline="0" dirty="0">
-                <a:solidFill>
-                  <a:srgbClr val="000000"/>
-                </a:solidFill>
-                <a:effectLst/>
-                <a:ea typeface="Calibri" panose="020F0502020204030204" pitchFamily="34" charset="0"/>
-                <a:cs typeface="Calibri" panose="020F0502020204030204" pitchFamily="34" charset="0"/>
-              </a:rPr>
-              <a:t>Well</a:t>
-            </a:r>
-            <a:r>
-              <a:rPr lang="ru-RU" b="0" i="0" u="none" strike="noStrike" kern="1200" baseline="0" dirty="0">
-                <a:solidFill>
-                  <a:srgbClr val="000000"/>
-                </a:solidFill>
-                <a:effectLst/>
-                <a:ea typeface="Calibri" panose="020F0502020204030204" pitchFamily="34" charset="0"/>
-                <a:cs typeface="Calibri" panose="020F0502020204030204" pitchFamily="34" charset="0"/>
-              </a:rPr>
-              <a:t>-</a:t>
-            </a:r>
-            <a:r>
-              <a:rPr lang="en-US" b="0" i="0" u="none" strike="noStrike" kern="1200" baseline="0" dirty="0">
-                <a:solidFill>
-                  <a:srgbClr val="000000"/>
-                </a:solidFill>
-                <a:effectLst/>
-                <a:ea typeface="Calibri" panose="020F0502020204030204" pitchFamily="34" charset="0"/>
-                <a:cs typeface="Calibri" panose="020F0502020204030204" pitchFamily="34" charset="0"/>
-              </a:rPr>
-              <a:t>defined</a:t>
-            </a:r>
-            <a:r>
-              <a:rPr lang="ru-RU" b="0" i="0" u="none" strike="noStrike" kern="1200" baseline="0" dirty="0">
-                <a:solidFill>
-                  <a:srgbClr val="000000"/>
-                </a:solidFill>
-                <a:effectLst/>
-                <a:ea typeface="Calibri" panose="020F0502020204030204" pitchFamily="34" charset="0"/>
-                <a:cs typeface="Calibri" panose="020F0502020204030204" pitchFamily="34" charset="0"/>
-              </a:rPr>
-              <a:t> (</a:t>
-            </a:r>
-            <a:r>
-              <a:rPr lang="en-US" b="0" i="0" u="none" strike="noStrike" kern="1200" baseline="0" dirty="0">
-                <a:solidFill>
-                  <a:srgbClr val="000000"/>
-                </a:solidFill>
-                <a:effectLst/>
-                <a:ea typeface="Calibri" panose="020F0502020204030204" pitchFamily="34" charset="0"/>
-                <a:cs typeface="Calibri" panose="020F0502020204030204" pitchFamily="34" charset="0"/>
-              </a:rPr>
-              <a:t>standard</a:t>
-            </a:r>
-            <a:r>
-              <a:rPr lang="ru-RU" b="0" i="0" u="none" strike="noStrike" kern="1200" baseline="0" dirty="0">
-                <a:solidFill>
-                  <a:srgbClr val="000000"/>
-                </a:solidFill>
-                <a:effectLst/>
-                <a:ea typeface="Calibri" panose="020F0502020204030204" pitchFamily="34" charset="0"/>
-                <a:cs typeface="Calibri" panose="020F0502020204030204" pitchFamily="34" charset="0"/>
-              </a:rPr>
-              <a:t>)</a:t>
-            </a:r>
-            <a:r>
-              <a:rPr lang="en-US" b="0" i="0" u="none" strike="noStrike" kern="1200" baseline="0" dirty="0">
-                <a:solidFill>
-                  <a:srgbClr val="000000"/>
-                </a:solidFill>
-                <a:effectLst/>
-                <a:ea typeface="Calibri" panose="020F0502020204030204" pitchFamily="34" charset="0"/>
-                <a:cs typeface="Calibri" panose="020F0502020204030204" pitchFamily="34" charset="0"/>
-              </a:rPr>
-              <a:t> behavior</a:t>
-            </a:r>
-            <a:endParaRPr lang="ru-RU" b="0" i="0" u="none" strike="noStrike" dirty="0">
-              <a:effectLst/>
-              <a:ea typeface="Calibri" panose="020F0502020204030204" pitchFamily="34" charset="0"/>
-              <a:cs typeface="Calibri" panose="020F0502020204030204" pitchFamily="34" charset="0"/>
-            </a:endParaRPr>
-          </a:p>
-          <a:p>
-            <a:pPr lvl="1">
-              <a:spcBef>
-                <a:spcPts val="0"/>
-              </a:spcBef>
-            </a:pPr>
-            <a:r>
-              <a:rPr lang="en-US" b="0" i="0" u="none" strike="noStrike" kern="1200" baseline="0" dirty="0">
-                <a:solidFill>
-                  <a:srgbClr val="000000"/>
-                </a:solidFill>
-                <a:effectLst/>
-                <a:ea typeface="Calibri" panose="020F0502020204030204" pitchFamily="34" charset="0"/>
-                <a:cs typeface="Calibri" panose="020F0502020204030204" pitchFamily="34" charset="0"/>
-              </a:rPr>
-              <a:t>Implementation-defined behavior</a:t>
-            </a:r>
-            <a:endParaRPr lang="ru-RU" b="0" i="0" u="none" strike="noStrike" dirty="0">
-              <a:effectLst/>
-              <a:ea typeface="Calibri" panose="020F0502020204030204" pitchFamily="34" charset="0"/>
-              <a:cs typeface="Calibri" panose="020F0502020204030204" pitchFamily="34" charset="0"/>
-            </a:endParaRPr>
-          </a:p>
-          <a:p>
-            <a:pPr lvl="1" fontAlgn="t">
-              <a:spcBef>
-                <a:spcPts val="0"/>
-              </a:spcBef>
-            </a:pPr>
-            <a:r>
-              <a:rPr lang="en-US" b="0" i="0" u="none" strike="noStrike" kern="1200" dirty="0">
-                <a:solidFill>
-                  <a:srgbClr val="000000"/>
-                </a:solidFill>
-                <a:effectLst/>
-                <a:ea typeface="Calibri" panose="020F0502020204030204" pitchFamily="34" charset="0"/>
-                <a:cs typeface="Calibri" panose="020F0502020204030204" pitchFamily="34" charset="0"/>
-              </a:rPr>
-              <a:t>Unspecified behavior</a:t>
-            </a:r>
-            <a:endParaRPr lang="ru-RU" b="0" i="0" u="none" strike="noStrike" dirty="0">
-              <a:effectLst/>
-              <a:ea typeface="Calibri" panose="020F0502020204030204" pitchFamily="34" charset="0"/>
-              <a:cs typeface="Calibri" panose="020F0502020204030204" pitchFamily="34" charset="0"/>
-            </a:endParaRPr>
-          </a:p>
-          <a:p>
-            <a:pPr lvl="1">
-              <a:spcBef>
-                <a:spcPts val="0"/>
-              </a:spcBef>
-            </a:pPr>
-            <a:r>
-              <a:rPr lang="en-US" b="0" i="0" u="none" strike="noStrike" kern="1200" baseline="0" dirty="0">
-                <a:solidFill>
-                  <a:srgbClr val="000000"/>
-                </a:solidFill>
-                <a:effectLst/>
-                <a:ea typeface="Calibri" panose="020F0502020204030204" pitchFamily="34" charset="0"/>
-                <a:cs typeface="Calibri" panose="020F0502020204030204" pitchFamily="34" charset="0"/>
-              </a:rPr>
-              <a:t>Undefined behavior</a:t>
-            </a:r>
-          </a:p>
-          <a:p>
-            <a:pPr fontAlgn="t">
-              <a:spcBef>
-                <a:spcPts val="0"/>
-              </a:spcBef>
-            </a:pPr>
-            <a:endParaRPr lang="ru-RU" sz="2800" b="0" i="0" u="none" strike="noStrike" kern="1200" dirty="0">
-              <a:solidFill>
-                <a:srgbClr val="000000"/>
-              </a:solidFill>
-              <a:effectLst/>
-              <a:ea typeface="Calibri" panose="020F0502020204030204" pitchFamily="34" charset="0"/>
-              <a:cs typeface="Calibri" panose="020F0502020204030204" pitchFamily="34" charset="0"/>
-            </a:endParaRPr>
-          </a:p>
-          <a:p>
-            <a:pPr fontAlgn="t">
-              <a:spcBef>
-                <a:spcPts val="0"/>
-              </a:spcBef>
-            </a:pPr>
-            <a:r>
-              <a:rPr lang="ru-RU" sz="2800" b="0" i="0" u="none" strike="noStrike" kern="1200" dirty="0">
-                <a:solidFill>
-                  <a:srgbClr val="000000"/>
-                </a:solidFill>
-                <a:effectLst/>
-                <a:ea typeface="Calibri" panose="020F0502020204030204" pitchFamily="34" charset="0"/>
-                <a:cs typeface="Calibri" panose="020F0502020204030204" pitchFamily="34" charset="0"/>
-              </a:rPr>
-              <a:t>Какие есть побочные эффекты</a:t>
-            </a:r>
-            <a:endParaRPr lang="ru-RU" sz="2800" b="0" i="0" u="none" strike="noStrike" dirty="0">
-              <a:effectLst/>
-              <a:ea typeface="Calibri" panose="020F0502020204030204" pitchFamily="34" charset="0"/>
-              <a:cs typeface="Calibri" panose="020F0502020204030204" pitchFamily="34" charset="0"/>
-            </a:endParaRPr>
-          </a:p>
-        </p:txBody>
-      </p:sp>
     </p:spTree>
     <p:extLst>
       <p:ext uri="{BB962C8B-B14F-4D97-AF65-F5344CB8AC3E}">
-        <p14:creationId xmlns:p14="http://schemas.microsoft.com/office/powerpoint/2010/main" val="3913004308"/>
+        <p14:creationId xmlns:p14="http://schemas.microsoft.com/office/powerpoint/2010/main" val="1235720759"/>
       </p:ext>
     </p:extLst>
   </p:cSld>
@@ -9123,24 +9645,30 @@
           </a:bodyPr>
           <a:lstStyle/>
           <a:p>
-            <a:pPr algn="l" fontAlgn="ctr"/>
-            <a:r>
-              <a:rPr lang="ru-RU" dirty="0"/>
-              <a:t>Пример </a:t>
-            </a:r>
-            <a:r>
-              <a:rPr lang="en-US" dirty="0"/>
-              <a:t>x &amp;&amp; y </a:t>
-            </a:r>
-            <a:r>
-              <a:rPr lang="ru-RU" dirty="0"/>
-              <a:t>и </a:t>
-            </a:r>
-            <a:r>
-              <a:rPr lang="en-US" dirty="0"/>
-              <a:t>x || y</a:t>
-            </a:r>
-            <a:endParaRPr lang="ru-RU" dirty="0"/>
+            <a:r>
+              <a:rPr lang="ru-RU" sz="3600" dirty="0"/>
+              <a:t>Советы по </a:t>
+            </a:r>
+            <a:r>
+              <a:rPr lang="en-US" sz="3600" dirty="0"/>
+              <a:t>[</a:t>
+            </a:r>
+            <a:r>
+              <a:rPr lang="ru-RU" sz="3600" dirty="0">
+                <a:highlight>
+                  <a:srgbClr val="00FF00"/>
+                </a:highlight>
+              </a:rPr>
+              <a:t>не</a:t>
+            </a:r>
+            <a:r>
+              <a:rPr lang="en-US" sz="3600" dirty="0"/>
+              <a:t>]</a:t>
+            </a:r>
+            <a:r>
+              <a:rPr lang="ru-RU" sz="3600" dirty="0"/>
+              <a:t>использованию побочных эффектов</a:t>
+            </a:r>
           </a:p>
         </p:txBody>
       </p:sp>
@@ -9156,626 +9684,58 @@
         </p:nvSpPr>
         <p:spPr/>
         <p:txBody>
-          <a:bodyPr>
-            <a:normAutofit/>
-          </a:bodyPr>
+          <a:bodyPr/>
           <a:lstStyle/>
           <a:p>
+            <a:r>
+              <a:rPr lang="ru-RU" dirty="0"/>
+              <a:t>Меньше – легче понимать код </a:t>
+            </a:r>
+          </a:p>
+          <a:p>
+            <a:endParaRPr lang="en-US" dirty="0"/>
+          </a:p>
+          <a:p>
+            <a:r>
+              <a:rPr lang="ru-RU" dirty="0"/>
+              <a:t>Более одного с одним и тем же </a:t>
+            </a:r>
+            <a:r>
+              <a:rPr lang="en-US" dirty="0"/>
+              <a:t>ℓ-value </a:t>
+            </a:r>
+            <a:r>
+              <a:rPr lang="ru-RU" dirty="0"/>
+              <a:t>между соседними точками следования == </a:t>
+            </a:r>
+            <a:r>
+              <a:rPr lang="en-US" dirty="0"/>
+              <a:t>unspecified behavior</a:t>
+            </a:r>
             <a:endParaRPr lang="ru-RU" dirty="0"/>
+          </a:p>
+          <a:p>
+            <a:endParaRPr lang="ru-RU" dirty="0"/>
+          </a:p>
+          <a:p>
+            <a:r>
+              <a:rPr lang="ru-RU" dirty="0"/>
+              <a:t>Хороший стиль  </a:t>
+            </a:r>
+            <a:r>
+              <a:rPr lang="en-US" dirty="0"/>
+              <a:t>≤ </a:t>
+            </a:r>
+            <a:r>
+              <a:rPr lang="ru-RU" dirty="0"/>
+              <a:t>1 на выражение верхнего уровня</a:t>
+            </a:r>
           </a:p>
         </p:txBody>
       </p:sp>
-      <p:graphicFrame>
-        <p:nvGraphicFramePr>
-          <p:cNvPr id="4" name="Объект 3"/>
-          <p:cNvGraphicFramePr>
-            <a:graphicFrameLocks/>
-          </p:cNvGraphicFramePr>
-          <p:nvPr>
-            <p:extLst>
-              <p:ext uri="{D42A27DB-BD31-4B8C-83A1-F6EECF244321}">
-                <p14:modId xmlns:p14="http://schemas.microsoft.com/office/powerpoint/2010/main" val="3029048048"/>
-              </p:ext>
-            </p:extLst>
-          </p:nvPr>
-        </p:nvGraphicFramePr>
-        <p:xfrm>
-          <a:off x="838200" y="2202974"/>
-          <a:ext cx="10515600" cy="3596640"/>
-        </p:xfrm>
-        <a:graphic>
-          <a:graphicData uri="http://schemas.openxmlformats.org/drawingml/2006/table">
-            <a:tbl>
-              <a:tblPr firstRow="1" bandRow="1">
-                <a:tableStyleId>{5C22544A-7EE6-4342-B048-85BDC9FD1C3A}</a:tableStyleId>
-              </a:tblPr>
-              <a:tblGrid>
-                <a:gridCol w="4431632">
-                  <a:extLst>
-                    <a:ext uri="{9D8B030D-6E8A-4147-A177-3AD203B41FA5}">
-                      <a16:colId xmlns:a16="http://schemas.microsoft.com/office/drawing/2014/main" val="20000"/>
-                    </a:ext>
-                  </a:extLst>
-                </a:gridCol>
-                <a:gridCol w="6083968">
-                  <a:extLst>
-                    <a:ext uri="{9D8B030D-6E8A-4147-A177-3AD203B41FA5}">
-                      <a16:colId xmlns:a16="http://schemas.microsoft.com/office/drawing/2014/main" val="20001"/>
-                    </a:ext>
-                  </a:extLst>
-                </a:gridCol>
-              </a:tblGrid>
-              <a:tr h="195288">
-                <a:tc>
-                  <a:txBody>
-                    <a:bodyPr/>
-                    <a:lstStyle/>
-                    <a:p>
-                      <a:endParaRPr lang="ru-RU" sz="2000" dirty="0">
-                        <a:latin typeface="Calibri" panose="020F0502020204030204" pitchFamily="34" charset="0"/>
-                        <a:ea typeface="Calibri" panose="020F0502020204030204" pitchFamily="34" charset="0"/>
-                        <a:cs typeface="Calibri" panose="020F0502020204030204" pitchFamily="34" charset="0"/>
-                      </a:endParaRPr>
-                    </a:p>
-                  </a:txBody>
-                  <a:tcPr/>
-                </a:tc>
-                <a:tc>
-                  <a:txBody>
-                    <a:bodyPr/>
-                    <a:lstStyle/>
-                    <a:p>
-                      <a:endParaRPr lang="ru-RU" sz="2000" dirty="0">
-                        <a:latin typeface="Calibri" panose="020F0502020204030204" pitchFamily="34" charset="0"/>
-                        <a:ea typeface="Calibri" panose="020F0502020204030204" pitchFamily="34" charset="0"/>
-                        <a:cs typeface="Calibri" panose="020F0502020204030204" pitchFamily="34" charset="0"/>
-                      </a:endParaRPr>
-                    </a:p>
-                  </a:txBody>
-                  <a:tcPr/>
-                </a:tc>
-                <a:extLst>
-                  <a:ext uri="{0D108BD9-81ED-4DB2-BD59-A6C34878D82A}">
-                    <a16:rowId xmlns:a16="http://schemas.microsoft.com/office/drawing/2014/main" val="10000"/>
-                  </a:ext>
-                </a:extLst>
-              </a:tr>
-              <a:tr h="341754">
-                <a:tc>
-                  <a:txBody>
-                    <a:bodyPr/>
-                    <a:lstStyle/>
-                    <a:p>
-                      <a:r>
-                        <a:rPr lang="ru-RU" sz="2000" dirty="0">
-                          <a:latin typeface="Calibri" panose="020F0502020204030204" pitchFamily="34" charset="0"/>
-                          <a:ea typeface="Calibri" panose="020F0502020204030204" pitchFamily="34" charset="0"/>
-                          <a:cs typeface="Calibri" panose="020F0502020204030204" pitchFamily="34" charset="0"/>
-                        </a:rPr>
-                        <a:t>Требования к виду и типам операндов</a:t>
-                      </a:r>
-                    </a:p>
-                  </a:txBody>
-                  <a:tcPr/>
-                </a:tc>
-                <a:tc>
-                  <a:txBody>
-                    <a:bodyPr/>
-                    <a:lstStyle/>
-                    <a:p>
-                      <a:r>
-                        <a:rPr lang="en-US" sz="2000" dirty="0">
-                          <a:latin typeface="Calibri" panose="020F0502020204030204" pitchFamily="34" charset="0"/>
-                          <a:ea typeface="Calibri" panose="020F0502020204030204" pitchFamily="34" charset="0"/>
-                          <a:cs typeface="Calibri" panose="020F0502020204030204" pitchFamily="34" charset="0"/>
-                        </a:rPr>
-                        <a:t>int </a:t>
-                      </a:r>
-                      <a:r>
-                        <a:rPr lang="ru-RU" sz="2000" dirty="0">
-                          <a:latin typeface="Calibri" panose="020F0502020204030204" pitchFamily="34" charset="0"/>
-                          <a:ea typeface="Calibri" panose="020F0502020204030204" pitchFamily="34" charset="0"/>
-                          <a:cs typeface="Calibri" panose="020F0502020204030204" pitchFamily="34" charset="0"/>
-                        </a:rPr>
-                        <a:t>или неявно преобразуется к </a:t>
-                      </a:r>
-                      <a:r>
-                        <a:rPr lang="en-US" sz="2000" dirty="0">
-                          <a:latin typeface="Calibri" panose="020F0502020204030204" pitchFamily="34" charset="0"/>
-                          <a:ea typeface="Calibri" panose="020F0502020204030204" pitchFamily="34" charset="0"/>
-                          <a:cs typeface="Calibri" panose="020F0502020204030204" pitchFamily="34" charset="0"/>
-                        </a:rPr>
-                        <a:t>int</a:t>
-                      </a:r>
-                      <a:endParaRPr lang="ru-RU" sz="2000" dirty="0">
-                        <a:latin typeface="Calibri" panose="020F0502020204030204" pitchFamily="34" charset="0"/>
-                        <a:ea typeface="Calibri" panose="020F0502020204030204" pitchFamily="34" charset="0"/>
-                        <a:cs typeface="Calibri" panose="020F0502020204030204" pitchFamily="34" charset="0"/>
-                      </a:endParaRPr>
-                    </a:p>
-                  </a:txBody>
-                  <a:tcPr/>
-                </a:tc>
-                <a:extLst>
-                  <a:ext uri="{0D108BD9-81ED-4DB2-BD59-A6C34878D82A}">
-                    <a16:rowId xmlns:a16="http://schemas.microsoft.com/office/drawing/2014/main" val="1255083735"/>
-                  </a:ext>
-                </a:extLst>
-              </a:tr>
-              <a:tr h="341754">
-                <a:tc>
-                  <a:txBody>
-                    <a:bodyPr/>
-                    <a:lstStyle/>
-                    <a:p>
-                      <a:r>
-                        <a:rPr lang="ru-RU" sz="2000" dirty="0">
-                          <a:latin typeface="Calibri" panose="020F0502020204030204" pitchFamily="34" charset="0"/>
-                          <a:ea typeface="Calibri" panose="020F0502020204030204" pitchFamily="34" charset="0"/>
-                          <a:cs typeface="Calibri" panose="020F0502020204030204" pitchFamily="34" charset="0"/>
-                        </a:rPr>
-                        <a:t>Правило определения типа результата</a:t>
-                      </a:r>
-                    </a:p>
-                  </a:txBody>
-                  <a:tcPr/>
-                </a:tc>
-                <a:tc>
-                  <a:txBody>
-                    <a:bodyPr/>
-                    <a:lstStyle/>
-                    <a:p>
-                      <a:r>
-                        <a:rPr lang="en-US" sz="2000" dirty="0">
-                          <a:latin typeface="Calibri" panose="020F0502020204030204" pitchFamily="34" charset="0"/>
-                          <a:ea typeface="Calibri" panose="020F0502020204030204" pitchFamily="34" charset="0"/>
-                          <a:cs typeface="Calibri" panose="020F0502020204030204" pitchFamily="34" charset="0"/>
-                        </a:rPr>
-                        <a:t>int</a:t>
-                      </a:r>
-                      <a:endParaRPr lang="ru-RU" sz="2000" dirty="0">
-                        <a:latin typeface="Calibri" panose="020F0502020204030204" pitchFamily="34" charset="0"/>
-                        <a:ea typeface="Calibri" panose="020F0502020204030204" pitchFamily="34" charset="0"/>
-                        <a:cs typeface="Calibri" panose="020F0502020204030204" pitchFamily="34" charset="0"/>
-                      </a:endParaRPr>
-                    </a:p>
-                  </a:txBody>
-                  <a:tcPr/>
-                </a:tc>
-                <a:extLst>
-                  <a:ext uri="{0D108BD9-81ED-4DB2-BD59-A6C34878D82A}">
-                    <a16:rowId xmlns:a16="http://schemas.microsoft.com/office/drawing/2014/main" val="10001"/>
-                  </a:ext>
-                </a:extLst>
-              </a:tr>
-              <a:tr h="195288">
-                <a:tc>
-                  <a:txBody>
-                    <a:bodyPr/>
-                    <a:lstStyle/>
-                    <a:p>
-                      <a:r>
-                        <a:rPr lang="ru-RU" sz="2000" dirty="0">
-                          <a:latin typeface="Calibri" panose="020F0502020204030204" pitchFamily="34" charset="0"/>
-                          <a:ea typeface="Calibri" panose="020F0502020204030204" pitchFamily="34" charset="0"/>
-                          <a:cs typeface="Calibri" panose="020F0502020204030204" pitchFamily="34" charset="0"/>
-                        </a:rPr>
-                        <a:t>Порядок вычисления операндов</a:t>
-                      </a:r>
-                    </a:p>
-                  </a:txBody>
-                  <a:tcPr/>
-                </a:tc>
-                <a:tc>
-                  <a:txBody>
-                    <a:bodyPr/>
-                    <a:lstStyle/>
-                    <a:p>
-                      <a:r>
-                        <a:rPr lang="ru-RU" sz="2000" baseline="0" dirty="0">
-                          <a:latin typeface="Calibri" panose="020F0502020204030204" pitchFamily="34" charset="0"/>
-                          <a:ea typeface="Calibri" panose="020F0502020204030204" pitchFamily="34" charset="0"/>
-                          <a:cs typeface="Calibri" panose="020F0502020204030204" pitchFamily="34" charset="0"/>
-                        </a:rPr>
-                        <a:t>х и потом, возможно, у</a:t>
-                      </a:r>
-                      <a:endParaRPr lang="ru-RU" sz="2000" dirty="0">
-                        <a:latin typeface="Calibri" panose="020F0502020204030204" pitchFamily="34" charset="0"/>
-                        <a:ea typeface="Calibri" panose="020F0502020204030204" pitchFamily="34" charset="0"/>
-                        <a:cs typeface="Calibri" panose="020F0502020204030204" pitchFamily="34" charset="0"/>
-                      </a:endParaRPr>
-                    </a:p>
-                  </a:txBody>
-                  <a:tcPr/>
-                </a:tc>
-                <a:extLst>
-                  <a:ext uri="{0D108BD9-81ED-4DB2-BD59-A6C34878D82A}">
-                    <a16:rowId xmlns:a16="http://schemas.microsoft.com/office/drawing/2014/main" val="469243343"/>
-                  </a:ext>
-                </a:extLst>
-              </a:tr>
-              <a:tr h="341754">
-                <a:tc>
-                  <a:txBody>
-                    <a:bodyPr/>
-                    <a:lstStyle/>
-                    <a:p>
-                      <a:r>
-                        <a:rPr lang="ru-RU" sz="2000" dirty="0">
-                          <a:latin typeface="Calibri" panose="020F0502020204030204" pitchFamily="34" charset="0"/>
-                          <a:ea typeface="Calibri" panose="020F0502020204030204" pitchFamily="34" charset="0"/>
-                          <a:cs typeface="Calibri" panose="020F0502020204030204" pitchFamily="34" charset="0"/>
-                        </a:rPr>
-                        <a:t>Правило вычисления результата</a:t>
-                      </a:r>
-                      <a:endParaRPr lang="en-US" sz="2000" dirty="0">
-                        <a:latin typeface="Calibri" panose="020F0502020204030204" pitchFamily="34" charset="0"/>
-                        <a:ea typeface="Calibri" panose="020F0502020204030204" pitchFamily="34" charset="0"/>
-                        <a:cs typeface="Calibri" panose="020F0502020204030204" pitchFamily="34" charset="0"/>
-                      </a:endParaRPr>
-                    </a:p>
-                  </a:txBody>
-                  <a:tcPr/>
-                </a:tc>
-                <a:tc>
-                  <a:txBody>
-                    <a:bodyPr/>
-                    <a:lstStyle/>
-                    <a:p>
-                      <a:r>
-                        <a:rPr lang="en-US" sz="2000" baseline="0" dirty="0">
-                          <a:latin typeface="Calibri" panose="020F0502020204030204" pitchFamily="34" charset="0"/>
-                          <a:ea typeface="Calibri" panose="020F0502020204030204" pitchFamily="34" charset="0"/>
-                          <a:cs typeface="Calibri" panose="020F0502020204030204" pitchFamily="34" charset="0"/>
-                        </a:rPr>
-                        <a:t>&amp;&amp;</a:t>
-                      </a:r>
-                      <a:r>
-                        <a:rPr lang="ru-RU" sz="2000" baseline="0" dirty="0">
-                          <a:latin typeface="Calibri" panose="020F0502020204030204" pitchFamily="34" charset="0"/>
-                          <a:ea typeface="Calibri" panose="020F0502020204030204" pitchFamily="34" charset="0"/>
-                          <a:cs typeface="Calibri" panose="020F0502020204030204" pitchFamily="34" charset="0"/>
-                        </a:rPr>
-                        <a:t>: если значение </a:t>
-                      </a:r>
-                      <a:r>
-                        <a:rPr lang="en-US" sz="2000" baseline="0" dirty="0">
-                          <a:latin typeface="Calibri" panose="020F0502020204030204" pitchFamily="34" charset="0"/>
-                          <a:ea typeface="Calibri" panose="020F0502020204030204" pitchFamily="34" charset="0"/>
-                          <a:cs typeface="Calibri" panose="020F0502020204030204" pitchFamily="34" charset="0"/>
-                        </a:rPr>
-                        <a:t>(int)</a:t>
-                      </a:r>
-                      <a:r>
-                        <a:rPr lang="ru-RU" sz="2000" baseline="0" dirty="0">
-                          <a:latin typeface="Calibri" panose="020F0502020204030204" pitchFamily="34" charset="0"/>
-                          <a:ea typeface="Calibri" panose="020F0502020204030204" pitchFamily="34" charset="0"/>
-                          <a:cs typeface="Calibri" panose="020F0502020204030204" pitchFamily="34" charset="0"/>
-                        </a:rPr>
-                        <a:t>х == 0, то 0</a:t>
-                      </a:r>
-                      <a:r>
-                        <a:rPr lang="en-US" sz="2000" baseline="0" dirty="0">
-                          <a:latin typeface="Calibri" panose="020F0502020204030204" pitchFamily="34" charset="0"/>
-                          <a:ea typeface="Calibri" panose="020F0502020204030204" pitchFamily="34" charset="0"/>
-                          <a:cs typeface="Calibri" panose="020F0502020204030204" pitchFamily="34" charset="0"/>
-                        </a:rPr>
-                        <a:t>,</a:t>
-                      </a:r>
-                      <a:r>
-                        <a:rPr lang="ru-RU" sz="2000" baseline="0" dirty="0">
-                          <a:latin typeface="Calibri" panose="020F0502020204030204" pitchFamily="34" charset="0"/>
-                          <a:ea typeface="Calibri" panose="020F0502020204030204" pitchFamily="34" charset="0"/>
-                          <a:cs typeface="Calibri" panose="020F0502020204030204" pitchFamily="34" charset="0"/>
-                        </a:rPr>
-                        <a:t> иначе значение !!у</a:t>
-                      </a:r>
-                      <a:endParaRPr lang="en-US" sz="2000" baseline="0" dirty="0">
-                        <a:latin typeface="Calibri" panose="020F0502020204030204" pitchFamily="34" charset="0"/>
-                        <a:ea typeface="Calibri" panose="020F0502020204030204" pitchFamily="34" charset="0"/>
-                        <a:cs typeface="Calibri" panose="020F0502020204030204" pitchFamily="34" charset="0"/>
-                      </a:endParaRPr>
-                    </a:p>
-                    <a:p>
-                      <a:pPr marL="0" marR="0" lvl="0" indent="0" algn="l" defTabSz="914400" rtl="0" eaLnBrk="1" fontAlgn="auto" latinLnBrk="0" hangingPunct="1">
-                        <a:lnSpc>
-                          <a:spcPct val="100000"/>
-                        </a:lnSpc>
-                        <a:spcBef>
-                          <a:spcPts val="0"/>
-                        </a:spcBef>
-                        <a:spcAft>
-                          <a:spcPts val="0"/>
-                        </a:spcAft>
-                        <a:buClrTx/>
-                        <a:buSzTx/>
-                        <a:buFontTx/>
-                        <a:buNone/>
-                        <a:tabLst/>
-                        <a:defRPr/>
-                      </a:pPr>
-                      <a:r>
-                        <a:rPr lang="en-US" sz="2000" baseline="0" dirty="0">
-                          <a:latin typeface="Calibri" panose="020F0502020204030204" pitchFamily="34" charset="0"/>
-                          <a:ea typeface="Calibri" panose="020F0502020204030204" pitchFamily="34" charset="0"/>
-                          <a:cs typeface="Calibri" panose="020F0502020204030204" pitchFamily="34" charset="0"/>
-                        </a:rPr>
-                        <a:t>||:</a:t>
-                      </a:r>
-                      <a:r>
-                        <a:rPr lang="ru-RU" sz="2000" baseline="0" dirty="0">
-                          <a:latin typeface="Calibri" panose="020F0502020204030204" pitchFamily="34" charset="0"/>
-                          <a:ea typeface="Calibri" panose="020F0502020204030204" pitchFamily="34" charset="0"/>
-                          <a:cs typeface="Calibri" panose="020F0502020204030204" pitchFamily="34" charset="0"/>
-                        </a:rPr>
-                        <a:t> если значение </a:t>
-                      </a:r>
-                      <a:r>
-                        <a:rPr lang="en-US" sz="2000" baseline="0" dirty="0">
-                          <a:latin typeface="Calibri" panose="020F0502020204030204" pitchFamily="34" charset="0"/>
-                          <a:ea typeface="Calibri" panose="020F0502020204030204" pitchFamily="34" charset="0"/>
-                          <a:cs typeface="Calibri" panose="020F0502020204030204" pitchFamily="34" charset="0"/>
-                        </a:rPr>
-                        <a:t>(int)</a:t>
-                      </a:r>
-                      <a:r>
-                        <a:rPr lang="ru-RU" sz="2000" baseline="0" dirty="0">
-                          <a:latin typeface="Calibri" panose="020F0502020204030204" pitchFamily="34" charset="0"/>
-                          <a:ea typeface="Calibri" panose="020F0502020204030204" pitchFamily="34" charset="0"/>
-                          <a:cs typeface="Calibri" panose="020F0502020204030204" pitchFamily="34" charset="0"/>
-                        </a:rPr>
-                        <a:t>х </a:t>
-                      </a:r>
-                      <a:r>
-                        <a:rPr lang="en-US" sz="2000" baseline="0" dirty="0">
-                          <a:latin typeface="Calibri" panose="020F0502020204030204" pitchFamily="34" charset="0"/>
-                          <a:ea typeface="Calibri" panose="020F0502020204030204" pitchFamily="34" charset="0"/>
-                          <a:cs typeface="Calibri" panose="020F0502020204030204" pitchFamily="34" charset="0"/>
-                        </a:rPr>
-                        <a:t>!</a:t>
-                      </a:r>
-                      <a:r>
-                        <a:rPr lang="ru-RU" sz="2000" baseline="0" dirty="0">
-                          <a:latin typeface="Calibri" panose="020F0502020204030204" pitchFamily="34" charset="0"/>
-                          <a:ea typeface="Calibri" panose="020F0502020204030204" pitchFamily="34" charset="0"/>
-                          <a:cs typeface="Calibri" panose="020F0502020204030204" pitchFamily="34" charset="0"/>
-                        </a:rPr>
-                        <a:t>= </a:t>
-                      </a:r>
-                      <a:r>
-                        <a:rPr lang="en-US" sz="2000" baseline="0" dirty="0">
-                          <a:latin typeface="Calibri" panose="020F0502020204030204" pitchFamily="34" charset="0"/>
-                          <a:ea typeface="Calibri" panose="020F0502020204030204" pitchFamily="34" charset="0"/>
-                          <a:cs typeface="Calibri" panose="020F0502020204030204" pitchFamily="34" charset="0"/>
-                        </a:rPr>
-                        <a:t>0</a:t>
-                      </a:r>
-                      <a:r>
-                        <a:rPr lang="ru-RU" sz="2000" baseline="0" dirty="0">
-                          <a:latin typeface="Calibri" panose="020F0502020204030204" pitchFamily="34" charset="0"/>
-                          <a:ea typeface="Calibri" panose="020F0502020204030204" pitchFamily="34" charset="0"/>
-                          <a:cs typeface="Calibri" panose="020F0502020204030204" pitchFamily="34" charset="0"/>
-                        </a:rPr>
-                        <a:t>, то 1</a:t>
-                      </a:r>
-                      <a:r>
-                        <a:rPr lang="en-US" sz="2000" baseline="0" dirty="0">
-                          <a:latin typeface="Calibri" panose="020F0502020204030204" pitchFamily="34" charset="0"/>
-                          <a:ea typeface="Calibri" panose="020F0502020204030204" pitchFamily="34" charset="0"/>
-                          <a:cs typeface="Calibri" panose="020F0502020204030204" pitchFamily="34" charset="0"/>
-                        </a:rPr>
-                        <a:t>,</a:t>
-                      </a:r>
-                      <a:r>
-                        <a:rPr lang="ru-RU" sz="2000" baseline="0" dirty="0">
-                          <a:latin typeface="Calibri" panose="020F0502020204030204" pitchFamily="34" charset="0"/>
-                          <a:ea typeface="Calibri" panose="020F0502020204030204" pitchFamily="34" charset="0"/>
-                          <a:cs typeface="Calibri" panose="020F0502020204030204" pitchFamily="34" charset="0"/>
-                        </a:rPr>
-                        <a:t> иначе значение !!</a:t>
-                      </a:r>
-                      <a:r>
-                        <a:rPr lang="en-US" sz="2000" baseline="0" dirty="0">
-                          <a:latin typeface="Calibri" panose="020F0502020204030204" pitchFamily="34" charset="0"/>
-                          <a:ea typeface="Calibri" panose="020F0502020204030204" pitchFamily="34" charset="0"/>
-                          <a:cs typeface="Calibri" panose="020F0502020204030204" pitchFamily="34" charset="0"/>
-                        </a:rPr>
-                        <a:t>y</a:t>
-                      </a:r>
-                    </a:p>
-                    <a:p>
-                      <a:pPr marL="0" marR="0" lvl="0" indent="0" algn="l" defTabSz="914400" rtl="0" eaLnBrk="1" fontAlgn="auto" latinLnBrk="0" hangingPunct="1">
-                        <a:lnSpc>
-                          <a:spcPct val="100000"/>
-                        </a:lnSpc>
-                        <a:spcBef>
-                          <a:spcPts val="0"/>
-                        </a:spcBef>
-                        <a:spcAft>
-                          <a:spcPts val="0"/>
-                        </a:spcAft>
-                        <a:buClrTx/>
-                        <a:buSzTx/>
-                        <a:buFontTx/>
-                        <a:buNone/>
-                        <a:tabLst/>
-                        <a:defRPr/>
-                      </a:pPr>
-                      <a:endParaRPr lang="en-US" sz="2000" baseline="0" dirty="0">
-                        <a:latin typeface="Calibri" panose="020F0502020204030204" pitchFamily="34" charset="0"/>
-                        <a:ea typeface="Calibri" panose="020F0502020204030204" pitchFamily="34" charset="0"/>
-                        <a:cs typeface="Calibri" panose="020F0502020204030204" pitchFamily="34" charset="0"/>
-                      </a:endParaRPr>
-                    </a:p>
-                    <a:p>
-                      <a:pPr marL="0" marR="0" lvl="0" indent="0" algn="l" defTabSz="914400" rtl="0" eaLnBrk="1" fontAlgn="auto" latinLnBrk="0" hangingPunct="1">
-                        <a:lnSpc>
-                          <a:spcPct val="100000"/>
-                        </a:lnSpc>
-                        <a:spcBef>
-                          <a:spcPts val="0"/>
-                        </a:spcBef>
-                        <a:spcAft>
-                          <a:spcPts val="0"/>
-                        </a:spcAft>
-                        <a:buClrTx/>
-                        <a:buSzTx/>
-                        <a:buFontTx/>
-                        <a:buNone/>
-                        <a:tabLst/>
-                        <a:defRPr/>
-                      </a:pPr>
-                      <a:r>
-                        <a:rPr lang="ru-RU" sz="2000" baseline="0" dirty="0">
-                          <a:latin typeface="Calibri" panose="020F0502020204030204" pitchFamily="34" charset="0"/>
-                          <a:ea typeface="Calibri" panose="020F0502020204030204" pitchFamily="34" charset="0"/>
-                          <a:cs typeface="Calibri" panose="020F0502020204030204" pitchFamily="34" charset="0"/>
-                        </a:rPr>
-                        <a:t>Если </a:t>
-                      </a:r>
-                      <a:r>
-                        <a:rPr lang="en-US" sz="2000" dirty="0">
-                          <a:latin typeface="Calibri" panose="020F0502020204030204" pitchFamily="34" charset="0"/>
-                          <a:ea typeface="Calibri" panose="020F0502020204030204" pitchFamily="34" charset="0"/>
-                          <a:cs typeface="Calibri" panose="020F0502020204030204" pitchFamily="34" charset="0"/>
-                        </a:rPr>
-                        <a:t>(int)x </a:t>
-                      </a:r>
-                      <a:r>
-                        <a:rPr lang="ru-RU" sz="2000" dirty="0">
-                          <a:latin typeface="Calibri" panose="020F0502020204030204" pitchFamily="34" charset="0"/>
-                          <a:ea typeface="Calibri" panose="020F0502020204030204" pitchFamily="34" charset="0"/>
-                          <a:cs typeface="Calibri" panose="020F0502020204030204" pitchFamily="34" charset="0"/>
-                        </a:rPr>
-                        <a:t>и/или </a:t>
-                      </a:r>
-                      <a:r>
-                        <a:rPr lang="en-US" sz="2000" dirty="0">
-                          <a:latin typeface="Calibri" panose="020F0502020204030204" pitchFamily="34" charset="0"/>
-                          <a:ea typeface="Calibri" panose="020F0502020204030204" pitchFamily="34" charset="0"/>
-                          <a:cs typeface="Calibri" panose="020F0502020204030204" pitchFamily="34" charset="0"/>
-                        </a:rPr>
-                        <a:t>(int)y </a:t>
-                      </a:r>
-                      <a:r>
-                        <a:rPr lang="ru-RU" sz="2000" dirty="0">
-                          <a:latin typeface="Calibri" panose="020F0502020204030204" pitchFamily="34" charset="0"/>
-                          <a:ea typeface="Calibri" panose="020F0502020204030204" pitchFamily="34" charset="0"/>
-                          <a:cs typeface="Calibri" panose="020F0502020204030204" pitchFamily="34" charset="0"/>
-                        </a:rPr>
-                        <a:t>является </a:t>
-                      </a:r>
-                      <a:r>
-                        <a:rPr lang="en-US" sz="2000" dirty="0">
-                          <a:latin typeface="Calibri" panose="020F0502020204030204" pitchFamily="34" charset="0"/>
-                          <a:ea typeface="Calibri" panose="020F0502020204030204" pitchFamily="34" charset="0"/>
-                          <a:cs typeface="Calibri" panose="020F0502020204030204" pitchFamily="34" charset="0"/>
-                        </a:rPr>
-                        <a:t>implementation-defined</a:t>
-                      </a:r>
-                      <a:r>
-                        <a:rPr lang="ru-RU" sz="2000" dirty="0">
-                          <a:latin typeface="Calibri" panose="020F0502020204030204" pitchFamily="34" charset="0"/>
-                          <a:ea typeface="Calibri" panose="020F0502020204030204" pitchFamily="34" charset="0"/>
-                          <a:cs typeface="Calibri" panose="020F0502020204030204" pitchFamily="34" charset="0"/>
-                        </a:rPr>
-                        <a:t>, то </a:t>
-                      </a:r>
-                      <a:r>
-                        <a:rPr lang="en-US" sz="2000" dirty="0">
-                          <a:latin typeface="Calibri" panose="020F0502020204030204" pitchFamily="34" charset="0"/>
-                          <a:ea typeface="Calibri" panose="020F0502020204030204" pitchFamily="34" charset="0"/>
-                          <a:cs typeface="Calibri" panose="020F0502020204030204" pitchFamily="34" charset="0"/>
-                        </a:rPr>
-                        <a:t>implementation-defined</a:t>
-                      </a:r>
-                      <a:r>
-                        <a:rPr lang="ru-RU" sz="2000" dirty="0">
-                          <a:latin typeface="Calibri" panose="020F0502020204030204" pitchFamily="34" charset="0"/>
-                          <a:ea typeface="Calibri" panose="020F0502020204030204" pitchFamily="34" charset="0"/>
-                          <a:cs typeface="Calibri" panose="020F0502020204030204" pitchFamily="34" charset="0"/>
-                        </a:rPr>
-                        <a:t>, иначе </a:t>
-                      </a:r>
-                      <a:r>
-                        <a:rPr lang="en-US" sz="2000" dirty="0">
-                          <a:latin typeface="Calibri" panose="020F0502020204030204" pitchFamily="34" charset="0"/>
-                          <a:ea typeface="Calibri" panose="020F0502020204030204" pitchFamily="34" charset="0"/>
-                          <a:cs typeface="Calibri" panose="020F0502020204030204" pitchFamily="34" charset="0"/>
-                        </a:rPr>
-                        <a:t>w</a:t>
-                      </a:r>
-                      <a:r>
-                        <a:rPr lang="en-US" sz="2000" baseline="0" dirty="0">
-                          <a:latin typeface="Calibri" panose="020F0502020204030204" pitchFamily="34" charset="0"/>
-                          <a:ea typeface="Calibri" panose="020F0502020204030204" pitchFamily="34" charset="0"/>
-                          <a:cs typeface="Calibri" panose="020F0502020204030204" pitchFamily="34" charset="0"/>
-                        </a:rPr>
-                        <a:t>ell-defined</a:t>
-                      </a:r>
-                      <a:endParaRPr lang="ru-RU" sz="2000" dirty="0">
-                        <a:latin typeface="Calibri" panose="020F0502020204030204" pitchFamily="34" charset="0"/>
-                        <a:ea typeface="Calibri" panose="020F0502020204030204" pitchFamily="34" charset="0"/>
-                        <a:cs typeface="Calibri" panose="020F0502020204030204" pitchFamily="34" charset="0"/>
-                      </a:endParaRPr>
-                    </a:p>
-                  </a:txBody>
-                  <a:tcPr/>
-                </a:tc>
-                <a:extLst>
-                  <a:ext uri="{0D108BD9-81ED-4DB2-BD59-A6C34878D82A}">
-                    <a16:rowId xmlns:a16="http://schemas.microsoft.com/office/drawing/2014/main" val="10003"/>
-                  </a:ext>
-                </a:extLst>
-              </a:tr>
-              <a:tr h="341754">
-                <a:tc>
-                  <a:txBody>
-                    <a:bodyPr/>
-                    <a:lstStyle/>
-                    <a:p>
-                      <a:r>
-                        <a:rPr lang="ru-RU" sz="2000" dirty="0">
-                          <a:latin typeface="Calibri" panose="020F0502020204030204" pitchFamily="34" charset="0"/>
-                          <a:ea typeface="Calibri" panose="020F0502020204030204" pitchFamily="34" charset="0"/>
-                          <a:cs typeface="Calibri" panose="020F0502020204030204" pitchFamily="34" charset="0"/>
-                        </a:rPr>
-                        <a:t>Побочные эффекты</a:t>
-                      </a:r>
-                    </a:p>
-                  </a:txBody>
-                  <a:tcPr/>
-                </a:tc>
-                <a:tc>
-                  <a:txBody>
-                    <a:bodyPr/>
-                    <a:lstStyle/>
-                    <a:p>
-                      <a:r>
-                        <a:rPr lang="ru-RU" sz="2000" dirty="0">
-                          <a:latin typeface="Calibri" panose="020F0502020204030204" pitchFamily="34" charset="0"/>
-                          <a:ea typeface="Calibri" panose="020F0502020204030204" pitchFamily="34" charset="0"/>
-                          <a:cs typeface="Calibri" panose="020F0502020204030204" pitchFamily="34" charset="0"/>
-                        </a:rPr>
-                        <a:t>Нет</a:t>
-                      </a:r>
-                    </a:p>
-                  </a:txBody>
-                  <a:tcPr/>
-                </a:tc>
-                <a:extLst>
-                  <a:ext uri="{0D108BD9-81ED-4DB2-BD59-A6C34878D82A}">
-                    <a16:rowId xmlns:a16="http://schemas.microsoft.com/office/drawing/2014/main" val="1663341479"/>
-                  </a:ext>
-                </a:extLst>
-              </a:tr>
-            </a:tbl>
-          </a:graphicData>
-        </a:graphic>
-      </p:graphicFrame>
       <p:sp>
         <p:nvSpPr>
-          <p:cNvPr id="5" name="Slide Number Placeholder 4"/>
+          <p:cNvPr id="4" name="Slide Number Placeholder 3"/>
           <p:cNvSpPr>
             <a:spLocks noGrp="1"/>
           </p:cNvSpPr>
@@ -9799,7 +9759,7 @@
     </p:spTree>
     <p:extLst>
       <p:ext uri="{BB962C8B-B14F-4D97-AF65-F5344CB8AC3E}">
-        <p14:creationId xmlns:p14="http://schemas.microsoft.com/office/powerpoint/2010/main" val="1037326794"/>
+        <p14:creationId xmlns:p14="http://schemas.microsoft.com/office/powerpoint/2010/main" val="2708752862"/>
       </p:ext>
     </p:extLst>
   </p:cSld>
@@ -9894,16 +9854,24 @@
               <a:t>Связывание операторов с операндами</a:t>
             </a:r>
             <a:r>
-              <a:rPr lang="en-US"/>
+              <a:rPr lang="en-US" dirty="0"/>
               <a:t>:</a:t>
             </a:r>
             <a:r>
-              <a:rPr lang="ru-RU"/>
+              <a:rPr lang="ru-RU" dirty="0"/>
               <a:t> </a:t>
             </a:r>
             <a:r>
+              <a:rPr lang="ru-RU" dirty="0">
+                <a:highlight>
+                  <a:srgbClr val="C0C0C0"/>
+                </a:highlight>
+              </a:rPr>
+              <a:t>постфиксные</a:t>
+            </a:r>
+            <a:r>
               <a:rPr lang="ru-RU" dirty="0"/>
-              <a:t>постфиксные </a:t>
+              <a:t> </a:t>
             </a:r>
             <a:r>
               <a:rPr lang="en-US" dirty="0"/>
@@ -9911,7 +9879,15 @@
             </a:r>
             <a:r>
               <a:rPr lang="ru-RU" dirty="0"/>
-              <a:t> префиксные</a:t>
+              <a:t> </a:t>
+            </a:r>
+            <a:r>
+              <a:rPr lang="ru-RU" dirty="0">
+                <a:highlight>
+                  <a:srgbClr val="FF00FF"/>
+                </a:highlight>
+              </a:rPr>
+              <a:t>префиксные</a:t>
             </a:r>
             <a:r>
               <a:rPr lang="en-US" dirty="0"/>
@@ -9919,17 +9895,53 @@
             </a:r>
             <a:r>
               <a:rPr lang="ru-RU" dirty="0"/>
-              <a:t> бинарные по убыванию приоритета</a:t>
-            </a:r>
-            <a:r>
-              <a:rPr lang="en-US" dirty="0"/>
-              <a:t> c </a:t>
-            </a:r>
-            <a:r>
-              <a:rPr lang="ru-RU" dirty="0"/>
-              <a:t>учетом ассоциативности</a:t>
-            </a:r>
-            <a:endParaRPr lang="en-US" dirty="0"/>
+              <a:t> </a:t>
+            </a:r>
+            <a:r>
+              <a:rPr lang="ru-RU" dirty="0">
+                <a:highlight>
+                  <a:srgbClr val="00FF00"/>
+                </a:highlight>
+              </a:rPr>
+              <a:t>бинарные по убыванию приоритета</a:t>
+            </a:r>
+            <a:r>
+              <a:rPr lang="en-US" dirty="0">
+                <a:highlight>
+                  <a:srgbClr val="00FF00"/>
+                </a:highlight>
+              </a:rPr>
+              <a:t> </a:t>
+            </a:r>
+            <a:r>
+              <a:rPr lang="ru-RU" dirty="0">
+                <a:highlight>
+                  <a:srgbClr val="00FF00"/>
+                </a:highlight>
+              </a:rPr>
+              <a:t>+</a:t>
+            </a:r>
+            <a:r>
+              <a:rPr lang="en-US" dirty="0">
+                <a:highlight>
+                  <a:srgbClr val="00FF00"/>
+                </a:highlight>
+              </a:rPr>
+              <a:t> </a:t>
+            </a:r>
+            <a:r>
+              <a:rPr lang="ru-RU" dirty="0">
+                <a:highlight>
+                  <a:srgbClr val="00FF00"/>
+                </a:highlight>
+              </a:rPr>
+              <a:t>учет ассоциативности</a:t>
+            </a:r>
+            <a:endParaRPr lang="en-US" dirty="0">
+              <a:highlight>
+                <a:srgbClr val="00FF00"/>
+              </a:highlight>
+            </a:endParaRPr>
           </a:p>
           <a:p>
             <a:pPr lvl="1"/>
@@ -10077,7 +10089,7 @@
             </a:r>
             <a:r>
               <a:rPr lang="ru-RU" dirty="0"/>
-              <a:t> – это последовательность операторов, операндов и скобок</a:t>
+              <a:t> – это последовательность операторов и операндов</a:t>
             </a:r>
           </a:p>
           <a:p>
@@ -10937,14 +10949,6 @@
               <a:rPr lang="ru-RU" dirty="0"/>
               <a:t>Связывание с операндами</a:t>
             </a:r>
-            <a:r>
-              <a:rPr lang="en-US" dirty="0"/>
-              <a:t> </a:t>
-            </a:r>
-            <a:r>
-              <a:rPr lang="ru-RU" dirty="0"/>
-              <a:t>при отсутствии скобок</a:t>
-            </a:r>
           </a:p>
         </p:txBody>
       </p:sp>
@@ -11105,7 +11109,10 @@
           <a:bodyPr/>
           <a:lstStyle/>
           <a:p>
-            <a:endParaRPr lang="ru-RU"/>
+            <a:r>
+              <a:rPr lang="ru-RU" dirty="0"/>
+              <a:t>Пример с неявной расстановкой скобок</a:t>
+            </a:r>
           </a:p>
         </p:txBody>
       </p:sp>
@@ -12539,27 +12546,7 @@
                 <a:effectLst/>
                 <a:latin typeface="Consolas" panose="020B0609020204030204" pitchFamily="49" charset="0"/>
               </a:rPr>
-              <a:t>// в </a:t>
-            </a:r>
-            <a:r>
-              <a:rPr lang="ru-RU" b="0" dirty="0" err="1">
-                <a:solidFill>
-                  <a:srgbClr val="8B949E"/>
-                </a:solidFill>
-                <a:effectLst/>
-                <a:latin typeface="Consolas" panose="020B0609020204030204" pitchFamily="49" charset="0"/>
-              </a:rPr>
-              <a:t>произ</a:t>
-            </a:r>
-            <a:r>
-              <a:rPr lang="ru-RU" b="0" dirty="0">
-                <a:solidFill>
-                  <a:srgbClr val="8B949E"/>
-                </a:solidFill>
-                <a:effectLst/>
-                <a:latin typeface="Consolas" panose="020B0609020204030204" pitchFamily="49" charset="0"/>
-              </a:rPr>
-              <a:t>. порядке: 1</a:t>
+              <a:t>// в произв. порядке: 1</a:t>
             </a:r>
             <a:r>
               <a:rPr lang="en-US" b="0" dirty="0">
@@ -12728,7 +12715,7 @@
             <p:ph idx="1"/>
             <p:extLst>
               <p:ext uri="{D42A27DB-BD31-4B8C-83A1-F6EECF244321}">
-                <p14:modId xmlns:p14="http://schemas.microsoft.com/office/powerpoint/2010/main" val="2622921352"/>
+                <p14:modId xmlns:p14="http://schemas.microsoft.com/office/powerpoint/2010/main" val="724956222"/>
               </p:ext>
             </p:extLst>
           </p:nvPr>
@@ -13842,7 +13829,7 @@
                           <a:ea typeface="Calibri" panose="020F0502020204030204" pitchFamily="34" charset="0"/>
                           <a:cs typeface="Calibri" panose="020F0502020204030204" pitchFamily="34" charset="0"/>
                         </a:rPr>
-                        <a:t>Побитовое НЕ</a:t>
+                        <a:t>Поразрядное НЕ</a:t>
                       </a:r>
                     </a:p>
                   </a:txBody>
